--- a/开题PPT-张世杰.pptx
+++ b/开题PPT-张世杰.pptx
@@ -7,30 +7,28 @@
     <p:sldMasterId id="2147483672" r:id="rId3"/>
   </p:sldMasterIdLst>
   <p:notesMasterIdLst>
-    <p:notesMasterId r:id="rId17"/>
+    <p:notesMasterId r:id="rId15"/>
   </p:notesMasterIdLst>
   <p:handoutMasterIdLst>
-    <p:handoutMasterId r:id="rId18"/>
+    <p:handoutMasterId r:id="rId16"/>
   </p:handoutMasterIdLst>
   <p:sldIdLst>
     <p:sldId id="1693" r:id="rId4"/>
     <p:sldId id="1728" r:id="rId5"/>
     <p:sldId id="1730" r:id="rId6"/>
     <p:sldId id="1732" r:id="rId7"/>
-    <p:sldId id="1758" r:id="rId8"/>
-    <p:sldId id="1759" r:id="rId9"/>
-    <p:sldId id="1760" r:id="rId10"/>
-    <p:sldId id="1761" r:id="rId11"/>
-    <p:sldId id="1762" r:id="rId12"/>
-    <p:sldId id="1763" r:id="rId13"/>
-    <p:sldId id="1764" r:id="rId14"/>
-    <p:sldId id="1765" r:id="rId15"/>
-    <p:sldId id="1731" r:id="rId16"/>
+    <p:sldId id="1759" r:id="rId8"/>
+    <p:sldId id="1760" r:id="rId9"/>
+    <p:sldId id="1761" r:id="rId10"/>
+    <p:sldId id="1762" r:id="rId11"/>
+    <p:sldId id="1764" r:id="rId12"/>
+    <p:sldId id="1765" r:id="rId13"/>
+    <p:sldId id="1731" r:id="rId14"/>
   </p:sldIdLst>
   <p:sldSz cx="9144000" cy="6858000" type="screen4x3"/>
   <p:notesSz cx="6858000" cy="9144000"/>
   <p:custDataLst>
-    <p:tags r:id="rId19"/>
+    <p:tags r:id="rId17"/>
   </p:custDataLst>
   <p:defaultTextStyle>
     <a:defPPr>
@@ -1059,556 +1057,6 @@
         <p:cNvPr id="1" name="">
           <a:extLst>
             <a:ext uri="{FF2B5EF4-FFF2-40B4-BE49-F238E27FC236}">
-              <a16:creationId xmlns:a16="http://schemas.microsoft.com/office/drawing/2014/main" id="{21D348A2-E257-ABD5-ADB4-D25B30EB228E}"/>
-            </a:ext>
-          </a:extLst>
-        </p:cNvPr>
-        <p:cNvGrpSpPr/>
-        <p:nvPr/>
-      </p:nvGrpSpPr>
-      <p:grpSpPr>
-        <a:xfrm>
-          <a:off x="0" y="0"/>
-          <a:ext cx="0" cy="0"/>
-          <a:chOff x="0" y="0"/>
-          <a:chExt cx="0" cy="0"/>
-        </a:xfrm>
-      </p:grpSpPr>
-      <p:sp>
-        <p:nvSpPr>
-          <p:cNvPr id="7170" name="幻灯片图像占位符 1">
-            <a:extLst>
-              <a:ext uri="{FF2B5EF4-FFF2-40B4-BE49-F238E27FC236}">
-                <a16:creationId xmlns:a16="http://schemas.microsoft.com/office/drawing/2014/main" id="{DCCB873C-CCB4-116A-A922-E99ED8B60C2D}"/>
-              </a:ext>
-            </a:extLst>
-          </p:cNvPr>
-          <p:cNvSpPr>
-            <a:spLocks noGrp="1" noRot="1" noChangeAspect="1" noTextEdit="1"/>
-          </p:cNvSpPr>
-          <p:nvPr>
-            <p:ph type="sldImg"/>
-          </p:nvPr>
-        </p:nvSpPr>
-        <p:spPr/>
-      </p:sp>
-      <p:sp>
-        <p:nvSpPr>
-          <p:cNvPr id="7171" name="备注占位符 2">
-            <a:extLst>
-              <a:ext uri="{FF2B5EF4-FFF2-40B4-BE49-F238E27FC236}">
-                <a16:creationId xmlns:a16="http://schemas.microsoft.com/office/drawing/2014/main" id="{36A7BBBB-D288-481F-5E52-43B95D05D9EA}"/>
-              </a:ext>
-            </a:extLst>
-          </p:cNvPr>
-          <p:cNvSpPr>
-            <a:spLocks noGrp="1"/>
-          </p:cNvSpPr>
-          <p:nvPr>
-            <p:ph type="body" idx="1"/>
-          </p:nvPr>
-        </p:nvSpPr>
-        <p:spPr>
-          <a:noFill/>
-          <a:extLst>
-            <a:ext uri="{909E8E84-426E-40DD-AFC4-6F175D3DCCD1}">
-              <a14:hiddenFill xmlns:a14="http://schemas.microsoft.com/office/drawing/2010/main">
-                <a:solidFill>
-                  <a:srgbClr val="FFFFFF"/>
-                </a:solidFill>
-              </a14:hiddenFill>
-            </a:ext>
-            <a:ext uri="{91240B29-F687-4F45-9708-019B960494DF}">
-              <a14:hiddenLine xmlns:a14="http://schemas.microsoft.com/office/drawing/2010/main" w="9525">
-                <a:solidFill>
-                  <a:srgbClr val="000000"/>
-                </a:solidFill>
-                <a:miter lim="800000"/>
-                <a:headEnd/>
-                <a:tailEnd/>
-              </a14:hiddenLine>
-            </a:ext>
-          </a:extLst>
-        </p:spPr>
-        <p:txBody>
-          <a:bodyPr/>
-          <a:lstStyle/>
-          <a:p>
-            <a:pPr marL="0" marR="0" lvl="0" indent="0" algn="l" defTabSz="914400" rtl="0" eaLnBrk="1" fontAlgn="auto" latinLnBrk="0" hangingPunct="1">
-              <a:lnSpc>
-                <a:spcPct val="100000"/>
-              </a:lnSpc>
-              <a:spcBef>
-                <a:spcPts val="0"/>
-              </a:spcBef>
-              <a:spcAft>
-                <a:spcPts val="0"/>
-              </a:spcAft>
-              <a:buClrTx/>
-              <a:buSzTx/>
-              <a:buFontTx/>
-              <a:buNone/>
-              <a:tabLst/>
-              <a:defRPr/>
-            </a:pPr>
-            <a:r>
-              <a:rPr lang="zh-CN" altLang="en-US" dirty="0"/>
-              <a:t>我将从以上三个部分进行汇报，首先是研究背景与意义。</a:t>
-            </a:r>
-          </a:p>
-        </p:txBody>
-      </p:sp>
-      <p:sp>
-        <p:nvSpPr>
-          <p:cNvPr id="7172" name="灯片编号占位符 3">
-            <a:extLst>
-              <a:ext uri="{FF2B5EF4-FFF2-40B4-BE49-F238E27FC236}">
-                <a16:creationId xmlns:a16="http://schemas.microsoft.com/office/drawing/2014/main" id="{90F6081C-0D7C-4862-C26E-894A179CC63B}"/>
-              </a:ext>
-            </a:extLst>
-          </p:cNvPr>
-          <p:cNvSpPr txBox="1">
-            <a:spLocks noGrp="1"/>
-          </p:cNvSpPr>
-          <p:nvPr/>
-        </p:nvSpPr>
-        <p:spPr bwMode="auto">
-          <a:xfrm>
-            <a:off x="3884613" y="8685213"/>
-            <a:ext cx="2971800" cy="457200"/>
-          </a:xfrm>
-          <a:prstGeom prst="rect">
-            <a:avLst/>
-          </a:prstGeom>
-          <a:noFill/>
-          <a:ln>
-            <a:noFill/>
-          </a:ln>
-          <a:extLst>
-            <a:ext uri="{909E8E84-426E-40DD-AFC4-6F175D3DCCD1}">
-              <a14:hiddenFill xmlns:a14="http://schemas.microsoft.com/office/drawing/2010/main">
-                <a:solidFill>
-                  <a:srgbClr val="FFFFFF"/>
-                </a:solidFill>
-              </a14:hiddenFill>
-            </a:ext>
-            <a:ext uri="{91240B29-F687-4F45-9708-019B960494DF}">
-              <a14:hiddenLine xmlns:a14="http://schemas.microsoft.com/office/drawing/2010/main" w="9525">
-                <a:solidFill>
-                  <a:srgbClr val="000000"/>
-                </a:solidFill>
-                <a:miter lim="800000"/>
-                <a:headEnd/>
-                <a:tailEnd/>
-              </a14:hiddenLine>
-            </a:ext>
-          </a:extLst>
-        </p:spPr>
-        <p:txBody>
-          <a:bodyPr anchor="b"/>
-          <a:lstStyle>
-            <a:lvl1pPr>
-              <a:defRPr>
-                <a:solidFill>
-                  <a:schemeClr val="tx1"/>
-                </a:solidFill>
-                <a:latin typeface="Arial" panose="020B0604020202020204" pitchFamily="34" charset="0"/>
-                <a:ea typeface="宋体" panose="02010600030101010101" pitchFamily="2" charset="-122"/>
-              </a:defRPr>
-            </a:lvl1pPr>
-            <a:lvl2pPr marL="742950" indent="-285750">
-              <a:defRPr>
-                <a:solidFill>
-                  <a:schemeClr val="tx1"/>
-                </a:solidFill>
-                <a:latin typeface="Arial" panose="020B0604020202020204" pitchFamily="34" charset="0"/>
-                <a:ea typeface="宋体" panose="02010600030101010101" pitchFamily="2" charset="-122"/>
-              </a:defRPr>
-            </a:lvl2pPr>
-            <a:lvl3pPr marL="1143000" indent="-228600">
-              <a:defRPr>
-                <a:solidFill>
-                  <a:schemeClr val="tx1"/>
-                </a:solidFill>
-                <a:latin typeface="Arial" panose="020B0604020202020204" pitchFamily="34" charset="0"/>
-                <a:ea typeface="宋体" panose="02010600030101010101" pitchFamily="2" charset="-122"/>
-              </a:defRPr>
-            </a:lvl3pPr>
-            <a:lvl4pPr marL="1600200" indent="-228600">
-              <a:defRPr>
-                <a:solidFill>
-                  <a:schemeClr val="tx1"/>
-                </a:solidFill>
-                <a:latin typeface="Arial" panose="020B0604020202020204" pitchFamily="34" charset="0"/>
-                <a:ea typeface="宋体" panose="02010600030101010101" pitchFamily="2" charset="-122"/>
-              </a:defRPr>
-            </a:lvl4pPr>
-            <a:lvl5pPr marL="2057400" indent="-228600">
-              <a:defRPr>
-                <a:solidFill>
-                  <a:schemeClr val="tx1"/>
-                </a:solidFill>
-                <a:latin typeface="Arial" panose="020B0604020202020204" pitchFamily="34" charset="0"/>
-                <a:ea typeface="宋体" panose="02010600030101010101" pitchFamily="2" charset="-122"/>
-              </a:defRPr>
-            </a:lvl5pPr>
-            <a:lvl6pPr marL="2514600" indent="-228600" eaLnBrk="0" fontAlgn="base" hangingPunct="0">
-              <a:spcBef>
-                <a:spcPct val="0"/>
-              </a:spcBef>
-              <a:spcAft>
-                <a:spcPct val="0"/>
-              </a:spcAft>
-              <a:defRPr>
-                <a:solidFill>
-                  <a:schemeClr val="tx1"/>
-                </a:solidFill>
-                <a:latin typeface="Arial" panose="020B0604020202020204" pitchFamily="34" charset="0"/>
-                <a:ea typeface="宋体" panose="02010600030101010101" pitchFamily="2" charset="-122"/>
-              </a:defRPr>
-            </a:lvl6pPr>
-            <a:lvl7pPr marL="2971800" indent="-228600" eaLnBrk="0" fontAlgn="base" hangingPunct="0">
-              <a:spcBef>
-                <a:spcPct val="0"/>
-              </a:spcBef>
-              <a:spcAft>
-                <a:spcPct val="0"/>
-              </a:spcAft>
-              <a:defRPr>
-                <a:solidFill>
-                  <a:schemeClr val="tx1"/>
-                </a:solidFill>
-                <a:latin typeface="Arial" panose="020B0604020202020204" pitchFamily="34" charset="0"/>
-                <a:ea typeface="宋体" panose="02010600030101010101" pitchFamily="2" charset="-122"/>
-              </a:defRPr>
-            </a:lvl7pPr>
-            <a:lvl8pPr marL="3429000" indent="-228600" eaLnBrk="0" fontAlgn="base" hangingPunct="0">
-              <a:spcBef>
-                <a:spcPct val="0"/>
-              </a:spcBef>
-              <a:spcAft>
-                <a:spcPct val="0"/>
-              </a:spcAft>
-              <a:defRPr>
-                <a:solidFill>
-                  <a:schemeClr val="tx1"/>
-                </a:solidFill>
-                <a:latin typeface="Arial" panose="020B0604020202020204" pitchFamily="34" charset="0"/>
-                <a:ea typeface="宋体" panose="02010600030101010101" pitchFamily="2" charset="-122"/>
-              </a:defRPr>
-            </a:lvl8pPr>
-            <a:lvl9pPr marL="3886200" indent="-228600" eaLnBrk="0" fontAlgn="base" hangingPunct="0">
-              <a:spcBef>
-                <a:spcPct val="0"/>
-              </a:spcBef>
-              <a:spcAft>
-                <a:spcPct val="0"/>
-              </a:spcAft>
-              <a:defRPr>
-                <a:solidFill>
-                  <a:schemeClr val="tx1"/>
-                </a:solidFill>
-                <a:latin typeface="Arial" panose="020B0604020202020204" pitchFamily="34" charset="0"/>
-                <a:ea typeface="宋体" panose="02010600030101010101" pitchFamily="2" charset="-122"/>
-              </a:defRPr>
-            </a:lvl9pPr>
-          </a:lstStyle>
-          <a:p>
-            <a:pPr algn="r" eaLnBrk="1" hangingPunct="1"/>
-            <a:fld id="{7320F324-9791-4BF9-A7C3-08429EEC3E5C}" type="slidenum">
-              <a:rPr lang="en-US" altLang="zh-CN" sz="1200"/>
-              <a:t>10</a:t>
-            </a:fld>
-            <a:endParaRPr lang="en-US" altLang="zh-CN" sz="1200"/>
-          </a:p>
-        </p:txBody>
-      </p:sp>
-    </p:spTree>
-    <p:extLst>
-      <p:ext uri="{BB962C8B-B14F-4D97-AF65-F5344CB8AC3E}">
-        <p14:creationId xmlns:p14="http://schemas.microsoft.com/office/powerpoint/2010/main" val="3676382856"/>
-      </p:ext>
-    </p:extLst>
-  </p:cSld>
-  <p:clrMapOvr>
-    <a:masterClrMapping/>
-  </p:clrMapOvr>
-</p:notes>
-</file>
-
-<file path=ppt/notesSlides/notesSlide11.xml><?xml version="1.0" encoding="utf-8"?>
-<p:notes xmlns:a="http://schemas.openxmlformats.org/drawingml/2006/main" xmlns:r="http://schemas.openxmlformats.org/officeDocument/2006/relationships" xmlns:p="http://schemas.openxmlformats.org/presentationml/2006/main">
-  <p:cSld>
-    <p:spTree>
-      <p:nvGrpSpPr>
-        <p:cNvPr id="1" name="">
-          <a:extLst>
-            <a:ext uri="{FF2B5EF4-FFF2-40B4-BE49-F238E27FC236}">
-              <a16:creationId xmlns:a16="http://schemas.microsoft.com/office/drawing/2014/main" id="{17EAA344-9408-7CD2-C251-CBF3EFC18801}"/>
-            </a:ext>
-          </a:extLst>
-        </p:cNvPr>
-        <p:cNvGrpSpPr/>
-        <p:nvPr/>
-      </p:nvGrpSpPr>
-      <p:grpSpPr>
-        <a:xfrm>
-          <a:off x="0" y="0"/>
-          <a:ext cx="0" cy="0"/>
-          <a:chOff x="0" y="0"/>
-          <a:chExt cx="0" cy="0"/>
-        </a:xfrm>
-      </p:grpSpPr>
-      <p:sp>
-        <p:nvSpPr>
-          <p:cNvPr id="7170" name="幻灯片图像占位符 1">
-            <a:extLst>
-              <a:ext uri="{FF2B5EF4-FFF2-40B4-BE49-F238E27FC236}">
-                <a16:creationId xmlns:a16="http://schemas.microsoft.com/office/drawing/2014/main" id="{4F82EF37-E525-1ED1-910E-CC2D490B0991}"/>
-              </a:ext>
-            </a:extLst>
-          </p:cNvPr>
-          <p:cNvSpPr>
-            <a:spLocks noGrp="1" noRot="1" noChangeAspect="1" noTextEdit="1"/>
-          </p:cNvSpPr>
-          <p:nvPr>
-            <p:ph type="sldImg"/>
-          </p:nvPr>
-        </p:nvSpPr>
-        <p:spPr/>
-      </p:sp>
-      <p:sp>
-        <p:nvSpPr>
-          <p:cNvPr id="7171" name="备注占位符 2">
-            <a:extLst>
-              <a:ext uri="{FF2B5EF4-FFF2-40B4-BE49-F238E27FC236}">
-                <a16:creationId xmlns:a16="http://schemas.microsoft.com/office/drawing/2014/main" id="{355CCF5E-6BCB-7A7A-FA5E-9C7632A07D98}"/>
-              </a:ext>
-            </a:extLst>
-          </p:cNvPr>
-          <p:cNvSpPr>
-            <a:spLocks noGrp="1"/>
-          </p:cNvSpPr>
-          <p:nvPr>
-            <p:ph type="body" idx="1"/>
-          </p:nvPr>
-        </p:nvSpPr>
-        <p:spPr>
-          <a:noFill/>
-          <a:extLst>
-            <a:ext uri="{909E8E84-426E-40DD-AFC4-6F175D3DCCD1}">
-              <a14:hiddenFill xmlns:a14="http://schemas.microsoft.com/office/drawing/2010/main">
-                <a:solidFill>
-                  <a:srgbClr val="FFFFFF"/>
-                </a:solidFill>
-              </a14:hiddenFill>
-            </a:ext>
-            <a:ext uri="{91240B29-F687-4F45-9708-019B960494DF}">
-              <a14:hiddenLine xmlns:a14="http://schemas.microsoft.com/office/drawing/2010/main" w="9525">
-                <a:solidFill>
-                  <a:srgbClr val="000000"/>
-                </a:solidFill>
-                <a:miter lim="800000"/>
-                <a:headEnd/>
-                <a:tailEnd/>
-              </a14:hiddenLine>
-            </a:ext>
-          </a:extLst>
-        </p:spPr>
-        <p:txBody>
-          <a:bodyPr/>
-          <a:lstStyle/>
-          <a:p>
-            <a:endParaRPr lang="zh-CN" altLang="en-US" dirty="0"/>
-          </a:p>
-        </p:txBody>
-      </p:sp>
-      <p:sp>
-        <p:nvSpPr>
-          <p:cNvPr id="7172" name="灯片编号占位符 3">
-            <a:extLst>
-              <a:ext uri="{FF2B5EF4-FFF2-40B4-BE49-F238E27FC236}">
-                <a16:creationId xmlns:a16="http://schemas.microsoft.com/office/drawing/2014/main" id="{D88A9717-E4AA-58D8-A659-F87194ED1A42}"/>
-              </a:ext>
-            </a:extLst>
-          </p:cNvPr>
-          <p:cNvSpPr txBox="1">
-            <a:spLocks noGrp="1"/>
-          </p:cNvSpPr>
-          <p:nvPr/>
-        </p:nvSpPr>
-        <p:spPr bwMode="auto">
-          <a:xfrm>
-            <a:off x="3884613" y="8685213"/>
-            <a:ext cx="2971800" cy="457200"/>
-          </a:xfrm>
-          <a:prstGeom prst="rect">
-            <a:avLst/>
-          </a:prstGeom>
-          <a:noFill/>
-          <a:ln>
-            <a:noFill/>
-          </a:ln>
-          <a:extLst>
-            <a:ext uri="{909E8E84-426E-40DD-AFC4-6F175D3DCCD1}">
-              <a14:hiddenFill xmlns:a14="http://schemas.microsoft.com/office/drawing/2010/main">
-                <a:solidFill>
-                  <a:srgbClr val="FFFFFF"/>
-                </a:solidFill>
-              </a14:hiddenFill>
-            </a:ext>
-            <a:ext uri="{91240B29-F687-4F45-9708-019B960494DF}">
-              <a14:hiddenLine xmlns:a14="http://schemas.microsoft.com/office/drawing/2010/main" w="9525">
-                <a:solidFill>
-                  <a:srgbClr val="000000"/>
-                </a:solidFill>
-                <a:miter lim="800000"/>
-                <a:headEnd/>
-                <a:tailEnd/>
-              </a14:hiddenLine>
-            </a:ext>
-          </a:extLst>
-        </p:spPr>
-        <p:txBody>
-          <a:bodyPr anchor="b"/>
-          <a:lstStyle>
-            <a:lvl1pPr>
-              <a:defRPr>
-                <a:solidFill>
-                  <a:schemeClr val="tx1"/>
-                </a:solidFill>
-                <a:latin typeface="Arial" panose="020B0604020202020204" pitchFamily="34" charset="0"/>
-                <a:ea typeface="宋体" panose="02010600030101010101" pitchFamily="2" charset="-122"/>
-              </a:defRPr>
-            </a:lvl1pPr>
-            <a:lvl2pPr marL="742950" indent="-285750">
-              <a:defRPr>
-                <a:solidFill>
-                  <a:schemeClr val="tx1"/>
-                </a:solidFill>
-                <a:latin typeface="Arial" panose="020B0604020202020204" pitchFamily="34" charset="0"/>
-                <a:ea typeface="宋体" panose="02010600030101010101" pitchFamily="2" charset="-122"/>
-              </a:defRPr>
-            </a:lvl2pPr>
-            <a:lvl3pPr marL="1143000" indent="-228600">
-              <a:defRPr>
-                <a:solidFill>
-                  <a:schemeClr val="tx1"/>
-                </a:solidFill>
-                <a:latin typeface="Arial" panose="020B0604020202020204" pitchFamily="34" charset="0"/>
-                <a:ea typeface="宋体" panose="02010600030101010101" pitchFamily="2" charset="-122"/>
-              </a:defRPr>
-            </a:lvl3pPr>
-            <a:lvl4pPr marL="1600200" indent="-228600">
-              <a:defRPr>
-                <a:solidFill>
-                  <a:schemeClr val="tx1"/>
-                </a:solidFill>
-                <a:latin typeface="Arial" panose="020B0604020202020204" pitchFamily="34" charset="0"/>
-                <a:ea typeface="宋体" panose="02010600030101010101" pitchFamily="2" charset="-122"/>
-              </a:defRPr>
-            </a:lvl4pPr>
-            <a:lvl5pPr marL="2057400" indent="-228600">
-              <a:defRPr>
-                <a:solidFill>
-                  <a:schemeClr val="tx1"/>
-                </a:solidFill>
-                <a:latin typeface="Arial" panose="020B0604020202020204" pitchFamily="34" charset="0"/>
-                <a:ea typeface="宋体" panose="02010600030101010101" pitchFamily="2" charset="-122"/>
-              </a:defRPr>
-            </a:lvl5pPr>
-            <a:lvl6pPr marL="2514600" indent="-228600" eaLnBrk="0" fontAlgn="base" hangingPunct="0">
-              <a:spcBef>
-                <a:spcPct val="0"/>
-              </a:spcBef>
-              <a:spcAft>
-                <a:spcPct val="0"/>
-              </a:spcAft>
-              <a:defRPr>
-                <a:solidFill>
-                  <a:schemeClr val="tx1"/>
-                </a:solidFill>
-                <a:latin typeface="Arial" panose="020B0604020202020204" pitchFamily="34" charset="0"/>
-                <a:ea typeface="宋体" panose="02010600030101010101" pitchFamily="2" charset="-122"/>
-              </a:defRPr>
-            </a:lvl6pPr>
-            <a:lvl7pPr marL="2971800" indent="-228600" eaLnBrk="0" fontAlgn="base" hangingPunct="0">
-              <a:spcBef>
-                <a:spcPct val="0"/>
-              </a:spcBef>
-              <a:spcAft>
-                <a:spcPct val="0"/>
-              </a:spcAft>
-              <a:defRPr>
-                <a:solidFill>
-                  <a:schemeClr val="tx1"/>
-                </a:solidFill>
-                <a:latin typeface="Arial" panose="020B0604020202020204" pitchFamily="34" charset="0"/>
-                <a:ea typeface="宋体" panose="02010600030101010101" pitchFamily="2" charset="-122"/>
-              </a:defRPr>
-            </a:lvl7pPr>
-            <a:lvl8pPr marL="3429000" indent="-228600" eaLnBrk="0" fontAlgn="base" hangingPunct="0">
-              <a:spcBef>
-                <a:spcPct val="0"/>
-              </a:spcBef>
-              <a:spcAft>
-                <a:spcPct val="0"/>
-              </a:spcAft>
-              <a:defRPr>
-                <a:solidFill>
-                  <a:schemeClr val="tx1"/>
-                </a:solidFill>
-                <a:latin typeface="Arial" panose="020B0604020202020204" pitchFamily="34" charset="0"/>
-                <a:ea typeface="宋体" panose="02010600030101010101" pitchFamily="2" charset="-122"/>
-              </a:defRPr>
-            </a:lvl8pPr>
-            <a:lvl9pPr marL="3886200" indent="-228600" eaLnBrk="0" fontAlgn="base" hangingPunct="0">
-              <a:spcBef>
-                <a:spcPct val="0"/>
-              </a:spcBef>
-              <a:spcAft>
-                <a:spcPct val="0"/>
-              </a:spcAft>
-              <a:defRPr>
-                <a:solidFill>
-                  <a:schemeClr val="tx1"/>
-                </a:solidFill>
-                <a:latin typeface="Arial" panose="020B0604020202020204" pitchFamily="34" charset="0"/>
-                <a:ea typeface="宋体" panose="02010600030101010101" pitchFamily="2" charset="-122"/>
-              </a:defRPr>
-            </a:lvl9pPr>
-          </a:lstStyle>
-          <a:p>
-            <a:pPr algn="r" eaLnBrk="1" hangingPunct="1"/>
-            <a:fld id="{7320F324-9791-4BF9-A7C3-08429EEC3E5C}" type="slidenum">
-              <a:rPr lang="en-US" altLang="zh-CN" sz="1200"/>
-              <a:t>11</a:t>
-            </a:fld>
-            <a:endParaRPr lang="en-US" altLang="zh-CN" sz="1200"/>
-          </a:p>
-        </p:txBody>
-      </p:sp>
-    </p:spTree>
-    <p:extLst>
-      <p:ext uri="{BB962C8B-B14F-4D97-AF65-F5344CB8AC3E}">
-        <p14:creationId xmlns:p14="http://schemas.microsoft.com/office/powerpoint/2010/main" val="1821332381"/>
-      </p:ext>
-    </p:extLst>
-  </p:cSld>
-  <p:clrMapOvr>
-    <a:masterClrMapping/>
-  </p:clrMapOvr>
-</p:notes>
-</file>
-
-<file path=ppt/notesSlides/notesSlide12.xml><?xml version="1.0" encoding="utf-8"?>
-<p:notes xmlns:a="http://schemas.openxmlformats.org/drawingml/2006/main" xmlns:r="http://schemas.openxmlformats.org/officeDocument/2006/relationships" xmlns:p="http://schemas.openxmlformats.org/presentationml/2006/main">
-  <p:cSld>
-    <p:spTree>
-      <p:nvGrpSpPr>
-        <p:cNvPr id="1" name="">
-          <a:extLst>
-            <a:ext uri="{FF2B5EF4-FFF2-40B4-BE49-F238E27FC236}">
               <a16:creationId xmlns:a16="http://schemas.microsoft.com/office/drawing/2014/main" id="{13095401-C99B-81D7-5999-2A0CABF49283}"/>
             </a:ext>
           </a:extLst>
@@ -1847,7 +1295,7 @@
             <a:pPr algn="r" eaLnBrk="1" hangingPunct="1"/>
             <a:fld id="{7320F324-9791-4BF9-A7C3-08429EEC3E5C}" type="slidenum">
               <a:rPr lang="en-US" altLang="zh-CN" sz="1200"/>
-              <a:t>12</a:t>
+              <a:t>10</a:t>
             </a:fld>
             <a:endParaRPr lang="en-US" altLang="zh-CN" sz="1200"/>
           </a:p>
@@ -1866,7 +1314,7 @@
 </p:notes>
 </file>
 
-<file path=ppt/notesSlides/notesSlide13.xml><?xml version="1.0" encoding="utf-8"?>
+<file path=ppt/notesSlides/notesSlide11.xml><?xml version="1.0" encoding="utf-8"?>
 <p:notes xmlns:a="http://schemas.openxmlformats.org/drawingml/2006/main" xmlns:r="http://schemas.openxmlformats.org/officeDocument/2006/relationships" xmlns:p="http://schemas.openxmlformats.org/presentationml/2006/main">
   <p:cSld>
     <p:spTree>
@@ -2112,7 +1560,7 @@
             <a:pPr algn="r" eaLnBrk="1" hangingPunct="1"/>
             <a:fld id="{7320F324-9791-4BF9-A7C3-08429EEC3E5C}" type="slidenum">
               <a:rPr lang="en-US" altLang="zh-CN" sz="1200"/>
-              <a:t>13</a:t>
+              <a:t>11</a:t>
             </a:fld>
             <a:endParaRPr lang="en-US" altLang="zh-CN" sz="1200"/>
           </a:p>
@@ -3023,291 +2471,6 @@
         <p:cNvPr id="1" name="">
           <a:extLst>
             <a:ext uri="{FF2B5EF4-FFF2-40B4-BE49-F238E27FC236}">
-              <a16:creationId xmlns:a16="http://schemas.microsoft.com/office/drawing/2014/main" id="{CDB145F9-008C-34A0-A963-D1C789FB457B}"/>
-            </a:ext>
-          </a:extLst>
-        </p:cNvPr>
-        <p:cNvGrpSpPr/>
-        <p:nvPr/>
-      </p:nvGrpSpPr>
-      <p:grpSpPr>
-        <a:xfrm>
-          <a:off x="0" y="0"/>
-          <a:ext cx="0" cy="0"/>
-          <a:chOff x="0" y="0"/>
-          <a:chExt cx="0" cy="0"/>
-        </a:xfrm>
-      </p:grpSpPr>
-      <p:sp>
-        <p:nvSpPr>
-          <p:cNvPr id="7170" name="幻灯片图像占位符 1">
-            <a:extLst>
-              <a:ext uri="{FF2B5EF4-FFF2-40B4-BE49-F238E27FC236}">
-                <a16:creationId xmlns:a16="http://schemas.microsoft.com/office/drawing/2014/main" id="{ADC11C4C-79C6-C843-21DA-02B15AD9A1B9}"/>
-              </a:ext>
-            </a:extLst>
-          </p:cNvPr>
-          <p:cNvSpPr>
-            <a:spLocks noGrp="1" noRot="1" noChangeAspect="1" noTextEdit="1"/>
-          </p:cNvSpPr>
-          <p:nvPr>
-            <p:ph type="sldImg"/>
-          </p:nvPr>
-        </p:nvSpPr>
-        <p:spPr/>
-      </p:sp>
-      <p:sp>
-        <p:nvSpPr>
-          <p:cNvPr id="7171" name="备注占位符 2">
-            <a:extLst>
-              <a:ext uri="{FF2B5EF4-FFF2-40B4-BE49-F238E27FC236}">
-                <a16:creationId xmlns:a16="http://schemas.microsoft.com/office/drawing/2014/main" id="{96DA4014-84DE-BE4C-0172-E398E47EE876}"/>
-              </a:ext>
-            </a:extLst>
-          </p:cNvPr>
-          <p:cNvSpPr>
-            <a:spLocks noGrp="1"/>
-          </p:cNvSpPr>
-          <p:nvPr>
-            <p:ph type="body" idx="1"/>
-          </p:nvPr>
-        </p:nvSpPr>
-        <p:spPr>
-          <a:noFill/>
-          <a:extLst>
-            <a:ext uri="{909E8E84-426E-40DD-AFC4-6F175D3DCCD1}">
-              <a14:hiddenFill xmlns:a14="http://schemas.microsoft.com/office/drawing/2010/main">
-                <a:solidFill>
-                  <a:srgbClr val="FFFFFF"/>
-                </a:solidFill>
-              </a14:hiddenFill>
-            </a:ext>
-            <a:ext uri="{91240B29-F687-4F45-9708-019B960494DF}">
-              <a14:hiddenLine xmlns:a14="http://schemas.microsoft.com/office/drawing/2010/main" w="9525">
-                <a:solidFill>
-                  <a:srgbClr val="000000"/>
-                </a:solidFill>
-                <a:miter lim="800000"/>
-                <a:headEnd/>
-                <a:tailEnd/>
-              </a14:hiddenLine>
-            </a:ext>
-          </a:extLst>
-        </p:spPr>
-        <p:txBody>
-          <a:bodyPr/>
-          <a:lstStyle/>
-          <a:p>
-            <a:pPr marL="0" marR="0" lvl="0" indent="0" algn="l" defTabSz="914400" rtl="0" eaLnBrk="1" fontAlgn="auto" latinLnBrk="0" hangingPunct="1">
-              <a:lnSpc>
-                <a:spcPct val="100000"/>
-              </a:lnSpc>
-              <a:spcBef>
-                <a:spcPts val="0"/>
-              </a:spcBef>
-              <a:spcAft>
-                <a:spcPts val="0"/>
-              </a:spcAft>
-              <a:buClrTx/>
-              <a:buSzTx/>
-              <a:buFontTx/>
-              <a:buNone/>
-              <a:tabLst/>
-              <a:defRPr/>
-            </a:pPr>
-            <a:r>
-              <a:rPr lang="zh-CN" altLang="en-US" dirty="0"/>
-              <a:t>我将从以上三个部分进行汇报，首先是研究背景与意义。</a:t>
-            </a:r>
-          </a:p>
-        </p:txBody>
-      </p:sp>
-      <p:sp>
-        <p:nvSpPr>
-          <p:cNvPr id="7172" name="灯片编号占位符 3">
-            <a:extLst>
-              <a:ext uri="{FF2B5EF4-FFF2-40B4-BE49-F238E27FC236}">
-                <a16:creationId xmlns:a16="http://schemas.microsoft.com/office/drawing/2014/main" id="{3CA5E312-214A-FD80-A800-EDD70F870135}"/>
-              </a:ext>
-            </a:extLst>
-          </p:cNvPr>
-          <p:cNvSpPr txBox="1">
-            <a:spLocks noGrp="1"/>
-          </p:cNvSpPr>
-          <p:nvPr/>
-        </p:nvSpPr>
-        <p:spPr bwMode="auto">
-          <a:xfrm>
-            <a:off x="3884613" y="8685213"/>
-            <a:ext cx="2971800" cy="457200"/>
-          </a:xfrm>
-          <a:prstGeom prst="rect">
-            <a:avLst/>
-          </a:prstGeom>
-          <a:noFill/>
-          <a:ln>
-            <a:noFill/>
-          </a:ln>
-          <a:extLst>
-            <a:ext uri="{909E8E84-426E-40DD-AFC4-6F175D3DCCD1}">
-              <a14:hiddenFill xmlns:a14="http://schemas.microsoft.com/office/drawing/2010/main">
-                <a:solidFill>
-                  <a:srgbClr val="FFFFFF"/>
-                </a:solidFill>
-              </a14:hiddenFill>
-            </a:ext>
-            <a:ext uri="{91240B29-F687-4F45-9708-019B960494DF}">
-              <a14:hiddenLine xmlns:a14="http://schemas.microsoft.com/office/drawing/2010/main" w="9525">
-                <a:solidFill>
-                  <a:srgbClr val="000000"/>
-                </a:solidFill>
-                <a:miter lim="800000"/>
-                <a:headEnd/>
-                <a:tailEnd/>
-              </a14:hiddenLine>
-            </a:ext>
-          </a:extLst>
-        </p:spPr>
-        <p:txBody>
-          <a:bodyPr anchor="b"/>
-          <a:lstStyle>
-            <a:lvl1pPr>
-              <a:defRPr>
-                <a:solidFill>
-                  <a:schemeClr val="tx1"/>
-                </a:solidFill>
-                <a:latin typeface="Arial" panose="020B0604020202020204" pitchFamily="34" charset="0"/>
-                <a:ea typeface="宋体" panose="02010600030101010101" pitchFamily="2" charset="-122"/>
-              </a:defRPr>
-            </a:lvl1pPr>
-            <a:lvl2pPr marL="742950" indent="-285750">
-              <a:defRPr>
-                <a:solidFill>
-                  <a:schemeClr val="tx1"/>
-                </a:solidFill>
-                <a:latin typeface="Arial" panose="020B0604020202020204" pitchFamily="34" charset="0"/>
-                <a:ea typeface="宋体" panose="02010600030101010101" pitchFamily="2" charset="-122"/>
-              </a:defRPr>
-            </a:lvl2pPr>
-            <a:lvl3pPr marL="1143000" indent="-228600">
-              <a:defRPr>
-                <a:solidFill>
-                  <a:schemeClr val="tx1"/>
-                </a:solidFill>
-                <a:latin typeface="Arial" panose="020B0604020202020204" pitchFamily="34" charset="0"/>
-                <a:ea typeface="宋体" panose="02010600030101010101" pitchFamily="2" charset="-122"/>
-              </a:defRPr>
-            </a:lvl3pPr>
-            <a:lvl4pPr marL="1600200" indent="-228600">
-              <a:defRPr>
-                <a:solidFill>
-                  <a:schemeClr val="tx1"/>
-                </a:solidFill>
-                <a:latin typeface="Arial" panose="020B0604020202020204" pitchFamily="34" charset="0"/>
-                <a:ea typeface="宋体" panose="02010600030101010101" pitchFamily="2" charset="-122"/>
-              </a:defRPr>
-            </a:lvl4pPr>
-            <a:lvl5pPr marL="2057400" indent="-228600">
-              <a:defRPr>
-                <a:solidFill>
-                  <a:schemeClr val="tx1"/>
-                </a:solidFill>
-                <a:latin typeface="Arial" panose="020B0604020202020204" pitchFamily="34" charset="0"/>
-                <a:ea typeface="宋体" panose="02010600030101010101" pitchFamily="2" charset="-122"/>
-              </a:defRPr>
-            </a:lvl5pPr>
-            <a:lvl6pPr marL="2514600" indent="-228600" eaLnBrk="0" fontAlgn="base" hangingPunct="0">
-              <a:spcBef>
-                <a:spcPct val="0"/>
-              </a:spcBef>
-              <a:spcAft>
-                <a:spcPct val="0"/>
-              </a:spcAft>
-              <a:defRPr>
-                <a:solidFill>
-                  <a:schemeClr val="tx1"/>
-                </a:solidFill>
-                <a:latin typeface="Arial" panose="020B0604020202020204" pitchFamily="34" charset="0"/>
-                <a:ea typeface="宋体" panose="02010600030101010101" pitchFamily="2" charset="-122"/>
-              </a:defRPr>
-            </a:lvl6pPr>
-            <a:lvl7pPr marL="2971800" indent="-228600" eaLnBrk="0" fontAlgn="base" hangingPunct="0">
-              <a:spcBef>
-                <a:spcPct val="0"/>
-              </a:spcBef>
-              <a:spcAft>
-                <a:spcPct val="0"/>
-              </a:spcAft>
-              <a:defRPr>
-                <a:solidFill>
-                  <a:schemeClr val="tx1"/>
-                </a:solidFill>
-                <a:latin typeface="Arial" panose="020B0604020202020204" pitchFamily="34" charset="0"/>
-                <a:ea typeface="宋体" panose="02010600030101010101" pitchFamily="2" charset="-122"/>
-              </a:defRPr>
-            </a:lvl7pPr>
-            <a:lvl8pPr marL="3429000" indent="-228600" eaLnBrk="0" fontAlgn="base" hangingPunct="0">
-              <a:spcBef>
-                <a:spcPct val="0"/>
-              </a:spcBef>
-              <a:spcAft>
-                <a:spcPct val="0"/>
-              </a:spcAft>
-              <a:defRPr>
-                <a:solidFill>
-                  <a:schemeClr val="tx1"/>
-                </a:solidFill>
-                <a:latin typeface="Arial" panose="020B0604020202020204" pitchFamily="34" charset="0"/>
-                <a:ea typeface="宋体" panose="02010600030101010101" pitchFamily="2" charset="-122"/>
-              </a:defRPr>
-            </a:lvl8pPr>
-            <a:lvl9pPr marL="3886200" indent="-228600" eaLnBrk="0" fontAlgn="base" hangingPunct="0">
-              <a:spcBef>
-                <a:spcPct val="0"/>
-              </a:spcBef>
-              <a:spcAft>
-                <a:spcPct val="0"/>
-              </a:spcAft>
-              <a:defRPr>
-                <a:solidFill>
-                  <a:schemeClr val="tx1"/>
-                </a:solidFill>
-                <a:latin typeface="Arial" panose="020B0604020202020204" pitchFamily="34" charset="0"/>
-                <a:ea typeface="宋体" panose="02010600030101010101" pitchFamily="2" charset="-122"/>
-              </a:defRPr>
-            </a:lvl9pPr>
-          </a:lstStyle>
-          <a:p>
-            <a:pPr algn="r" eaLnBrk="1" hangingPunct="1"/>
-            <a:fld id="{7320F324-9791-4BF9-A7C3-08429EEC3E5C}" type="slidenum">
-              <a:rPr lang="en-US" altLang="zh-CN" sz="1200"/>
-              <a:t>5</a:t>
-            </a:fld>
-            <a:endParaRPr lang="en-US" altLang="zh-CN" sz="1200"/>
-          </a:p>
-        </p:txBody>
-      </p:sp>
-    </p:spTree>
-    <p:extLst>
-      <p:ext uri="{BB962C8B-B14F-4D97-AF65-F5344CB8AC3E}">
-        <p14:creationId xmlns:p14="http://schemas.microsoft.com/office/powerpoint/2010/main" val="1958242773"/>
-      </p:ext>
-    </p:extLst>
-  </p:cSld>
-  <p:clrMapOvr>
-    <a:masterClrMapping/>
-  </p:clrMapOvr>
-</p:notes>
-</file>
-
-<file path=ppt/notesSlides/notesSlide6.xml><?xml version="1.0" encoding="utf-8"?>
-<p:notes xmlns:a="http://schemas.openxmlformats.org/drawingml/2006/main" xmlns:r="http://schemas.openxmlformats.org/officeDocument/2006/relationships" xmlns:p="http://schemas.openxmlformats.org/presentationml/2006/main">
-  <p:cSld>
-    <p:spTree>
-      <p:nvGrpSpPr>
-        <p:cNvPr id="1" name="">
-          <a:extLst>
-            <a:ext uri="{FF2B5EF4-FFF2-40B4-BE49-F238E27FC236}">
               <a16:creationId xmlns:a16="http://schemas.microsoft.com/office/drawing/2014/main" id="{790051D0-453F-BEC7-D215-0D797E2BB3D7}"/>
             </a:ext>
           </a:extLst>
@@ -3584,7 +2747,7 @@
             <a:pPr algn="r" eaLnBrk="1" hangingPunct="1"/>
             <a:fld id="{7320F324-9791-4BF9-A7C3-08429EEC3E5C}" type="slidenum">
               <a:rPr lang="en-US" altLang="zh-CN" sz="1200"/>
-              <a:t>6</a:t>
+              <a:t>5</a:t>
             </a:fld>
             <a:endParaRPr lang="en-US" altLang="zh-CN" sz="1200"/>
           </a:p>
@@ -3603,7 +2766,7 @@
 </p:notes>
 </file>
 
-<file path=ppt/notesSlides/notesSlide7.xml><?xml version="1.0" encoding="utf-8"?>
+<file path=ppt/notesSlides/notesSlide6.xml><?xml version="1.0" encoding="utf-8"?>
 <p:notes xmlns:a="http://schemas.openxmlformats.org/drawingml/2006/main" xmlns:r="http://schemas.openxmlformats.org/officeDocument/2006/relationships" xmlns:p="http://schemas.openxmlformats.org/presentationml/2006/main">
   <p:cSld>
     <p:spTree>
@@ -3883,7 +3046,7 @@
             <a:pPr algn="r" eaLnBrk="1" hangingPunct="1"/>
             <a:fld id="{7320F324-9791-4BF9-A7C3-08429EEC3E5C}" type="slidenum">
               <a:rPr lang="en-US" altLang="zh-CN" sz="1200"/>
-              <a:t>7</a:t>
+              <a:t>6</a:t>
             </a:fld>
             <a:endParaRPr lang="en-US" altLang="zh-CN" sz="1200"/>
           </a:p>
@@ -3902,7 +3065,7 @@
 </p:notes>
 </file>
 
-<file path=ppt/notesSlides/notesSlide8.xml><?xml version="1.0" encoding="utf-8"?>
+<file path=ppt/notesSlides/notesSlide7.xml><?xml version="1.0" encoding="utf-8"?>
 <p:notes xmlns:a="http://schemas.openxmlformats.org/drawingml/2006/main" xmlns:r="http://schemas.openxmlformats.org/officeDocument/2006/relationships" xmlns:p="http://schemas.openxmlformats.org/presentationml/2006/main">
   <p:cSld>
     <p:spTree>
@@ -4175,7 +3338,7 @@
             <a:pPr algn="r" eaLnBrk="1" hangingPunct="1"/>
             <a:fld id="{7320F324-9791-4BF9-A7C3-08429EEC3E5C}" type="slidenum">
               <a:rPr lang="en-US" altLang="zh-CN" sz="1200"/>
-              <a:t>8</a:t>
+              <a:t>7</a:t>
             </a:fld>
             <a:endParaRPr lang="en-US" altLang="zh-CN" sz="1200"/>
           </a:p>
@@ -4194,7 +3357,7 @@
 </p:notes>
 </file>
 
-<file path=ppt/notesSlides/notesSlide9.xml><?xml version="1.0" encoding="utf-8"?>
+<file path=ppt/notesSlides/notesSlide8.xml><?xml version="1.0" encoding="utf-8"?>
 <p:notes xmlns:a="http://schemas.openxmlformats.org/drawingml/2006/main" xmlns:r="http://schemas.openxmlformats.org/officeDocument/2006/relationships" xmlns:p="http://schemas.openxmlformats.org/presentationml/2006/main">
   <p:cSld>
     <p:spTree>
@@ -4501,7 +3664,7 @@
             <a:pPr algn="r" eaLnBrk="1" hangingPunct="1"/>
             <a:fld id="{7320F324-9791-4BF9-A7C3-08429EEC3E5C}" type="slidenum">
               <a:rPr lang="en-US" altLang="zh-CN" sz="1200"/>
-              <a:t>9</a:t>
+              <a:t>8</a:t>
             </a:fld>
             <a:endParaRPr lang="en-US" altLang="zh-CN" sz="1200"/>
           </a:p>
@@ -4511,6 +3674,271 @@
     <p:extLst>
       <p:ext uri="{BB962C8B-B14F-4D97-AF65-F5344CB8AC3E}">
         <p14:creationId xmlns:p14="http://schemas.microsoft.com/office/powerpoint/2010/main" val="2880995613"/>
+      </p:ext>
+    </p:extLst>
+  </p:cSld>
+  <p:clrMapOvr>
+    <a:masterClrMapping/>
+  </p:clrMapOvr>
+</p:notes>
+</file>
+
+<file path=ppt/notesSlides/notesSlide9.xml><?xml version="1.0" encoding="utf-8"?>
+<p:notes xmlns:a="http://schemas.openxmlformats.org/drawingml/2006/main" xmlns:r="http://schemas.openxmlformats.org/officeDocument/2006/relationships" xmlns:p="http://schemas.openxmlformats.org/presentationml/2006/main">
+  <p:cSld>
+    <p:spTree>
+      <p:nvGrpSpPr>
+        <p:cNvPr id="1" name="">
+          <a:extLst>
+            <a:ext uri="{FF2B5EF4-FFF2-40B4-BE49-F238E27FC236}">
+              <a16:creationId xmlns:a16="http://schemas.microsoft.com/office/drawing/2014/main" id="{17EAA344-9408-7CD2-C251-CBF3EFC18801}"/>
+            </a:ext>
+          </a:extLst>
+        </p:cNvPr>
+        <p:cNvGrpSpPr/>
+        <p:nvPr/>
+      </p:nvGrpSpPr>
+      <p:grpSpPr>
+        <a:xfrm>
+          <a:off x="0" y="0"/>
+          <a:ext cx="0" cy="0"/>
+          <a:chOff x="0" y="0"/>
+          <a:chExt cx="0" cy="0"/>
+        </a:xfrm>
+      </p:grpSpPr>
+      <p:sp>
+        <p:nvSpPr>
+          <p:cNvPr id="7170" name="幻灯片图像占位符 1">
+            <a:extLst>
+              <a:ext uri="{FF2B5EF4-FFF2-40B4-BE49-F238E27FC236}">
+                <a16:creationId xmlns:a16="http://schemas.microsoft.com/office/drawing/2014/main" id="{4F82EF37-E525-1ED1-910E-CC2D490B0991}"/>
+              </a:ext>
+            </a:extLst>
+          </p:cNvPr>
+          <p:cNvSpPr>
+            <a:spLocks noGrp="1" noRot="1" noChangeAspect="1" noTextEdit="1"/>
+          </p:cNvSpPr>
+          <p:nvPr>
+            <p:ph type="sldImg"/>
+          </p:nvPr>
+        </p:nvSpPr>
+        <p:spPr/>
+      </p:sp>
+      <p:sp>
+        <p:nvSpPr>
+          <p:cNvPr id="7171" name="备注占位符 2">
+            <a:extLst>
+              <a:ext uri="{FF2B5EF4-FFF2-40B4-BE49-F238E27FC236}">
+                <a16:creationId xmlns:a16="http://schemas.microsoft.com/office/drawing/2014/main" id="{355CCF5E-6BCB-7A7A-FA5E-9C7632A07D98}"/>
+              </a:ext>
+            </a:extLst>
+          </p:cNvPr>
+          <p:cNvSpPr>
+            <a:spLocks noGrp="1"/>
+          </p:cNvSpPr>
+          <p:nvPr>
+            <p:ph type="body" idx="1"/>
+          </p:nvPr>
+        </p:nvSpPr>
+        <p:spPr>
+          <a:noFill/>
+          <a:extLst>
+            <a:ext uri="{909E8E84-426E-40DD-AFC4-6F175D3DCCD1}">
+              <a14:hiddenFill xmlns:a14="http://schemas.microsoft.com/office/drawing/2010/main">
+                <a:solidFill>
+                  <a:srgbClr val="FFFFFF"/>
+                </a:solidFill>
+              </a14:hiddenFill>
+            </a:ext>
+            <a:ext uri="{91240B29-F687-4F45-9708-019B960494DF}">
+              <a14:hiddenLine xmlns:a14="http://schemas.microsoft.com/office/drawing/2010/main" w="9525">
+                <a:solidFill>
+                  <a:srgbClr val="000000"/>
+                </a:solidFill>
+                <a:miter lim="800000"/>
+                <a:headEnd/>
+                <a:tailEnd/>
+              </a14:hiddenLine>
+            </a:ext>
+          </a:extLst>
+        </p:spPr>
+        <p:txBody>
+          <a:bodyPr/>
+          <a:lstStyle/>
+          <a:p>
+            <a:endParaRPr lang="zh-CN" altLang="en-US" dirty="0"/>
+          </a:p>
+        </p:txBody>
+      </p:sp>
+      <p:sp>
+        <p:nvSpPr>
+          <p:cNvPr id="7172" name="灯片编号占位符 3">
+            <a:extLst>
+              <a:ext uri="{FF2B5EF4-FFF2-40B4-BE49-F238E27FC236}">
+                <a16:creationId xmlns:a16="http://schemas.microsoft.com/office/drawing/2014/main" id="{D88A9717-E4AA-58D8-A659-F87194ED1A42}"/>
+              </a:ext>
+            </a:extLst>
+          </p:cNvPr>
+          <p:cNvSpPr txBox="1">
+            <a:spLocks noGrp="1"/>
+          </p:cNvSpPr>
+          <p:nvPr/>
+        </p:nvSpPr>
+        <p:spPr bwMode="auto">
+          <a:xfrm>
+            <a:off x="3884613" y="8685213"/>
+            <a:ext cx="2971800" cy="457200"/>
+          </a:xfrm>
+          <a:prstGeom prst="rect">
+            <a:avLst/>
+          </a:prstGeom>
+          <a:noFill/>
+          <a:ln>
+            <a:noFill/>
+          </a:ln>
+          <a:extLst>
+            <a:ext uri="{909E8E84-426E-40DD-AFC4-6F175D3DCCD1}">
+              <a14:hiddenFill xmlns:a14="http://schemas.microsoft.com/office/drawing/2010/main">
+                <a:solidFill>
+                  <a:srgbClr val="FFFFFF"/>
+                </a:solidFill>
+              </a14:hiddenFill>
+            </a:ext>
+            <a:ext uri="{91240B29-F687-4F45-9708-019B960494DF}">
+              <a14:hiddenLine xmlns:a14="http://schemas.microsoft.com/office/drawing/2010/main" w="9525">
+                <a:solidFill>
+                  <a:srgbClr val="000000"/>
+                </a:solidFill>
+                <a:miter lim="800000"/>
+                <a:headEnd/>
+                <a:tailEnd/>
+              </a14:hiddenLine>
+            </a:ext>
+          </a:extLst>
+        </p:spPr>
+        <p:txBody>
+          <a:bodyPr anchor="b"/>
+          <a:lstStyle>
+            <a:lvl1pPr>
+              <a:defRPr>
+                <a:solidFill>
+                  <a:schemeClr val="tx1"/>
+                </a:solidFill>
+                <a:latin typeface="Arial" panose="020B0604020202020204" pitchFamily="34" charset="0"/>
+                <a:ea typeface="宋体" panose="02010600030101010101" pitchFamily="2" charset="-122"/>
+              </a:defRPr>
+            </a:lvl1pPr>
+            <a:lvl2pPr marL="742950" indent="-285750">
+              <a:defRPr>
+                <a:solidFill>
+                  <a:schemeClr val="tx1"/>
+                </a:solidFill>
+                <a:latin typeface="Arial" panose="020B0604020202020204" pitchFamily="34" charset="0"/>
+                <a:ea typeface="宋体" panose="02010600030101010101" pitchFamily="2" charset="-122"/>
+              </a:defRPr>
+            </a:lvl2pPr>
+            <a:lvl3pPr marL="1143000" indent="-228600">
+              <a:defRPr>
+                <a:solidFill>
+                  <a:schemeClr val="tx1"/>
+                </a:solidFill>
+                <a:latin typeface="Arial" panose="020B0604020202020204" pitchFamily="34" charset="0"/>
+                <a:ea typeface="宋体" panose="02010600030101010101" pitchFamily="2" charset="-122"/>
+              </a:defRPr>
+            </a:lvl3pPr>
+            <a:lvl4pPr marL="1600200" indent="-228600">
+              <a:defRPr>
+                <a:solidFill>
+                  <a:schemeClr val="tx1"/>
+                </a:solidFill>
+                <a:latin typeface="Arial" panose="020B0604020202020204" pitchFamily="34" charset="0"/>
+                <a:ea typeface="宋体" panose="02010600030101010101" pitchFamily="2" charset="-122"/>
+              </a:defRPr>
+            </a:lvl4pPr>
+            <a:lvl5pPr marL="2057400" indent="-228600">
+              <a:defRPr>
+                <a:solidFill>
+                  <a:schemeClr val="tx1"/>
+                </a:solidFill>
+                <a:latin typeface="Arial" panose="020B0604020202020204" pitchFamily="34" charset="0"/>
+                <a:ea typeface="宋体" panose="02010600030101010101" pitchFamily="2" charset="-122"/>
+              </a:defRPr>
+            </a:lvl5pPr>
+            <a:lvl6pPr marL="2514600" indent="-228600" eaLnBrk="0" fontAlgn="base" hangingPunct="0">
+              <a:spcBef>
+                <a:spcPct val="0"/>
+              </a:spcBef>
+              <a:spcAft>
+                <a:spcPct val="0"/>
+              </a:spcAft>
+              <a:defRPr>
+                <a:solidFill>
+                  <a:schemeClr val="tx1"/>
+                </a:solidFill>
+                <a:latin typeface="Arial" panose="020B0604020202020204" pitchFamily="34" charset="0"/>
+                <a:ea typeface="宋体" panose="02010600030101010101" pitchFamily="2" charset="-122"/>
+              </a:defRPr>
+            </a:lvl6pPr>
+            <a:lvl7pPr marL="2971800" indent="-228600" eaLnBrk="0" fontAlgn="base" hangingPunct="0">
+              <a:spcBef>
+                <a:spcPct val="0"/>
+              </a:spcBef>
+              <a:spcAft>
+                <a:spcPct val="0"/>
+              </a:spcAft>
+              <a:defRPr>
+                <a:solidFill>
+                  <a:schemeClr val="tx1"/>
+                </a:solidFill>
+                <a:latin typeface="Arial" panose="020B0604020202020204" pitchFamily="34" charset="0"/>
+                <a:ea typeface="宋体" panose="02010600030101010101" pitchFamily="2" charset="-122"/>
+              </a:defRPr>
+            </a:lvl7pPr>
+            <a:lvl8pPr marL="3429000" indent="-228600" eaLnBrk="0" fontAlgn="base" hangingPunct="0">
+              <a:spcBef>
+                <a:spcPct val="0"/>
+              </a:spcBef>
+              <a:spcAft>
+                <a:spcPct val="0"/>
+              </a:spcAft>
+              <a:defRPr>
+                <a:solidFill>
+                  <a:schemeClr val="tx1"/>
+                </a:solidFill>
+                <a:latin typeface="Arial" panose="020B0604020202020204" pitchFamily="34" charset="0"/>
+                <a:ea typeface="宋体" panose="02010600030101010101" pitchFamily="2" charset="-122"/>
+              </a:defRPr>
+            </a:lvl8pPr>
+            <a:lvl9pPr marL="3886200" indent="-228600" eaLnBrk="0" fontAlgn="base" hangingPunct="0">
+              <a:spcBef>
+                <a:spcPct val="0"/>
+              </a:spcBef>
+              <a:spcAft>
+                <a:spcPct val="0"/>
+              </a:spcAft>
+              <a:defRPr>
+                <a:solidFill>
+                  <a:schemeClr val="tx1"/>
+                </a:solidFill>
+                <a:latin typeface="Arial" panose="020B0604020202020204" pitchFamily="34" charset="0"/>
+                <a:ea typeface="宋体" panose="02010600030101010101" pitchFamily="2" charset="-122"/>
+              </a:defRPr>
+            </a:lvl9pPr>
+          </a:lstStyle>
+          <a:p>
+            <a:pPr algn="r" eaLnBrk="1" hangingPunct="1"/>
+            <a:fld id="{7320F324-9791-4BF9-A7C3-08429EEC3E5C}" type="slidenum">
+              <a:rPr lang="en-US" altLang="zh-CN" sz="1200"/>
+              <a:t>9</a:t>
+            </a:fld>
+            <a:endParaRPr lang="en-US" altLang="zh-CN" sz="1200"/>
+          </a:p>
+        </p:txBody>
+      </p:sp>
+    </p:spTree>
+    <p:extLst>
+      <p:ext uri="{BB962C8B-B14F-4D97-AF65-F5344CB8AC3E}">
+        <p14:creationId xmlns:p14="http://schemas.microsoft.com/office/powerpoint/2010/main" val="1821332381"/>
       </p:ext>
     </p:extLst>
   </p:cSld>
@@ -15203,7 +14631,7 @@
                 <a:latin typeface="Times New Roman" panose="02020603050405020304" pitchFamily="18" charset="0"/>
                 <a:cs typeface="Times New Roman" panose="02020603050405020304" pitchFamily="18" charset="0"/>
               </a:rPr>
-              <a:t>2026/04/27      1/13</a:t>
+              <a:t>2026/04/27      1/11</a:t>
             </a:r>
             <a:endParaRPr lang="zh-CN" altLang="en-US" dirty="0">
               <a:solidFill>
@@ -15361,3212 +14789,6 @@
 </file>
 
 <file path=ppt/slides/slide10.xml><?xml version="1.0" encoding="utf-8"?>
-<p:sld xmlns:a="http://schemas.openxmlformats.org/drawingml/2006/main" xmlns:r="http://schemas.openxmlformats.org/officeDocument/2006/relationships" xmlns:p="http://schemas.openxmlformats.org/presentationml/2006/main">
-  <p:cSld>
-    <p:spTree>
-      <p:nvGrpSpPr>
-        <p:cNvPr id="1" name="">
-          <a:extLst>
-            <a:ext uri="{FF2B5EF4-FFF2-40B4-BE49-F238E27FC236}">
-              <a16:creationId xmlns:a16="http://schemas.microsoft.com/office/drawing/2014/main" id="{5C3F980C-8D4F-312A-956B-7C8E4480B08A}"/>
-            </a:ext>
-          </a:extLst>
-        </p:cNvPr>
-        <p:cNvGrpSpPr/>
-        <p:nvPr/>
-      </p:nvGrpSpPr>
-      <p:grpSpPr>
-        <a:xfrm>
-          <a:off x="0" y="0"/>
-          <a:ext cx="0" cy="0"/>
-          <a:chOff x="0" y="0"/>
-          <a:chExt cx="0" cy="0"/>
-        </a:xfrm>
-      </p:grpSpPr>
-      <p:sp>
-        <p:nvSpPr>
-          <p:cNvPr id="6146" name="Rectangle 8">
-            <a:extLst>
-              <a:ext uri="{FF2B5EF4-FFF2-40B4-BE49-F238E27FC236}">
-                <a16:creationId xmlns:a16="http://schemas.microsoft.com/office/drawing/2014/main" id="{D4FA9257-AB51-2243-14D9-F617DCB218ED}"/>
-              </a:ext>
-            </a:extLst>
-          </p:cNvPr>
-          <p:cNvSpPr>
-            <a:spLocks noChangeArrowheads="1"/>
-          </p:cNvSpPr>
-          <p:nvPr/>
-        </p:nvSpPr>
-        <p:spPr bwMode="auto">
-          <a:xfrm>
-            <a:off x="0" y="0"/>
-            <a:ext cx="9144000" cy="0"/>
-          </a:xfrm>
-          <a:prstGeom prst="rect">
-            <a:avLst/>
-          </a:prstGeom>
-          <a:noFill/>
-          <a:ln>
-            <a:noFill/>
-          </a:ln>
-          <a:extLst>
-            <a:ext uri="{909E8E84-426E-40DD-AFC4-6F175D3DCCD1}">
-              <a14:hiddenFill xmlns:a14="http://schemas.microsoft.com/office/drawing/2010/main">
-                <a:solidFill>
-                  <a:srgbClr val="FFFFFF"/>
-                </a:solidFill>
-              </a14:hiddenFill>
-            </a:ext>
-            <a:ext uri="{91240B29-F687-4F45-9708-019B960494DF}">
-              <a14:hiddenLine xmlns:a14="http://schemas.microsoft.com/office/drawing/2010/main" w="9525">
-                <a:solidFill>
-                  <a:srgbClr val="000000"/>
-                </a:solidFill>
-                <a:miter lim="800000"/>
-                <a:headEnd/>
-                <a:tailEnd/>
-              </a14:hiddenLine>
-            </a:ext>
-          </a:extLst>
-        </p:spPr>
-        <p:txBody>
-          <a:bodyPr wrap="none" anchor="ctr">
-            <a:spAutoFit/>
-          </a:bodyPr>
-          <a:lstStyle>
-            <a:lvl1pPr>
-              <a:defRPr>
-                <a:solidFill>
-                  <a:schemeClr val="tx1"/>
-                </a:solidFill>
-                <a:latin typeface="Arial" panose="020B0604020202020204" pitchFamily="34" charset="0"/>
-                <a:ea typeface="宋体" panose="02010600030101010101" pitchFamily="2" charset="-122"/>
-              </a:defRPr>
-            </a:lvl1pPr>
-            <a:lvl2pPr marL="742950" indent="-285750">
-              <a:defRPr>
-                <a:solidFill>
-                  <a:schemeClr val="tx1"/>
-                </a:solidFill>
-                <a:latin typeface="Arial" panose="020B0604020202020204" pitchFamily="34" charset="0"/>
-                <a:ea typeface="宋体" panose="02010600030101010101" pitchFamily="2" charset="-122"/>
-              </a:defRPr>
-            </a:lvl2pPr>
-            <a:lvl3pPr marL="1143000" indent="-228600">
-              <a:defRPr>
-                <a:solidFill>
-                  <a:schemeClr val="tx1"/>
-                </a:solidFill>
-                <a:latin typeface="Arial" panose="020B0604020202020204" pitchFamily="34" charset="0"/>
-                <a:ea typeface="宋体" panose="02010600030101010101" pitchFamily="2" charset="-122"/>
-              </a:defRPr>
-            </a:lvl3pPr>
-            <a:lvl4pPr marL="1600200" indent="-228600">
-              <a:defRPr>
-                <a:solidFill>
-                  <a:schemeClr val="tx1"/>
-                </a:solidFill>
-                <a:latin typeface="Arial" panose="020B0604020202020204" pitchFamily="34" charset="0"/>
-                <a:ea typeface="宋体" panose="02010600030101010101" pitchFamily="2" charset="-122"/>
-              </a:defRPr>
-            </a:lvl4pPr>
-            <a:lvl5pPr marL="2057400" indent="-228600">
-              <a:defRPr>
-                <a:solidFill>
-                  <a:schemeClr val="tx1"/>
-                </a:solidFill>
-                <a:latin typeface="Arial" panose="020B0604020202020204" pitchFamily="34" charset="0"/>
-                <a:ea typeface="宋体" panose="02010600030101010101" pitchFamily="2" charset="-122"/>
-              </a:defRPr>
-            </a:lvl5pPr>
-            <a:lvl6pPr marL="2514600" indent="-228600" eaLnBrk="0" fontAlgn="base" hangingPunct="0">
-              <a:spcBef>
-                <a:spcPct val="0"/>
-              </a:spcBef>
-              <a:spcAft>
-                <a:spcPct val="0"/>
-              </a:spcAft>
-              <a:defRPr>
-                <a:solidFill>
-                  <a:schemeClr val="tx1"/>
-                </a:solidFill>
-                <a:latin typeface="Arial" panose="020B0604020202020204" pitchFamily="34" charset="0"/>
-                <a:ea typeface="宋体" panose="02010600030101010101" pitchFamily="2" charset="-122"/>
-              </a:defRPr>
-            </a:lvl6pPr>
-            <a:lvl7pPr marL="2971800" indent="-228600" eaLnBrk="0" fontAlgn="base" hangingPunct="0">
-              <a:spcBef>
-                <a:spcPct val="0"/>
-              </a:spcBef>
-              <a:spcAft>
-                <a:spcPct val="0"/>
-              </a:spcAft>
-              <a:defRPr>
-                <a:solidFill>
-                  <a:schemeClr val="tx1"/>
-                </a:solidFill>
-                <a:latin typeface="Arial" panose="020B0604020202020204" pitchFamily="34" charset="0"/>
-                <a:ea typeface="宋体" panose="02010600030101010101" pitchFamily="2" charset="-122"/>
-              </a:defRPr>
-            </a:lvl7pPr>
-            <a:lvl8pPr marL="3429000" indent="-228600" eaLnBrk="0" fontAlgn="base" hangingPunct="0">
-              <a:spcBef>
-                <a:spcPct val="0"/>
-              </a:spcBef>
-              <a:spcAft>
-                <a:spcPct val="0"/>
-              </a:spcAft>
-              <a:defRPr>
-                <a:solidFill>
-                  <a:schemeClr val="tx1"/>
-                </a:solidFill>
-                <a:latin typeface="Arial" panose="020B0604020202020204" pitchFamily="34" charset="0"/>
-                <a:ea typeface="宋体" panose="02010600030101010101" pitchFamily="2" charset="-122"/>
-              </a:defRPr>
-            </a:lvl8pPr>
-            <a:lvl9pPr marL="3886200" indent="-228600" eaLnBrk="0" fontAlgn="base" hangingPunct="0">
-              <a:spcBef>
-                <a:spcPct val="0"/>
-              </a:spcBef>
-              <a:spcAft>
-                <a:spcPct val="0"/>
-              </a:spcAft>
-              <a:defRPr>
-                <a:solidFill>
-                  <a:schemeClr val="tx1"/>
-                </a:solidFill>
-                <a:latin typeface="Arial" panose="020B0604020202020204" pitchFamily="34" charset="0"/>
-                <a:ea typeface="宋体" panose="02010600030101010101" pitchFamily="2" charset="-122"/>
-              </a:defRPr>
-            </a:lvl9pPr>
-          </a:lstStyle>
-          <a:p>
-            <a:pPr eaLnBrk="1" latinLnBrk="1" hangingPunct="1"/>
-            <a:endParaRPr kumimoji="1" lang="zh-CN" altLang="en-US" sz="2400" b="1">
-              <a:latin typeface="Gulim" panose="020B0600000101010101" pitchFamily="34" charset="-127"/>
-              <a:ea typeface="Gulim" panose="020B0600000101010101" pitchFamily="34" charset="-127"/>
-            </a:endParaRPr>
-          </a:p>
-        </p:txBody>
-      </p:sp>
-      <p:sp>
-        <p:nvSpPr>
-          <p:cNvPr id="6148" name="矩形 5">
-            <a:extLst>
-              <a:ext uri="{FF2B5EF4-FFF2-40B4-BE49-F238E27FC236}">
-                <a16:creationId xmlns:a16="http://schemas.microsoft.com/office/drawing/2014/main" id="{3B7D2423-AD7C-EAA2-01E7-BBE137361AE4}"/>
-              </a:ext>
-            </a:extLst>
-          </p:cNvPr>
-          <p:cNvSpPr>
-            <a:spLocks noChangeArrowheads="1"/>
-          </p:cNvSpPr>
-          <p:nvPr/>
-        </p:nvSpPr>
-        <p:spPr bwMode="auto">
-          <a:xfrm>
-            <a:off x="187899" y="3044971"/>
-            <a:ext cx="8776355" cy="584775"/>
-          </a:xfrm>
-          <a:prstGeom prst="rect">
-            <a:avLst/>
-          </a:prstGeom>
-          <a:noFill/>
-          <a:ln>
-            <a:noFill/>
-          </a:ln>
-          <a:extLst>
-            <a:ext uri="{909E8E84-426E-40DD-AFC4-6F175D3DCCD1}">
-              <a14:hiddenFill xmlns:a14="http://schemas.microsoft.com/office/drawing/2010/main">
-                <a:solidFill>
-                  <a:srgbClr val="FFFFFF"/>
-                </a:solidFill>
-              </a14:hiddenFill>
-            </a:ext>
-            <a:ext uri="{91240B29-F687-4F45-9708-019B960494DF}">
-              <a14:hiddenLine xmlns:a14="http://schemas.microsoft.com/office/drawing/2010/main" w="9525">
-                <a:solidFill>
-                  <a:srgbClr val="000000"/>
-                </a:solidFill>
-                <a:miter lim="800000"/>
-                <a:headEnd/>
-                <a:tailEnd/>
-              </a14:hiddenLine>
-            </a:ext>
-          </a:extLst>
-        </p:spPr>
-        <p:txBody>
-          <a:bodyPr wrap="square">
-            <a:spAutoFit/>
-          </a:bodyPr>
-          <a:lstStyle>
-            <a:lvl1pPr>
-              <a:defRPr>
-                <a:solidFill>
-                  <a:schemeClr val="tx1"/>
-                </a:solidFill>
-                <a:latin typeface="Arial" panose="020B0604020202020204" pitchFamily="34" charset="0"/>
-                <a:ea typeface="宋体" panose="02010600030101010101" pitchFamily="2" charset="-122"/>
-              </a:defRPr>
-            </a:lvl1pPr>
-            <a:lvl2pPr marL="742950" indent="-285750">
-              <a:defRPr>
-                <a:solidFill>
-                  <a:schemeClr val="tx1"/>
-                </a:solidFill>
-                <a:latin typeface="Arial" panose="020B0604020202020204" pitchFamily="34" charset="0"/>
-                <a:ea typeface="宋体" panose="02010600030101010101" pitchFamily="2" charset="-122"/>
-              </a:defRPr>
-            </a:lvl2pPr>
-            <a:lvl3pPr marL="1143000" indent="-228600">
-              <a:defRPr>
-                <a:solidFill>
-                  <a:schemeClr val="tx1"/>
-                </a:solidFill>
-                <a:latin typeface="Arial" panose="020B0604020202020204" pitchFamily="34" charset="0"/>
-                <a:ea typeface="宋体" panose="02010600030101010101" pitchFamily="2" charset="-122"/>
-              </a:defRPr>
-            </a:lvl3pPr>
-            <a:lvl4pPr marL="1600200" indent="-228600">
-              <a:defRPr>
-                <a:solidFill>
-                  <a:schemeClr val="tx1"/>
-                </a:solidFill>
-                <a:latin typeface="Arial" panose="020B0604020202020204" pitchFamily="34" charset="0"/>
-                <a:ea typeface="宋体" panose="02010600030101010101" pitchFamily="2" charset="-122"/>
-              </a:defRPr>
-            </a:lvl4pPr>
-            <a:lvl5pPr marL="2057400" indent="-228600">
-              <a:defRPr>
-                <a:solidFill>
-                  <a:schemeClr val="tx1"/>
-                </a:solidFill>
-                <a:latin typeface="Arial" panose="020B0604020202020204" pitchFamily="34" charset="0"/>
-                <a:ea typeface="宋体" panose="02010600030101010101" pitchFamily="2" charset="-122"/>
-              </a:defRPr>
-            </a:lvl5pPr>
-            <a:lvl6pPr marL="2514600" indent="-228600" eaLnBrk="0" fontAlgn="base" hangingPunct="0">
-              <a:spcBef>
-                <a:spcPct val="0"/>
-              </a:spcBef>
-              <a:spcAft>
-                <a:spcPct val="0"/>
-              </a:spcAft>
-              <a:defRPr>
-                <a:solidFill>
-                  <a:schemeClr val="tx1"/>
-                </a:solidFill>
-                <a:latin typeface="Arial" panose="020B0604020202020204" pitchFamily="34" charset="0"/>
-                <a:ea typeface="宋体" panose="02010600030101010101" pitchFamily="2" charset="-122"/>
-              </a:defRPr>
-            </a:lvl6pPr>
-            <a:lvl7pPr marL="2971800" indent="-228600" eaLnBrk="0" fontAlgn="base" hangingPunct="0">
-              <a:spcBef>
-                <a:spcPct val="0"/>
-              </a:spcBef>
-              <a:spcAft>
-                <a:spcPct val="0"/>
-              </a:spcAft>
-              <a:defRPr>
-                <a:solidFill>
-                  <a:schemeClr val="tx1"/>
-                </a:solidFill>
-                <a:latin typeface="Arial" panose="020B0604020202020204" pitchFamily="34" charset="0"/>
-                <a:ea typeface="宋体" panose="02010600030101010101" pitchFamily="2" charset="-122"/>
-              </a:defRPr>
-            </a:lvl7pPr>
-            <a:lvl8pPr marL="3429000" indent="-228600" eaLnBrk="0" fontAlgn="base" hangingPunct="0">
-              <a:spcBef>
-                <a:spcPct val="0"/>
-              </a:spcBef>
-              <a:spcAft>
-                <a:spcPct val="0"/>
-              </a:spcAft>
-              <a:defRPr>
-                <a:solidFill>
-                  <a:schemeClr val="tx1"/>
-                </a:solidFill>
-                <a:latin typeface="Arial" panose="020B0604020202020204" pitchFamily="34" charset="0"/>
-                <a:ea typeface="宋体" panose="02010600030101010101" pitchFamily="2" charset="-122"/>
-              </a:defRPr>
-            </a:lvl8pPr>
-            <a:lvl9pPr marL="3886200" indent="-228600" eaLnBrk="0" fontAlgn="base" hangingPunct="0">
-              <a:spcBef>
-                <a:spcPct val="0"/>
-              </a:spcBef>
-              <a:spcAft>
-                <a:spcPct val="0"/>
-              </a:spcAft>
-              <a:defRPr>
-                <a:solidFill>
-                  <a:schemeClr val="tx1"/>
-                </a:solidFill>
-                <a:latin typeface="Arial" panose="020B0604020202020204" pitchFamily="34" charset="0"/>
-                <a:ea typeface="宋体" panose="02010600030101010101" pitchFamily="2" charset="-122"/>
-              </a:defRPr>
-            </a:lvl9pPr>
-          </a:lstStyle>
-          <a:p>
-            <a:pPr algn="ctr"/>
-            <a:r>
-              <a:rPr lang="zh-CN" altLang="en-US" sz="3200" b="1" dirty="0">
-                <a:solidFill>
-                  <a:schemeClr val="bg1"/>
-                </a:solidFill>
-                <a:latin typeface="微软雅黑" panose="020B0503020204020204" pitchFamily="34" charset="-122"/>
-                <a:ea typeface="微软雅黑" panose="020B0503020204020204" pitchFamily="34" charset="-122"/>
-              </a:rPr>
-              <a:t>第二次组会汇报</a:t>
-            </a:r>
-          </a:p>
-        </p:txBody>
-      </p:sp>
-      <p:sp>
-        <p:nvSpPr>
-          <p:cNvPr id="19" name="文本框 18">
-            <a:extLst>
-              <a:ext uri="{FF2B5EF4-FFF2-40B4-BE49-F238E27FC236}">
-                <a16:creationId xmlns:a16="http://schemas.microsoft.com/office/drawing/2014/main" id="{2AEEC310-D2FE-B1B2-BA21-419E2FC98925}"/>
-              </a:ext>
-            </a:extLst>
-          </p:cNvPr>
-          <p:cNvSpPr txBox="1"/>
-          <p:nvPr/>
-        </p:nvSpPr>
-        <p:spPr>
-          <a:xfrm>
-            <a:off x="3803213" y="4059171"/>
-            <a:ext cx="2158761" cy="830997"/>
-          </a:xfrm>
-          <a:prstGeom prst="rect">
-            <a:avLst/>
-          </a:prstGeom>
-          <a:noFill/>
-        </p:spPr>
-        <p:txBody>
-          <a:bodyPr wrap="square" rtlCol="0">
-            <a:spAutoFit/>
-          </a:bodyPr>
-          <a:lstStyle/>
-          <a:p>
-            <a:pPr marR="0" lvl="0" algn="l" defTabSz="914400" rtl="0" eaLnBrk="1" fontAlgn="auto" latinLnBrk="0" hangingPunct="1">
-              <a:lnSpc>
-                <a:spcPct val="100000"/>
-              </a:lnSpc>
-              <a:spcBef>
-                <a:spcPts val="0"/>
-              </a:spcBef>
-              <a:spcAft>
-                <a:spcPts val="0"/>
-              </a:spcAft>
-              <a:buClrTx/>
-              <a:buSzTx/>
-              <a:defRPr/>
-            </a:pPr>
-            <a:r>
-              <a:rPr lang="zh-CN" altLang="en-US" sz="2400" dirty="0">
-                <a:solidFill>
-                  <a:prstClr val="white"/>
-                </a:solidFill>
-                <a:latin typeface="宋体" panose="02010600030101010101" pitchFamily="2" charset="-122"/>
-                <a:ea typeface="宋体" panose="02010600030101010101" pitchFamily="2" charset="-122"/>
-              </a:rPr>
-              <a:t>张世杰</a:t>
-            </a:r>
-            <a:endParaRPr lang="en-US" altLang="zh-CN" sz="2400" dirty="0">
-              <a:solidFill>
-                <a:prstClr val="white"/>
-              </a:solidFill>
-              <a:latin typeface="宋体" panose="02010600030101010101" pitchFamily="2" charset="-122"/>
-              <a:ea typeface="宋体" panose="02010600030101010101" pitchFamily="2" charset="-122"/>
-            </a:endParaRPr>
-          </a:p>
-          <a:p>
-            <a:pPr marR="0" lvl="0" algn="l" defTabSz="914400" rtl="0" eaLnBrk="1" fontAlgn="auto" latinLnBrk="0" hangingPunct="1">
-              <a:lnSpc>
-                <a:spcPct val="100000"/>
-              </a:lnSpc>
-              <a:spcBef>
-                <a:spcPts val="0"/>
-              </a:spcBef>
-              <a:spcAft>
-                <a:spcPts val="0"/>
-              </a:spcAft>
-              <a:buClrTx/>
-              <a:buSzTx/>
-              <a:defRPr/>
-            </a:pPr>
-            <a:r>
-              <a:rPr lang="en-US" altLang="zh-CN" sz="2400" dirty="0">
-                <a:solidFill>
-                  <a:prstClr val="white"/>
-                </a:solidFill>
-                <a:latin typeface="Times New Roman" panose="02020603050405020304" pitchFamily="18" charset="0"/>
-                <a:ea typeface="微软雅黑" panose="020B0503020204020204" pitchFamily="34" charset="-122"/>
-                <a:cs typeface="Times New Roman" panose="02020603050405020304" pitchFamily="18" charset="0"/>
-              </a:rPr>
-              <a:t>2025.04.13</a:t>
-            </a:r>
-            <a:endParaRPr kumimoji="0" lang="zh-CN" altLang="en-US" sz="2400" b="0" i="0" u="none" strike="noStrike" kern="1200" cap="none" spc="0" normalizeH="0" baseline="0" noProof="0" dirty="0">
-              <a:ln>
-                <a:noFill/>
-              </a:ln>
-              <a:solidFill>
-                <a:prstClr val="white"/>
-              </a:solidFill>
-              <a:effectLst/>
-              <a:uLnTx/>
-              <a:uFillTx/>
-              <a:latin typeface="Times New Roman" panose="02020603050405020304" pitchFamily="18" charset="0"/>
-              <a:ea typeface="微软雅黑" panose="020B0503020204020204" pitchFamily="34" charset="-122"/>
-              <a:cs typeface="Times New Roman" panose="02020603050405020304" pitchFamily="18" charset="0"/>
-            </a:endParaRPr>
-          </a:p>
-        </p:txBody>
-      </p:sp>
-      <p:sp>
-        <p:nvSpPr>
-          <p:cNvPr id="3" name="矩形 2">
-            <a:extLst>
-              <a:ext uri="{FF2B5EF4-FFF2-40B4-BE49-F238E27FC236}">
-                <a16:creationId xmlns:a16="http://schemas.microsoft.com/office/drawing/2014/main" id="{BE82278D-6D29-7B47-90F7-10EA9A0A587B}"/>
-              </a:ext>
-            </a:extLst>
-          </p:cNvPr>
-          <p:cNvSpPr/>
-          <p:nvPr/>
-        </p:nvSpPr>
-        <p:spPr>
-          <a:xfrm>
-            <a:off x="-8157" y="0"/>
-            <a:ext cx="9152157" cy="341616"/>
-          </a:xfrm>
-          <a:prstGeom prst="rect">
-            <a:avLst/>
-          </a:prstGeom>
-          <a:solidFill>
-            <a:schemeClr val="accent1">
-              <a:lumMod val="50000"/>
-            </a:schemeClr>
-          </a:solidFill>
-        </p:spPr>
-        <p:style>
-          <a:lnRef idx="2">
-            <a:schemeClr val="accent1">
-              <a:shade val="50000"/>
-            </a:schemeClr>
-          </a:lnRef>
-          <a:fillRef idx="1">
-            <a:schemeClr val="accent1"/>
-          </a:fillRef>
-          <a:effectRef idx="0">
-            <a:schemeClr val="accent1"/>
-          </a:effectRef>
-          <a:fontRef idx="minor">
-            <a:schemeClr val="lt1"/>
-          </a:fontRef>
-        </p:style>
-        <p:txBody>
-          <a:bodyPr rtlCol="0" anchor="ctr"/>
-          <a:lstStyle/>
-          <a:p>
-            <a:pPr algn="ctr"/>
-            <a:endParaRPr lang="zh-CN" altLang="en-US" dirty="0">
-              <a:solidFill>
-                <a:srgbClr val="002060"/>
-              </a:solidFill>
-            </a:endParaRPr>
-          </a:p>
-        </p:txBody>
-      </p:sp>
-      <p:sp>
-        <p:nvSpPr>
-          <p:cNvPr id="4" name="矩形 3">
-            <a:extLst>
-              <a:ext uri="{FF2B5EF4-FFF2-40B4-BE49-F238E27FC236}">
-                <a16:creationId xmlns:a16="http://schemas.microsoft.com/office/drawing/2014/main" id="{FF2E7ECD-103B-BCE4-128A-2E79ED502F5E}"/>
-              </a:ext>
-            </a:extLst>
-          </p:cNvPr>
-          <p:cNvSpPr/>
-          <p:nvPr/>
-        </p:nvSpPr>
-        <p:spPr>
-          <a:xfrm>
-            <a:off x="-8157" y="340793"/>
-            <a:ext cx="9152156" cy="584770"/>
-          </a:xfrm>
-          <a:prstGeom prst="rect">
-            <a:avLst/>
-          </a:prstGeom>
-          <a:solidFill>
-            <a:schemeClr val="accent3">
-              <a:lumMod val="60000"/>
-              <a:lumOff val="40000"/>
-            </a:schemeClr>
-          </a:solidFill>
-          <a:ln>
-            <a:noFill/>
-          </a:ln>
-        </p:spPr>
-        <p:style>
-          <a:lnRef idx="2">
-            <a:schemeClr val="accent1">
-              <a:shade val="50000"/>
-            </a:schemeClr>
-          </a:lnRef>
-          <a:fillRef idx="1">
-            <a:schemeClr val="accent1"/>
-          </a:fillRef>
-          <a:effectRef idx="0">
-            <a:schemeClr val="accent1"/>
-          </a:effectRef>
-          <a:fontRef idx="minor">
-            <a:schemeClr val="lt1"/>
-          </a:fontRef>
-        </p:style>
-        <p:txBody>
-          <a:bodyPr anchor="ctr"/>
-          <a:lstStyle/>
-          <a:p>
-            <a:pPr algn="ctr">
-              <a:defRPr/>
-            </a:pPr>
-            <a:endParaRPr lang="zh-CN" altLang="en-US" dirty="0">
-              <a:solidFill>
-                <a:srgbClr val="005D98"/>
-              </a:solidFill>
-              <a:latin typeface="微软雅黑" panose="020B0503020204020204" pitchFamily="34" charset="-122"/>
-              <a:ea typeface="微软雅黑" panose="020B0503020204020204" pitchFamily="34" charset="-122"/>
-            </a:endParaRPr>
-          </a:p>
-        </p:txBody>
-      </p:sp>
-      <p:sp>
-        <p:nvSpPr>
-          <p:cNvPr id="6" name="文本框 5">
-            <a:extLst>
-              <a:ext uri="{FF2B5EF4-FFF2-40B4-BE49-F238E27FC236}">
-                <a16:creationId xmlns:a16="http://schemas.microsoft.com/office/drawing/2014/main" id="{20F7EA48-519D-8CBA-ADCE-CCB866418C1B}"/>
-              </a:ext>
-            </a:extLst>
-          </p:cNvPr>
-          <p:cNvSpPr txBox="1"/>
-          <p:nvPr/>
-        </p:nvSpPr>
-        <p:spPr>
-          <a:xfrm>
-            <a:off x="187899" y="402345"/>
-            <a:ext cx="2024062" cy="461665"/>
-          </a:xfrm>
-          <a:prstGeom prst="rect">
-            <a:avLst/>
-          </a:prstGeom>
-          <a:noFill/>
-        </p:spPr>
-        <p:txBody>
-          <a:bodyPr wrap="square">
-            <a:spAutoFit/>
-          </a:bodyPr>
-          <a:lstStyle/>
-          <a:p>
-            <a:pPr marL="0" marR="0" lvl="0" indent="0" defTabSz="457200" rtl="0" eaLnBrk="1" fontAlgn="auto" latinLnBrk="0" hangingPunct="1">
-              <a:lnSpc>
-                <a:spcPct val="100000"/>
-              </a:lnSpc>
-              <a:spcBef>
-                <a:spcPts val="0"/>
-              </a:spcBef>
-              <a:spcAft>
-                <a:spcPts val="0"/>
-              </a:spcAft>
-              <a:buClrTx/>
-              <a:buSzTx/>
-              <a:buFontTx/>
-              <a:buNone/>
-              <a:defRPr/>
-            </a:pPr>
-            <a:r>
-              <a:rPr lang="zh-CN" altLang="en-US" sz="2400" b="1" dirty="0">
-                <a:solidFill>
-                  <a:srgbClr val="002060"/>
-                </a:solidFill>
-                <a:latin typeface="微软雅黑" panose="020B0503020204020204" pitchFamily="34" charset="-122"/>
-                <a:ea typeface="微软雅黑" panose="020B0503020204020204" pitchFamily="34" charset="-122"/>
-              </a:rPr>
-              <a:t>目录</a:t>
-            </a:r>
-          </a:p>
-        </p:txBody>
-      </p:sp>
-      <p:sp>
-        <p:nvSpPr>
-          <p:cNvPr id="11" name="标题 1">
-            <a:extLst>
-              <a:ext uri="{FF2B5EF4-FFF2-40B4-BE49-F238E27FC236}">
-                <a16:creationId xmlns:a16="http://schemas.microsoft.com/office/drawing/2014/main" id="{9395A325-549E-99C1-AC1B-D5ABF1C6A3E7}"/>
-              </a:ext>
-            </a:extLst>
-          </p:cNvPr>
-          <p:cNvSpPr txBox="1">
-            <a:spLocks/>
-          </p:cNvSpPr>
-          <p:nvPr/>
-        </p:nvSpPr>
-        <p:spPr>
-          <a:xfrm>
-            <a:off x="2462863" y="2548070"/>
-            <a:ext cx="5721109" cy="584776"/>
-          </a:xfrm>
-          <a:prstGeom prst="rect">
-            <a:avLst/>
-          </a:prstGeom>
-        </p:spPr>
-        <p:txBody>
-          <a:bodyPr vert="horz" lIns="91440" tIns="45720" rIns="91440" bIns="45720" rtlCol="0" anchor="b">
-            <a:noAutofit/>
-          </a:bodyPr>
-          <a:lstStyle>
-            <a:lvl1pPr algn="ctr" defTabSz="914400" rtl="0" eaLnBrk="1" latinLnBrk="0" hangingPunct="1">
-              <a:lnSpc>
-                <a:spcPct val="90000"/>
-              </a:lnSpc>
-              <a:spcBef>
-                <a:spcPct val="0"/>
-              </a:spcBef>
-              <a:buNone/>
-              <a:defRPr sz="3600" b="1" kern="1200">
-                <a:solidFill>
-                  <a:schemeClr val="bg1"/>
-                </a:solidFill>
-                <a:latin typeface="+mn-ea"/>
-                <a:ea typeface="+mn-ea"/>
-                <a:cs typeface="+mj-cs"/>
-              </a:defRPr>
-            </a:lvl1pPr>
-          </a:lstStyle>
-          <a:p>
-            <a:pPr>
-              <a:lnSpc>
-                <a:spcPct val="100000"/>
-              </a:lnSpc>
-            </a:pPr>
-            <a:r>
-              <a:rPr lang="zh-CN" altLang="en-US" sz="4000" dirty="0">
-                <a:latin typeface="微软雅黑" panose="020B0503020204020204" pitchFamily="34" charset="-122"/>
-                <a:ea typeface="微软雅黑" panose="020B0503020204020204" pitchFamily="34" charset="-122"/>
-              </a:rPr>
-              <a:t>具身智能</a:t>
-            </a:r>
-            <a:r>
-              <a:rPr lang="en-US" altLang="zh-CN" sz="4000" dirty="0">
-                <a:latin typeface="微软雅黑" panose="020B0503020204020204" pitchFamily="34" charset="-122"/>
-                <a:ea typeface="微软雅黑" panose="020B0503020204020204" pitchFamily="34" charset="-122"/>
-              </a:rPr>
-              <a:t>-</a:t>
-            </a:r>
-            <a:r>
-              <a:rPr lang="zh-CN" altLang="en-US" sz="4000" dirty="0">
-                <a:latin typeface="微软雅黑" panose="020B0503020204020204" pitchFamily="34" charset="-122"/>
-                <a:ea typeface="微软雅黑" panose="020B0503020204020204" pitchFamily="34" charset="-122"/>
-              </a:rPr>
-              <a:t>运动控制开发</a:t>
-            </a:r>
-          </a:p>
-        </p:txBody>
-      </p:sp>
-      <p:sp>
-        <p:nvSpPr>
-          <p:cNvPr id="21" name="矩形 20">
-            <a:extLst>
-              <a:ext uri="{FF2B5EF4-FFF2-40B4-BE49-F238E27FC236}">
-                <a16:creationId xmlns:a16="http://schemas.microsoft.com/office/drawing/2014/main" id="{6B0A70B9-C3CA-243F-CDCC-255937B4F809}"/>
-              </a:ext>
-            </a:extLst>
-          </p:cNvPr>
-          <p:cNvSpPr/>
-          <p:nvPr/>
-        </p:nvSpPr>
-        <p:spPr>
-          <a:xfrm>
-            <a:off x="6583680" y="6624636"/>
-            <a:ext cx="2560320" cy="233364"/>
-          </a:xfrm>
-          <a:prstGeom prst="rect">
-            <a:avLst/>
-          </a:prstGeom>
-          <a:solidFill>
-            <a:schemeClr val="accent3">
-              <a:lumMod val="20000"/>
-              <a:lumOff val="80000"/>
-            </a:schemeClr>
-          </a:solidFill>
-          <a:ln>
-            <a:noFill/>
-          </a:ln>
-        </p:spPr>
-        <p:style>
-          <a:lnRef idx="2">
-            <a:schemeClr val="accent1">
-              <a:shade val="50000"/>
-            </a:schemeClr>
-          </a:lnRef>
-          <a:fillRef idx="1">
-            <a:schemeClr val="accent1"/>
-          </a:fillRef>
-          <a:effectRef idx="0">
-            <a:schemeClr val="accent1"/>
-          </a:effectRef>
-          <a:fontRef idx="minor">
-            <a:schemeClr val="lt1"/>
-          </a:fontRef>
-        </p:style>
-        <p:txBody>
-          <a:bodyPr anchor="ctr"/>
-          <a:lstStyle/>
-          <a:p>
-            <a:pPr algn="ctr">
-              <a:defRPr/>
-            </a:pPr>
-            <a:r>
-              <a:rPr lang="en-US" altLang="zh-CN" dirty="0">
-                <a:solidFill>
-                  <a:srgbClr val="005D98"/>
-                </a:solidFill>
-                <a:latin typeface="Times New Roman" panose="02020603050405020304" pitchFamily="18" charset="0"/>
-                <a:cs typeface="Times New Roman" panose="02020603050405020304" pitchFamily="18" charset="0"/>
-              </a:rPr>
-              <a:t>2026/04/27      10/13</a:t>
-            </a:r>
-            <a:endParaRPr lang="zh-CN" altLang="en-US" dirty="0">
-              <a:solidFill>
-                <a:srgbClr val="005D98"/>
-              </a:solidFill>
-              <a:latin typeface="Times New Roman" panose="02020603050405020304" pitchFamily="18" charset="0"/>
-              <a:cs typeface="Times New Roman" panose="02020603050405020304" pitchFamily="18" charset="0"/>
-            </a:endParaRPr>
-          </a:p>
-        </p:txBody>
-      </p:sp>
-      <p:sp>
-        <p:nvSpPr>
-          <p:cNvPr id="22" name="矩形 21">
-            <a:extLst>
-              <a:ext uri="{FF2B5EF4-FFF2-40B4-BE49-F238E27FC236}">
-                <a16:creationId xmlns:a16="http://schemas.microsoft.com/office/drawing/2014/main" id="{79428112-7DC5-A720-759D-94654A560B80}"/>
-              </a:ext>
-            </a:extLst>
-          </p:cNvPr>
-          <p:cNvSpPr/>
-          <p:nvPr/>
-        </p:nvSpPr>
-        <p:spPr>
-          <a:xfrm>
-            <a:off x="0" y="6624637"/>
-            <a:ext cx="2560320" cy="233364"/>
-          </a:xfrm>
-          <a:prstGeom prst="rect">
-            <a:avLst/>
-          </a:prstGeom>
-          <a:solidFill>
-            <a:schemeClr val="accent3">
-              <a:lumMod val="60000"/>
-              <a:lumOff val="40000"/>
-            </a:schemeClr>
-          </a:solidFill>
-          <a:ln>
-            <a:noFill/>
-          </a:ln>
-        </p:spPr>
-        <p:style>
-          <a:lnRef idx="2">
-            <a:schemeClr val="accent1">
-              <a:shade val="50000"/>
-            </a:schemeClr>
-          </a:lnRef>
-          <a:fillRef idx="1">
-            <a:schemeClr val="accent1"/>
-          </a:fillRef>
-          <a:effectRef idx="0">
-            <a:schemeClr val="accent1"/>
-          </a:effectRef>
-          <a:fontRef idx="minor">
-            <a:schemeClr val="lt1"/>
-          </a:fontRef>
-        </p:style>
-        <p:txBody>
-          <a:bodyPr anchor="ctr"/>
-          <a:lstStyle/>
-          <a:p>
-            <a:pPr algn="ctr">
-              <a:defRPr/>
-            </a:pPr>
-            <a:r>
-              <a:rPr lang="zh-CN" altLang="en-US" dirty="0">
-                <a:solidFill>
-                  <a:srgbClr val="005D98"/>
-                </a:solidFill>
-                <a:latin typeface="微软雅黑" panose="020B0503020204020204" pitchFamily="34" charset="-122"/>
-                <a:ea typeface="微软雅黑" panose="020B0503020204020204" pitchFamily="34" charset="-122"/>
-              </a:rPr>
-              <a:t>张世杰</a:t>
-            </a:r>
-          </a:p>
-        </p:txBody>
-      </p:sp>
-      <p:sp>
-        <p:nvSpPr>
-          <p:cNvPr id="23" name="矩形 22">
-            <a:extLst>
-              <a:ext uri="{FF2B5EF4-FFF2-40B4-BE49-F238E27FC236}">
-                <a16:creationId xmlns:a16="http://schemas.microsoft.com/office/drawing/2014/main" id="{CDD2625C-1022-8F49-A658-1246454342D1}"/>
-              </a:ext>
-            </a:extLst>
-          </p:cNvPr>
-          <p:cNvSpPr/>
-          <p:nvPr/>
-        </p:nvSpPr>
-        <p:spPr>
-          <a:xfrm>
-            <a:off x="2560320" y="6624637"/>
-            <a:ext cx="4023360" cy="233365"/>
-          </a:xfrm>
-          <a:prstGeom prst="rect">
-            <a:avLst/>
-          </a:prstGeom>
-          <a:solidFill>
-            <a:schemeClr val="accent3">
-              <a:lumMod val="40000"/>
-              <a:lumOff val="60000"/>
-            </a:schemeClr>
-          </a:solidFill>
-          <a:ln>
-            <a:noFill/>
-          </a:ln>
-        </p:spPr>
-        <p:style>
-          <a:lnRef idx="2">
-            <a:schemeClr val="accent1">
-              <a:shade val="50000"/>
-            </a:schemeClr>
-          </a:lnRef>
-          <a:fillRef idx="1">
-            <a:schemeClr val="accent1"/>
-          </a:fillRef>
-          <a:effectRef idx="0">
-            <a:schemeClr val="accent1"/>
-          </a:effectRef>
-          <a:fontRef idx="minor">
-            <a:schemeClr val="lt1"/>
-          </a:fontRef>
-        </p:style>
-        <p:txBody>
-          <a:bodyPr anchor="ctr"/>
-          <a:lstStyle/>
-          <a:p>
-            <a:pPr algn="ctr">
-              <a:defRPr/>
-            </a:pPr>
-            <a:r>
-              <a:rPr lang="zh-CN" altLang="en-US" dirty="0">
-                <a:solidFill>
-                  <a:srgbClr val="005D98"/>
-                </a:solidFill>
-                <a:latin typeface="微软雅黑" panose="020B0503020204020204" pitchFamily="34" charset="-122"/>
-                <a:ea typeface="微软雅黑" panose="020B0503020204020204" pitchFamily="34" charset="-122"/>
-              </a:rPr>
-              <a:t>冗余机械臂柔顺控制与安全交互研究</a:t>
-            </a:r>
-          </a:p>
-        </p:txBody>
-      </p:sp>
-      <p:sp>
-        <p:nvSpPr>
-          <p:cNvPr id="2" name="文本框 1">
-            <a:extLst>
-              <a:ext uri="{FF2B5EF4-FFF2-40B4-BE49-F238E27FC236}">
-                <a16:creationId xmlns:a16="http://schemas.microsoft.com/office/drawing/2014/main" id="{759474E2-8F3C-C5AF-78C1-F3B3E00ACDCA}"/>
-              </a:ext>
-            </a:extLst>
-          </p:cNvPr>
-          <p:cNvSpPr txBox="1"/>
-          <p:nvPr/>
-        </p:nvSpPr>
-        <p:spPr>
-          <a:xfrm>
-            <a:off x="728027" y="1123226"/>
-            <a:ext cx="7455945" cy="5013039"/>
-          </a:xfrm>
-          <a:prstGeom prst="rect">
-            <a:avLst/>
-          </a:prstGeom>
-          <a:noFill/>
-        </p:spPr>
-        <p:txBody>
-          <a:bodyPr wrap="square" rtlCol="0">
-            <a:spAutoFit/>
-          </a:bodyPr>
-          <a:lstStyle/>
-          <a:p>
-            <a:pPr marL="342900" indent="-342900">
-              <a:lnSpc>
-                <a:spcPct val="250000"/>
-              </a:lnSpc>
-              <a:buFont typeface="Wingdings" panose="05000000000000000000" pitchFamily="2" charset="2"/>
-              <a:buChar char="n"/>
-            </a:pPr>
-            <a:r>
-              <a:rPr lang="zh-CN" altLang="en-US" sz="2400" b="1" dirty="0">
-                <a:solidFill>
-                  <a:schemeClr val="accent5">
-                    <a:lumMod val="40000"/>
-                    <a:lumOff val="60000"/>
-                  </a:schemeClr>
-                </a:solidFill>
-                <a:latin typeface="微软雅黑" panose="020B0503020204020204" pitchFamily="34" charset="-122"/>
-                <a:ea typeface="微软雅黑" panose="020B0503020204020204" pitchFamily="34" charset="-122"/>
-              </a:rPr>
-              <a:t>研究背景与意义</a:t>
-            </a:r>
-            <a:endParaRPr lang="en-US" altLang="zh-CN" sz="2400" b="1" dirty="0">
-              <a:solidFill>
-                <a:schemeClr val="accent5">
-                  <a:lumMod val="40000"/>
-                  <a:lumOff val="60000"/>
-                </a:schemeClr>
-              </a:solidFill>
-              <a:latin typeface="微软雅黑" panose="020B0503020204020204" pitchFamily="34" charset="-122"/>
-              <a:ea typeface="微软雅黑" panose="020B0503020204020204" pitchFamily="34" charset="-122"/>
-            </a:endParaRPr>
-          </a:p>
-          <a:p>
-            <a:pPr marL="342900" indent="-342900">
-              <a:lnSpc>
-                <a:spcPct val="250000"/>
-              </a:lnSpc>
-              <a:buFont typeface="Wingdings" panose="05000000000000000000" pitchFamily="2" charset="2"/>
-              <a:buChar char="n"/>
-            </a:pPr>
-            <a:r>
-              <a:rPr lang="zh-CN" altLang="en-US" sz="2400" b="1" dirty="0">
-                <a:solidFill>
-                  <a:schemeClr val="accent5">
-                    <a:lumMod val="40000"/>
-                    <a:lumOff val="60000"/>
-                  </a:schemeClr>
-                </a:solidFill>
-                <a:latin typeface="微软雅黑" panose="020B0503020204020204" pitchFamily="34" charset="-122"/>
-                <a:ea typeface="微软雅黑" panose="020B0503020204020204" pitchFamily="34" charset="-122"/>
-              </a:rPr>
-              <a:t>研究目标与内容</a:t>
-            </a:r>
-            <a:endParaRPr lang="en-US" altLang="zh-CN" sz="2400" b="1" dirty="0">
-              <a:solidFill>
-                <a:schemeClr val="accent5">
-                  <a:lumMod val="40000"/>
-                  <a:lumOff val="60000"/>
-                </a:schemeClr>
-              </a:solidFill>
-              <a:latin typeface="微软雅黑" panose="020B0503020204020204" pitchFamily="34" charset="-122"/>
-              <a:ea typeface="微软雅黑" panose="020B0503020204020204" pitchFamily="34" charset="-122"/>
-            </a:endParaRPr>
-          </a:p>
-          <a:p>
-            <a:pPr marL="800100" lvl="1" indent="-342900">
-              <a:lnSpc>
-                <a:spcPct val="250000"/>
-              </a:lnSpc>
-              <a:buFont typeface="Wingdings" panose="05000000000000000000" pitchFamily="2" charset="2"/>
-              <a:buChar char="n"/>
-            </a:pPr>
-            <a:r>
-              <a:rPr lang="zh-CN" altLang="en-US" sz="2000" b="1" dirty="0">
-                <a:solidFill>
-                  <a:schemeClr val="accent5">
-                    <a:lumMod val="40000"/>
-                    <a:lumOff val="60000"/>
-                  </a:schemeClr>
-                </a:solidFill>
-                <a:latin typeface="微软雅黑" panose="020B0503020204020204" pitchFamily="34" charset="-122"/>
-                <a:ea typeface="微软雅黑" panose="020B0503020204020204" pitchFamily="34" charset="-122"/>
-              </a:rPr>
-              <a:t>物理一致约束下的动力学参数辨识</a:t>
-            </a:r>
-            <a:endParaRPr lang="en-US" altLang="zh-CN" sz="2000" b="1" dirty="0">
-              <a:solidFill>
-                <a:schemeClr val="accent5">
-                  <a:lumMod val="40000"/>
-                  <a:lumOff val="60000"/>
-                </a:schemeClr>
-              </a:solidFill>
-              <a:latin typeface="微软雅黑" panose="020B0503020204020204" pitchFamily="34" charset="-122"/>
-              <a:ea typeface="微软雅黑" panose="020B0503020204020204" pitchFamily="34" charset="-122"/>
-            </a:endParaRPr>
-          </a:p>
-          <a:p>
-            <a:pPr marL="800100" lvl="1" indent="-342900">
-              <a:lnSpc>
-                <a:spcPct val="250000"/>
-              </a:lnSpc>
-              <a:buFont typeface="Wingdings" panose="05000000000000000000" pitchFamily="2" charset="2"/>
-              <a:buChar char="n"/>
-            </a:pPr>
-            <a:r>
-              <a:rPr lang="zh-CN" altLang="en-US" sz="2000" b="1" dirty="0">
-                <a:solidFill>
-                  <a:schemeClr val="accent5">
-                    <a:lumMod val="40000"/>
-                    <a:lumOff val="60000"/>
-                  </a:schemeClr>
-                </a:solidFill>
-                <a:latin typeface="微软雅黑" panose="020B0503020204020204" pitchFamily="34" charset="-122"/>
-                <a:ea typeface="微软雅黑" panose="020B0503020204020204" pitchFamily="34" charset="-122"/>
-              </a:rPr>
-              <a:t>冗余机械臂分层阻抗控制</a:t>
-            </a:r>
-            <a:endParaRPr lang="en-US" altLang="zh-CN" sz="2000" b="1" dirty="0">
-              <a:solidFill>
-                <a:schemeClr val="accent5">
-                  <a:lumMod val="40000"/>
-                  <a:lumOff val="60000"/>
-                </a:schemeClr>
-              </a:solidFill>
-              <a:latin typeface="微软雅黑" panose="020B0503020204020204" pitchFamily="34" charset="-122"/>
-              <a:ea typeface="微软雅黑" panose="020B0503020204020204" pitchFamily="34" charset="-122"/>
-            </a:endParaRPr>
-          </a:p>
-          <a:p>
-            <a:pPr marL="800100" lvl="1" indent="-342900">
-              <a:lnSpc>
-                <a:spcPct val="250000"/>
-              </a:lnSpc>
-              <a:buFont typeface="Wingdings" panose="05000000000000000000" pitchFamily="2" charset="2"/>
-              <a:buChar char="n"/>
-            </a:pPr>
-            <a:r>
-              <a:rPr lang="zh-CN" altLang="en-US" sz="2000" b="1" dirty="0">
-                <a:solidFill>
-                  <a:schemeClr val="accent5">
-                    <a:lumMod val="40000"/>
-                    <a:lumOff val="60000"/>
-                  </a:schemeClr>
-                </a:solidFill>
-                <a:latin typeface="微软雅黑" panose="020B0503020204020204" pitchFamily="34" charset="-122"/>
-                <a:ea typeface="微软雅黑" panose="020B0503020204020204" pitchFamily="34" charset="-122"/>
-              </a:rPr>
-              <a:t>碰撞检测与误报抑制</a:t>
-            </a:r>
-            <a:endParaRPr lang="en-US" altLang="zh-CN" sz="2000" b="1" dirty="0">
-              <a:solidFill>
-                <a:schemeClr val="accent5">
-                  <a:lumMod val="40000"/>
-                  <a:lumOff val="60000"/>
-                </a:schemeClr>
-              </a:solidFill>
-              <a:latin typeface="微软雅黑" panose="020B0503020204020204" pitchFamily="34" charset="-122"/>
-              <a:ea typeface="微软雅黑" panose="020B0503020204020204" pitchFamily="34" charset="-122"/>
-            </a:endParaRPr>
-          </a:p>
-          <a:p>
-            <a:pPr marL="342900" indent="-342900">
-              <a:lnSpc>
-                <a:spcPct val="250000"/>
-              </a:lnSpc>
-              <a:buFont typeface="Wingdings" panose="05000000000000000000" pitchFamily="2" charset="2"/>
-              <a:buChar char="n"/>
-            </a:pPr>
-            <a:r>
-              <a:rPr lang="zh-CN" altLang="en-US" sz="2400" b="1" dirty="0">
-                <a:solidFill>
-                  <a:srgbClr val="002060"/>
-                </a:solidFill>
-                <a:latin typeface="微软雅黑" panose="020B0503020204020204" pitchFamily="34" charset="-122"/>
-                <a:ea typeface="微软雅黑" panose="020B0503020204020204" pitchFamily="34" charset="-122"/>
-              </a:rPr>
-              <a:t>预期成果与进度安排</a:t>
-            </a:r>
-            <a:endParaRPr lang="en-US" altLang="zh-CN" sz="2400" b="1" dirty="0">
-              <a:solidFill>
-                <a:srgbClr val="002060"/>
-              </a:solidFill>
-              <a:latin typeface="微软雅黑" panose="020B0503020204020204" pitchFamily="34" charset="-122"/>
-              <a:ea typeface="微软雅黑" panose="020B0503020204020204" pitchFamily="34" charset="-122"/>
-            </a:endParaRPr>
-          </a:p>
-        </p:txBody>
-      </p:sp>
-    </p:spTree>
-    <p:extLst>
-      <p:ext uri="{BB962C8B-B14F-4D97-AF65-F5344CB8AC3E}">
-        <p14:creationId xmlns:p14="http://schemas.microsoft.com/office/powerpoint/2010/main" val="480813708"/>
-      </p:ext>
-    </p:extLst>
-  </p:cSld>
-  <p:clrMapOvr>
-    <a:masterClrMapping/>
-  </p:clrMapOvr>
-</p:sld>
-</file>
-
-<file path=ppt/slides/slide11.xml><?xml version="1.0" encoding="utf-8"?>
-<p:sld xmlns:a="http://schemas.openxmlformats.org/drawingml/2006/main" xmlns:r="http://schemas.openxmlformats.org/officeDocument/2006/relationships" xmlns:p="http://schemas.openxmlformats.org/presentationml/2006/main">
-  <p:cSld>
-    <p:spTree>
-      <p:nvGrpSpPr>
-        <p:cNvPr id="1" name="">
-          <a:extLst>
-            <a:ext uri="{FF2B5EF4-FFF2-40B4-BE49-F238E27FC236}">
-              <a16:creationId xmlns:a16="http://schemas.microsoft.com/office/drawing/2014/main" id="{6BCEB7DA-17B7-7715-DE47-12F6DC804047}"/>
-            </a:ext>
-          </a:extLst>
-        </p:cNvPr>
-        <p:cNvGrpSpPr/>
-        <p:nvPr/>
-      </p:nvGrpSpPr>
-      <p:grpSpPr>
-        <a:xfrm>
-          <a:off x="0" y="0"/>
-          <a:ext cx="0" cy="0"/>
-          <a:chOff x="0" y="0"/>
-          <a:chExt cx="0" cy="0"/>
-        </a:xfrm>
-      </p:grpSpPr>
-      <p:sp>
-        <p:nvSpPr>
-          <p:cNvPr id="6146" name="Rectangle 8">
-            <a:extLst>
-              <a:ext uri="{FF2B5EF4-FFF2-40B4-BE49-F238E27FC236}">
-                <a16:creationId xmlns:a16="http://schemas.microsoft.com/office/drawing/2014/main" id="{4CD542E5-D7AB-D741-FD35-59665782331D}"/>
-              </a:ext>
-            </a:extLst>
-          </p:cNvPr>
-          <p:cNvSpPr>
-            <a:spLocks noChangeArrowheads="1"/>
-          </p:cNvSpPr>
-          <p:nvPr/>
-        </p:nvSpPr>
-        <p:spPr bwMode="auto">
-          <a:xfrm>
-            <a:off x="0" y="0"/>
-            <a:ext cx="9144000" cy="0"/>
-          </a:xfrm>
-          <a:prstGeom prst="rect">
-            <a:avLst/>
-          </a:prstGeom>
-          <a:noFill/>
-          <a:ln>
-            <a:noFill/>
-          </a:ln>
-          <a:extLst>
-            <a:ext uri="{909E8E84-426E-40DD-AFC4-6F175D3DCCD1}">
-              <a14:hiddenFill xmlns:a14="http://schemas.microsoft.com/office/drawing/2010/main">
-                <a:solidFill>
-                  <a:srgbClr val="FFFFFF"/>
-                </a:solidFill>
-              </a14:hiddenFill>
-            </a:ext>
-            <a:ext uri="{91240B29-F687-4F45-9708-019B960494DF}">
-              <a14:hiddenLine xmlns:a14="http://schemas.microsoft.com/office/drawing/2010/main" w="9525">
-                <a:solidFill>
-                  <a:srgbClr val="000000"/>
-                </a:solidFill>
-                <a:miter lim="800000"/>
-                <a:headEnd/>
-                <a:tailEnd/>
-              </a14:hiddenLine>
-            </a:ext>
-          </a:extLst>
-        </p:spPr>
-        <p:txBody>
-          <a:bodyPr wrap="none" anchor="ctr">
-            <a:spAutoFit/>
-          </a:bodyPr>
-          <a:lstStyle>
-            <a:lvl1pPr>
-              <a:defRPr>
-                <a:solidFill>
-                  <a:schemeClr val="tx1"/>
-                </a:solidFill>
-                <a:latin typeface="Arial" panose="020B0604020202020204" pitchFamily="34" charset="0"/>
-                <a:ea typeface="宋体" panose="02010600030101010101" pitchFamily="2" charset="-122"/>
-              </a:defRPr>
-            </a:lvl1pPr>
-            <a:lvl2pPr marL="742950" indent="-285750">
-              <a:defRPr>
-                <a:solidFill>
-                  <a:schemeClr val="tx1"/>
-                </a:solidFill>
-                <a:latin typeface="Arial" panose="020B0604020202020204" pitchFamily="34" charset="0"/>
-                <a:ea typeface="宋体" panose="02010600030101010101" pitchFamily="2" charset="-122"/>
-              </a:defRPr>
-            </a:lvl2pPr>
-            <a:lvl3pPr marL="1143000" indent="-228600">
-              <a:defRPr>
-                <a:solidFill>
-                  <a:schemeClr val="tx1"/>
-                </a:solidFill>
-                <a:latin typeface="Arial" panose="020B0604020202020204" pitchFamily="34" charset="0"/>
-                <a:ea typeface="宋体" panose="02010600030101010101" pitchFamily="2" charset="-122"/>
-              </a:defRPr>
-            </a:lvl3pPr>
-            <a:lvl4pPr marL="1600200" indent="-228600">
-              <a:defRPr>
-                <a:solidFill>
-                  <a:schemeClr val="tx1"/>
-                </a:solidFill>
-                <a:latin typeface="Arial" panose="020B0604020202020204" pitchFamily="34" charset="0"/>
-                <a:ea typeface="宋体" panose="02010600030101010101" pitchFamily="2" charset="-122"/>
-              </a:defRPr>
-            </a:lvl4pPr>
-            <a:lvl5pPr marL="2057400" indent="-228600">
-              <a:defRPr>
-                <a:solidFill>
-                  <a:schemeClr val="tx1"/>
-                </a:solidFill>
-                <a:latin typeface="Arial" panose="020B0604020202020204" pitchFamily="34" charset="0"/>
-                <a:ea typeface="宋体" panose="02010600030101010101" pitchFamily="2" charset="-122"/>
-              </a:defRPr>
-            </a:lvl5pPr>
-            <a:lvl6pPr marL="2514600" indent="-228600" eaLnBrk="0" fontAlgn="base" hangingPunct="0">
-              <a:spcBef>
-                <a:spcPct val="0"/>
-              </a:spcBef>
-              <a:spcAft>
-                <a:spcPct val="0"/>
-              </a:spcAft>
-              <a:defRPr>
-                <a:solidFill>
-                  <a:schemeClr val="tx1"/>
-                </a:solidFill>
-                <a:latin typeface="Arial" panose="020B0604020202020204" pitchFamily="34" charset="0"/>
-                <a:ea typeface="宋体" panose="02010600030101010101" pitchFamily="2" charset="-122"/>
-              </a:defRPr>
-            </a:lvl6pPr>
-            <a:lvl7pPr marL="2971800" indent="-228600" eaLnBrk="0" fontAlgn="base" hangingPunct="0">
-              <a:spcBef>
-                <a:spcPct val="0"/>
-              </a:spcBef>
-              <a:spcAft>
-                <a:spcPct val="0"/>
-              </a:spcAft>
-              <a:defRPr>
-                <a:solidFill>
-                  <a:schemeClr val="tx1"/>
-                </a:solidFill>
-                <a:latin typeface="Arial" panose="020B0604020202020204" pitchFamily="34" charset="0"/>
-                <a:ea typeface="宋体" panose="02010600030101010101" pitchFamily="2" charset="-122"/>
-              </a:defRPr>
-            </a:lvl7pPr>
-            <a:lvl8pPr marL="3429000" indent="-228600" eaLnBrk="0" fontAlgn="base" hangingPunct="0">
-              <a:spcBef>
-                <a:spcPct val="0"/>
-              </a:spcBef>
-              <a:spcAft>
-                <a:spcPct val="0"/>
-              </a:spcAft>
-              <a:defRPr>
-                <a:solidFill>
-                  <a:schemeClr val="tx1"/>
-                </a:solidFill>
-                <a:latin typeface="Arial" panose="020B0604020202020204" pitchFamily="34" charset="0"/>
-                <a:ea typeface="宋体" panose="02010600030101010101" pitchFamily="2" charset="-122"/>
-              </a:defRPr>
-            </a:lvl8pPr>
-            <a:lvl9pPr marL="3886200" indent="-228600" eaLnBrk="0" fontAlgn="base" hangingPunct="0">
-              <a:spcBef>
-                <a:spcPct val="0"/>
-              </a:spcBef>
-              <a:spcAft>
-                <a:spcPct val="0"/>
-              </a:spcAft>
-              <a:defRPr>
-                <a:solidFill>
-                  <a:schemeClr val="tx1"/>
-                </a:solidFill>
-                <a:latin typeface="Arial" panose="020B0604020202020204" pitchFamily="34" charset="0"/>
-                <a:ea typeface="宋体" panose="02010600030101010101" pitchFamily="2" charset="-122"/>
-              </a:defRPr>
-            </a:lvl9pPr>
-          </a:lstStyle>
-          <a:p>
-            <a:pPr eaLnBrk="1" latinLnBrk="1" hangingPunct="1"/>
-            <a:endParaRPr kumimoji="1" lang="zh-CN" altLang="en-US" sz="2400" b="1">
-              <a:latin typeface="Gulim" panose="020B0600000101010101" pitchFamily="34" charset="-127"/>
-              <a:ea typeface="Gulim" panose="020B0600000101010101" pitchFamily="34" charset="-127"/>
-            </a:endParaRPr>
-          </a:p>
-        </p:txBody>
-      </p:sp>
-      <p:sp>
-        <p:nvSpPr>
-          <p:cNvPr id="6148" name="矩形 5">
-            <a:extLst>
-              <a:ext uri="{FF2B5EF4-FFF2-40B4-BE49-F238E27FC236}">
-                <a16:creationId xmlns:a16="http://schemas.microsoft.com/office/drawing/2014/main" id="{13611A5B-22FF-CC7D-DE49-9EC68958AE8E}"/>
-              </a:ext>
-            </a:extLst>
-          </p:cNvPr>
-          <p:cNvSpPr>
-            <a:spLocks noChangeArrowheads="1"/>
-          </p:cNvSpPr>
-          <p:nvPr/>
-        </p:nvSpPr>
-        <p:spPr bwMode="auto">
-          <a:xfrm>
-            <a:off x="278847" y="3044971"/>
-            <a:ext cx="8666527" cy="584775"/>
-          </a:xfrm>
-          <a:prstGeom prst="rect">
-            <a:avLst/>
-          </a:prstGeom>
-          <a:noFill/>
-          <a:ln>
-            <a:noFill/>
-          </a:ln>
-          <a:extLst>
-            <a:ext uri="{909E8E84-426E-40DD-AFC4-6F175D3DCCD1}">
-              <a14:hiddenFill xmlns:a14="http://schemas.microsoft.com/office/drawing/2010/main">
-                <a:solidFill>
-                  <a:srgbClr val="FFFFFF"/>
-                </a:solidFill>
-              </a14:hiddenFill>
-            </a:ext>
-            <a:ext uri="{91240B29-F687-4F45-9708-019B960494DF}">
-              <a14:hiddenLine xmlns:a14="http://schemas.microsoft.com/office/drawing/2010/main" w="9525">
-                <a:solidFill>
-                  <a:srgbClr val="000000"/>
-                </a:solidFill>
-                <a:miter lim="800000"/>
-                <a:headEnd/>
-                <a:tailEnd/>
-              </a14:hiddenLine>
-            </a:ext>
-          </a:extLst>
-        </p:spPr>
-        <p:txBody>
-          <a:bodyPr wrap="square">
-            <a:spAutoFit/>
-          </a:bodyPr>
-          <a:lstStyle>
-            <a:lvl1pPr>
-              <a:defRPr>
-                <a:solidFill>
-                  <a:schemeClr val="tx1"/>
-                </a:solidFill>
-                <a:latin typeface="Arial" panose="020B0604020202020204" pitchFamily="34" charset="0"/>
-                <a:ea typeface="宋体" panose="02010600030101010101" pitchFamily="2" charset="-122"/>
-              </a:defRPr>
-            </a:lvl1pPr>
-            <a:lvl2pPr marL="742950" indent="-285750">
-              <a:defRPr>
-                <a:solidFill>
-                  <a:schemeClr val="tx1"/>
-                </a:solidFill>
-                <a:latin typeface="Arial" panose="020B0604020202020204" pitchFamily="34" charset="0"/>
-                <a:ea typeface="宋体" panose="02010600030101010101" pitchFamily="2" charset="-122"/>
-              </a:defRPr>
-            </a:lvl2pPr>
-            <a:lvl3pPr marL="1143000" indent="-228600">
-              <a:defRPr>
-                <a:solidFill>
-                  <a:schemeClr val="tx1"/>
-                </a:solidFill>
-                <a:latin typeface="Arial" panose="020B0604020202020204" pitchFamily="34" charset="0"/>
-                <a:ea typeface="宋体" panose="02010600030101010101" pitchFamily="2" charset="-122"/>
-              </a:defRPr>
-            </a:lvl3pPr>
-            <a:lvl4pPr marL="1600200" indent="-228600">
-              <a:defRPr>
-                <a:solidFill>
-                  <a:schemeClr val="tx1"/>
-                </a:solidFill>
-                <a:latin typeface="Arial" panose="020B0604020202020204" pitchFamily="34" charset="0"/>
-                <a:ea typeface="宋体" panose="02010600030101010101" pitchFamily="2" charset="-122"/>
-              </a:defRPr>
-            </a:lvl4pPr>
-            <a:lvl5pPr marL="2057400" indent="-228600">
-              <a:defRPr>
-                <a:solidFill>
-                  <a:schemeClr val="tx1"/>
-                </a:solidFill>
-                <a:latin typeface="Arial" panose="020B0604020202020204" pitchFamily="34" charset="0"/>
-                <a:ea typeface="宋体" panose="02010600030101010101" pitchFamily="2" charset="-122"/>
-              </a:defRPr>
-            </a:lvl5pPr>
-            <a:lvl6pPr marL="2514600" indent="-228600" eaLnBrk="0" fontAlgn="base" hangingPunct="0">
-              <a:spcBef>
-                <a:spcPct val="0"/>
-              </a:spcBef>
-              <a:spcAft>
-                <a:spcPct val="0"/>
-              </a:spcAft>
-              <a:defRPr>
-                <a:solidFill>
-                  <a:schemeClr val="tx1"/>
-                </a:solidFill>
-                <a:latin typeface="Arial" panose="020B0604020202020204" pitchFamily="34" charset="0"/>
-                <a:ea typeface="宋体" panose="02010600030101010101" pitchFamily="2" charset="-122"/>
-              </a:defRPr>
-            </a:lvl6pPr>
-            <a:lvl7pPr marL="2971800" indent="-228600" eaLnBrk="0" fontAlgn="base" hangingPunct="0">
-              <a:spcBef>
-                <a:spcPct val="0"/>
-              </a:spcBef>
-              <a:spcAft>
-                <a:spcPct val="0"/>
-              </a:spcAft>
-              <a:defRPr>
-                <a:solidFill>
-                  <a:schemeClr val="tx1"/>
-                </a:solidFill>
-                <a:latin typeface="Arial" panose="020B0604020202020204" pitchFamily="34" charset="0"/>
-                <a:ea typeface="宋体" panose="02010600030101010101" pitchFamily="2" charset="-122"/>
-              </a:defRPr>
-            </a:lvl7pPr>
-            <a:lvl8pPr marL="3429000" indent="-228600" eaLnBrk="0" fontAlgn="base" hangingPunct="0">
-              <a:spcBef>
-                <a:spcPct val="0"/>
-              </a:spcBef>
-              <a:spcAft>
-                <a:spcPct val="0"/>
-              </a:spcAft>
-              <a:defRPr>
-                <a:solidFill>
-                  <a:schemeClr val="tx1"/>
-                </a:solidFill>
-                <a:latin typeface="Arial" panose="020B0604020202020204" pitchFamily="34" charset="0"/>
-                <a:ea typeface="宋体" panose="02010600030101010101" pitchFamily="2" charset="-122"/>
-              </a:defRPr>
-            </a:lvl8pPr>
-            <a:lvl9pPr marL="3886200" indent="-228600" eaLnBrk="0" fontAlgn="base" hangingPunct="0">
-              <a:spcBef>
-                <a:spcPct val="0"/>
-              </a:spcBef>
-              <a:spcAft>
-                <a:spcPct val="0"/>
-              </a:spcAft>
-              <a:defRPr>
-                <a:solidFill>
-                  <a:schemeClr val="tx1"/>
-                </a:solidFill>
-                <a:latin typeface="Arial" panose="020B0604020202020204" pitchFamily="34" charset="0"/>
-                <a:ea typeface="宋体" panose="02010600030101010101" pitchFamily="2" charset="-122"/>
-              </a:defRPr>
-            </a:lvl9pPr>
-          </a:lstStyle>
-          <a:p>
-            <a:pPr algn="ctr"/>
-            <a:r>
-              <a:rPr lang="zh-CN" altLang="en-US" sz="3200" b="1" dirty="0">
-                <a:solidFill>
-                  <a:schemeClr val="bg1"/>
-                </a:solidFill>
-                <a:latin typeface="微软雅黑" panose="020B0503020204020204" pitchFamily="34" charset="-122"/>
-                <a:ea typeface="微软雅黑" panose="020B0503020204020204" pitchFamily="34" charset="-122"/>
-              </a:rPr>
-              <a:t>第二次组会汇报</a:t>
-            </a:r>
-          </a:p>
-        </p:txBody>
-      </p:sp>
-      <p:sp>
-        <p:nvSpPr>
-          <p:cNvPr id="3" name="矩形 2">
-            <a:extLst>
-              <a:ext uri="{FF2B5EF4-FFF2-40B4-BE49-F238E27FC236}">
-                <a16:creationId xmlns:a16="http://schemas.microsoft.com/office/drawing/2014/main" id="{72CC0F58-7133-50C0-FDC1-9F0C7D869BDF}"/>
-              </a:ext>
-            </a:extLst>
-          </p:cNvPr>
-          <p:cNvSpPr/>
-          <p:nvPr/>
-        </p:nvSpPr>
-        <p:spPr>
-          <a:xfrm>
-            <a:off x="-8157" y="0"/>
-            <a:ext cx="9152157" cy="341616"/>
-          </a:xfrm>
-          <a:prstGeom prst="rect">
-            <a:avLst/>
-          </a:prstGeom>
-          <a:solidFill>
-            <a:schemeClr val="accent1">
-              <a:lumMod val="50000"/>
-            </a:schemeClr>
-          </a:solidFill>
-        </p:spPr>
-        <p:style>
-          <a:lnRef idx="2">
-            <a:schemeClr val="accent1">
-              <a:shade val="50000"/>
-            </a:schemeClr>
-          </a:lnRef>
-          <a:fillRef idx="1">
-            <a:schemeClr val="accent1"/>
-          </a:fillRef>
-          <a:effectRef idx="0">
-            <a:schemeClr val="accent1"/>
-          </a:effectRef>
-          <a:fontRef idx="minor">
-            <a:schemeClr val="lt1"/>
-          </a:fontRef>
-        </p:style>
-        <p:txBody>
-          <a:bodyPr rtlCol="0" anchor="ctr"/>
-          <a:lstStyle/>
-          <a:p>
-            <a:pPr algn="ctr"/>
-            <a:endParaRPr lang="zh-CN" altLang="en-US" dirty="0">
-              <a:solidFill>
-                <a:srgbClr val="002060"/>
-              </a:solidFill>
-            </a:endParaRPr>
-          </a:p>
-        </p:txBody>
-      </p:sp>
-      <p:sp>
-        <p:nvSpPr>
-          <p:cNvPr id="4" name="矩形 3">
-            <a:extLst>
-              <a:ext uri="{FF2B5EF4-FFF2-40B4-BE49-F238E27FC236}">
-                <a16:creationId xmlns:a16="http://schemas.microsoft.com/office/drawing/2014/main" id="{74D57E97-958A-0318-97EA-AEA5CA61CB16}"/>
-              </a:ext>
-            </a:extLst>
-          </p:cNvPr>
-          <p:cNvSpPr/>
-          <p:nvPr/>
-        </p:nvSpPr>
-        <p:spPr>
-          <a:xfrm>
-            <a:off x="-8157" y="340793"/>
-            <a:ext cx="9152156" cy="584770"/>
-          </a:xfrm>
-          <a:prstGeom prst="rect">
-            <a:avLst/>
-          </a:prstGeom>
-          <a:solidFill>
-            <a:schemeClr val="accent3">
-              <a:lumMod val="60000"/>
-              <a:lumOff val="40000"/>
-            </a:schemeClr>
-          </a:solidFill>
-          <a:ln>
-            <a:noFill/>
-          </a:ln>
-        </p:spPr>
-        <p:style>
-          <a:lnRef idx="2">
-            <a:schemeClr val="accent1">
-              <a:shade val="50000"/>
-            </a:schemeClr>
-          </a:lnRef>
-          <a:fillRef idx="1">
-            <a:schemeClr val="accent1"/>
-          </a:fillRef>
-          <a:effectRef idx="0">
-            <a:schemeClr val="accent1"/>
-          </a:effectRef>
-          <a:fontRef idx="minor">
-            <a:schemeClr val="lt1"/>
-          </a:fontRef>
-        </p:style>
-        <p:txBody>
-          <a:bodyPr anchor="ctr"/>
-          <a:lstStyle/>
-          <a:p>
-            <a:pPr algn="ctr">
-              <a:defRPr/>
-            </a:pPr>
-            <a:endParaRPr lang="zh-CN" altLang="en-US" dirty="0">
-              <a:solidFill>
-                <a:srgbClr val="005D98"/>
-              </a:solidFill>
-              <a:latin typeface="微软雅黑" panose="020B0503020204020204" pitchFamily="34" charset="-122"/>
-              <a:ea typeface="微软雅黑" panose="020B0503020204020204" pitchFamily="34" charset="-122"/>
-            </a:endParaRPr>
-          </a:p>
-        </p:txBody>
-      </p:sp>
-      <p:sp>
-        <p:nvSpPr>
-          <p:cNvPr id="6" name="文本框 5">
-            <a:extLst>
-              <a:ext uri="{FF2B5EF4-FFF2-40B4-BE49-F238E27FC236}">
-                <a16:creationId xmlns:a16="http://schemas.microsoft.com/office/drawing/2014/main" id="{BAFCB722-C039-3E64-71E5-6A21FA9B2799}"/>
-              </a:ext>
-            </a:extLst>
-          </p:cNvPr>
-          <p:cNvSpPr txBox="1"/>
-          <p:nvPr/>
-        </p:nvSpPr>
-        <p:spPr>
-          <a:xfrm>
-            <a:off x="187898" y="402345"/>
-            <a:ext cx="6692962" cy="461665"/>
-          </a:xfrm>
-          <a:prstGeom prst="rect">
-            <a:avLst/>
-          </a:prstGeom>
-          <a:noFill/>
-        </p:spPr>
-        <p:txBody>
-          <a:bodyPr wrap="square">
-            <a:spAutoFit/>
-          </a:bodyPr>
-          <a:lstStyle/>
-          <a:p>
-            <a:pPr lvl="0" defTabSz="457200" eaLnBrk="1" fontAlgn="auto" hangingPunct="1">
-              <a:spcBef>
-                <a:spcPts val="0"/>
-              </a:spcBef>
-              <a:spcAft>
-                <a:spcPts val="0"/>
-              </a:spcAft>
-              <a:defRPr/>
-            </a:pPr>
-            <a:r>
-              <a:rPr lang="zh-CN" altLang="en-US" sz="2400" b="1" dirty="0">
-                <a:solidFill>
-                  <a:srgbClr val="002060"/>
-                </a:solidFill>
-                <a:latin typeface="微软雅黑" panose="020B0503020204020204" pitchFamily="34" charset="-122"/>
-                <a:ea typeface="微软雅黑" panose="020B0503020204020204" pitchFamily="34" charset="-122"/>
-              </a:rPr>
-              <a:t>预期成果</a:t>
-            </a:r>
-          </a:p>
-        </p:txBody>
-      </p:sp>
-      <p:sp>
-        <p:nvSpPr>
-          <p:cNvPr id="21" name="矩形 20">
-            <a:extLst>
-              <a:ext uri="{FF2B5EF4-FFF2-40B4-BE49-F238E27FC236}">
-                <a16:creationId xmlns:a16="http://schemas.microsoft.com/office/drawing/2014/main" id="{01D01F3A-A45C-9599-1793-8335C2AE9A00}"/>
-              </a:ext>
-            </a:extLst>
-          </p:cNvPr>
-          <p:cNvSpPr/>
-          <p:nvPr/>
-        </p:nvSpPr>
-        <p:spPr>
-          <a:xfrm>
-            <a:off x="6583680" y="6624636"/>
-            <a:ext cx="2560320" cy="233364"/>
-          </a:xfrm>
-          <a:prstGeom prst="rect">
-            <a:avLst/>
-          </a:prstGeom>
-          <a:solidFill>
-            <a:schemeClr val="accent3">
-              <a:lumMod val="20000"/>
-              <a:lumOff val="80000"/>
-            </a:schemeClr>
-          </a:solidFill>
-          <a:ln>
-            <a:noFill/>
-          </a:ln>
-        </p:spPr>
-        <p:style>
-          <a:lnRef idx="2">
-            <a:schemeClr val="accent1">
-              <a:shade val="50000"/>
-            </a:schemeClr>
-          </a:lnRef>
-          <a:fillRef idx="1">
-            <a:schemeClr val="accent1"/>
-          </a:fillRef>
-          <a:effectRef idx="0">
-            <a:schemeClr val="accent1"/>
-          </a:effectRef>
-          <a:fontRef idx="minor">
-            <a:schemeClr val="lt1"/>
-          </a:fontRef>
-        </p:style>
-        <p:txBody>
-          <a:bodyPr anchor="ctr"/>
-          <a:lstStyle/>
-          <a:p>
-            <a:pPr algn="ctr">
-              <a:defRPr/>
-            </a:pPr>
-            <a:r>
-              <a:rPr lang="en-US" altLang="zh-CN" dirty="0">
-                <a:solidFill>
-                  <a:srgbClr val="005D98"/>
-                </a:solidFill>
-                <a:latin typeface="Times New Roman" panose="02020603050405020304" pitchFamily="18" charset="0"/>
-                <a:cs typeface="Times New Roman" panose="02020603050405020304" pitchFamily="18" charset="0"/>
-              </a:rPr>
-              <a:t>2026/04/27      11/13</a:t>
-            </a:r>
-            <a:endParaRPr lang="zh-CN" altLang="en-US" dirty="0">
-              <a:solidFill>
-                <a:srgbClr val="005D98"/>
-              </a:solidFill>
-              <a:latin typeface="Times New Roman" panose="02020603050405020304" pitchFamily="18" charset="0"/>
-              <a:cs typeface="Times New Roman" panose="02020603050405020304" pitchFamily="18" charset="0"/>
-            </a:endParaRPr>
-          </a:p>
-        </p:txBody>
-      </p:sp>
-      <p:sp>
-        <p:nvSpPr>
-          <p:cNvPr id="22" name="矩形 21">
-            <a:extLst>
-              <a:ext uri="{FF2B5EF4-FFF2-40B4-BE49-F238E27FC236}">
-                <a16:creationId xmlns:a16="http://schemas.microsoft.com/office/drawing/2014/main" id="{B9361EE2-29C0-7124-6362-9C7DB442F72F}"/>
-              </a:ext>
-            </a:extLst>
-          </p:cNvPr>
-          <p:cNvSpPr/>
-          <p:nvPr/>
-        </p:nvSpPr>
-        <p:spPr>
-          <a:xfrm>
-            <a:off x="0" y="6624637"/>
-            <a:ext cx="2560320" cy="233364"/>
-          </a:xfrm>
-          <a:prstGeom prst="rect">
-            <a:avLst/>
-          </a:prstGeom>
-          <a:solidFill>
-            <a:schemeClr val="accent3">
-              <a:lumMod val="60000"/>
-              <a:lumOff val="40000"/>
-            </a:schemeClr>
-          </a:solidFill>
-          <a:ln>
-            <a:noFill/>
-          </a:ln>
-        </p:spPr>
-        <p:style>
-          <a:lnRef idx="2">
-            <a:schemeClr val="accent1">
-              <a:shade val="50000"/>
-            </a:schemeClr>
-          </a:lnRef>
-          <a:fillRef idx="1">
-            <a:schemeClr val="accent1"/>
-          </a:fillRef>
-          <a:effectRef idx="0">
-            <a:schemeClr val="accent1"/>
-          </a:effectRef>
-          <a:fontRef idx="minor">
-            <a:schemeClr val="lt1"/>
-          </a:fontRef>
-        </p:style>
-        <p:txBody>
-          <a:bodyPr anchor="ctr"/>
-          <a:lstStyle/>
-          <a:p>
-            <a:pPr algn="ctr">
-              <a:defRPr/>
-            </a:pPr>
-            <a:r>
-              <a:rPr lang="zh-CN" altLang="en-US" dirty="0">
-                <a:solidFill>
-                  <a:srgbClr val="005D98"/>
-                </a:solidFill>
-                <a:latin typeface="微软雅黑" panose="020B0503020204020204" pitchFamily="34" charset="-122"/>
-                <a:ea typeface="微软雅黑" panose="020B0503020204020204" pitchFamily="34" charset="-122"/>
-              </a:rPr>
-              <a:t>张世杰</a:t>
-            </a:r>
-          </a:p>
-        </p:txBody>
-      </p:sp>
-      <p:sp>
-        <p:nvSpPr>
-          <p:cNvPr id="23" name="矩形 22">
-            <a:extLst>
-              <a:ext uri="{FF2B5EF4-FFF2-40B4-BE49-F238E27FC236}">
-                <a16:creationId xmlns:a16="http://schemas.microsoft.com/office/drawing/2014/main" id="{6A5C7C2D-A86C-367F-75C8-68CFB8BB3A21}"/>
-              </a:ext>
-            </a:extLst>
-          </p:cNvPr>
-          <p:cNvSpPr/>
-          <p:nvPr/>
-        </p:nvSpPr>
-        <p:spPr>
-          <a:xfrm>
-            <a:off x="2560320" y="6624637"/>
-            <a:ext cx="4023360" cy="233365"/>
-          </a:xfrm>
-          <a:prstGeom prst="rect">
-            <a:avLst/>
-          </a:prstGeom>
-          <a:solidFill>
-            <a:schemeClr val="accent3">
-              <a:lumMod val="40000"/>
-              <a:lumOff val="60000"/>
-            </a:schemeClr>
-          </a:solidFill>
-          <a:ln>
-            <a:noFill/>
-          </a:ln>
-        </p:spPr>
-        <p:style>
-          <a:lnRef idx="2">
-            <a:schemeClr val="accent1">
-              <a:shade val="50000"/>
-            </a:schemeClr>
-          </a:lnRef>
-          <a:fillRef idx="1">
-            <a:schemeClr val="accent1"/>
-          </a:fillRef>
-          <a:effectRef idx="0">
-            <a:schemeClr val="accent1"/>
-          </a:effectRef>
-          <a:fontRef idx="minor">
-            <a:schemeClr val="lt1"/>
-          </a:fontRef>
-        </p:style>
-        <p:txBody>
-          <a:bodyPr anchor="ctr"/>
-          <a:lstStyle/>
-          <a:p>
-            <a:pPr algn="ctr">
-              <a:defRPr/>
-            </a:pPr>
-            <a:r>
-              <a:rPr lang="zh-CN" altLang="en-US" dirty="0">
-                <a:solidFill>
-                  <a:srgbClr val="005D98"/>
-                </a:solidFill>
-                <a:latin typeface="微软雅黑" panose="020B0503020204020204" pitchFamily="34" charset="-122"/>
-                <a:ea typeface="微软雅黑" panose="020B0503020204020204" pitchFamily="34" charset="-122"/>
-              </a:rPr>
-              <a:t>冗余机械臂柔顺控制与安全交互研究</a:t>
-            </a:r>
-          </a:p>
-        </p:txBody>
-      </p:sp>
-      <p:sp>
-        <p:nvSpPr>
-          <p:cNvPr id="5" name="文本框 4">
-            <a:extLst>
-              <a:ext uri="{FF2B5EF4-FFF2-40B4-BE49-F238E27FC236}">
-                <a16:creationId xmlns:a16="http://schemas.microsoft.com/office/drawing/2014/main" id="{2C6418A9-DED5-4E3B-56EF-5EDE9A1F7908}"/>
-              </a:ext>
-            </a:extLst>
-          </p:cNvPr>
-          <p:cNvSpPr txBox="1"/>
-          <p:nvPr/>
-        </p:nvSpPr>
-        <p:spPr bwMode="auto">
-          <a:xfrm>
-            <a:off x="187899" y="-57186"/>
-            <a:ext cx="1620248" cy="377411"/>
-          </a:xfrm>
-          <a:prstGeom prst="rect">
-            <a:avLst/>
-          </a:prstGeom>
-          <a:noFill/>
-          <a:ln w="9525">
-            <a:noFill/>
-            <a:miter lim="800000"/>
-          </a:ln>
-        </p:spPr>
-        <p:txBody>
-          <a:bodyPr wrap="square" rtlCol="0">
-            <a:spAutoFit/>
-          </a:bodyPr>
-          <a:lstStyle/>
-          <a:p>
-            <a:pPr algn="dist">
-              <a:lnSpc>
-                <a:spcPct val="150000"/>
-              </a:lnSpc>
-              <a:spcAft>
-                <a:spcPts val="0"/>
-              </a:spcAft>
-              <a:buNone/>
-            </a:pPr>
-            <a:r>
-              <a:rPr lang="zh-CN" altLang="en-US" sz="1400" dirty="0">
-                <a:solidFill>
-                  <a:schemeClr val="bg2">
-                    <a:lumMod val="75000"/>
-                  </a:schemeClr>
-                </a:solidFill>
-                <a:latin typeface="微软雅黑" panose="020B0503020204020204" pitchFamily="34" charset="-122"/>
-                <a:ea typeface="微软雅黑" panose="020B0503020204020204" pitchFamily="34" charset="-122"/>
-              </a:rPr>
-              <a:t>研究背景与意义</a:t>
-            </a:r>
-          </a:p>
-        </p:txBody>
-      </p:sp>
-      <p:sp>
-        <p:nvSpPr>
-          <p:cNvPr id="7" name="文本框 6">
-            <a:extLst>
-              <a:ext uri="{FF2B5EF4-FFF2-40B4-BE49-F238E27FC236}">
-                <a16:creationId xmlns:a16="http://schemas.microsoft.com/office/drawing/2014/main" id="{5CC50FFC-1DA4-611B-2AAA-B5106C4F7381}"/>
-              </a:ext>
-            </a:extLst>
-          </p:cNvPr>
-          <p:cNvSpPr txBox="1"/>
-          <p:nvPr/>
-        </p:nvSpPr>
-        <p:spPr bwMode="auto">
-          <a:xfrm>
-            <a:off x="3757797" y="-57187"/>
-            <a:ext cx="1620248" cy="377411"/>
-          </a:xfrm>
-          <a:prstGeom prst="rect">
-            <a:avLst/>
-          </a:prstGeom>
-          <a:noFill/>
-          <a:ln w="9525">
-            <a:noFill/>
-            <a:miter lim="800000"/>
-          </a:ln>
-        </p:spPr>
-        <p:txBody>
-          <a:bodyPr wrap="square" rtlCol="0">
-            <a:spAutoFit/>
-          </a:bodyPr>
-          <a:lstStyle/>
-          <a:p>
-            <a:pPr algn="dist">
-              <a:lnSpc>
-                <a:spcPct val="150000"/>
-              </a:lnSpc>
-              <a:spcAft>
-                <a:spcPts val="0"/>
-              </a:spcAft>
-              <a:buNone/>
-            </a:pPr>
-            <a:r>
-              <a:rPr lang="zh-CN" altLang="en-US" sz="1400" dirty="0">
-                <a:solidFill>
-                  <a:schemeClr val="bg2">
-                    <a:lumMod val="75000"/>
-                  </a:schemeClr>
-                </a:solidFill>
-                <a:latin typeface="微软雅黑" panose="020B0503020204020204" pitchFamily="34" charset="-122"/>
-                <a:ea typeface="微软雅黑" panose="020B0503020204020204" pitchFamily="34" charset="-122"/>
-              </a:rPr>
-              <a:t>研究目标与内容</a:t>
-            </a:r>
-          </a:p>
-        </p:txBody>
-      </p:sp>
-      <p:sp>
-        <p:nvSpPr>
-          <p:cNvPr id="8" name="文本框 7">
-            <a:extLst>
-              <a:ext uri="{FF2B5EF4-FFF2-40B4-BE49-F238E27FC236}">
-                <a16:creationId xmlns:a16="http://schemas.microsoft.com/office/drawing/2014/main" id="{FA64C0B2-BA71-BAF7-8F09-CA9E09EAF106}"/>
-              </a:ext>
-            </a:extLst>
-          </p:cNvPr>
-          <p:cNvSpPr txBox="1"/>
-          <p:nvPr/>
-        </p:nvSpPr>
-        <p:spPr bwMode="auto">
-          <a:xfrm>
-            <a:off x="7076915" y="-54857"/>
-            <a:ext cx="1879186" cy="377411"/>
-          </a:xfrm>
-          <a:prstGeom prst="rect">
-            <a:avLst/>
-          </a:prstGeom>
-          <a:noFill/>
-          <a:ln w="9525">
-            <a:noFill/>
-            <a:miter lim="800000"/>
-          </a:ln>
-        </p:spPr>
-        <p:txBody>
-          <a:bodyPr wrap="square" rtlCol="0">
-            <a:spAutoFit/>
-          </a:bodyPr>
-          <a:lstStyle/>
-          <a:p>
-            <a:pPr algn="dist">
-              <a:lnSpc>
-                <a:spcPct val="150000"/>
-              </a:lnSpc>
-              <a:spcAft>
-                <a:spcPts val="0"/>
-              </a:spcAft>
-              <a:buNone/>
-            </a:pPr>
-            <a:r>
-              <a:rPr lang="zh-CN" altLang="en-US" sz="1400" dirty="0">
-                <a:solidFill>
-                  <a:schemeClr val="bg1"/>
-                </a:solidFill>
-                <a:latin typeface="微软雅黑" panose="020B0503020204020204" pitchFamily="34" charset="-122"/>
-                <a:ea typeface="微软雅黑" panose="020B0503020204020204" pitchFamily="34" charset="-122"/>
-              </a:rPr>
-              <a:t>预期成果与进度安排</a:t>
-            </a:r>
-          </a:p>
-        </p:txBody>
-      </p:sp>
-      <p:sp>
-        <p:nvSpPr>
-          <p:cNvPr id="15" name="文本框 14">
-            <a:extLst>
-              <a:ext uri="{FF2B5EF4-FFF2-40B4-BE49-F238E27FC236}">
-                <a16:creationId xmlns:a16="http://schemas.microsoft.com/office/drawing/2014/main" id="{F463F182-1882-A955-4193-A12A42E53649}"/>
-              </a:ext>
-            </a:extLst>
-          </p:cNvPr>
-          <p:cNvSpPr txBox="1"/>
-          <p:nvPr/>
-        </p:nvSpPr>
-        <p:spPr>
-          <a:xfrm>
-            <a:off x="738972" y="2279016"/>
-            <a:ext cx="3613429" cy="1200329"/>
-          </a:xfrm>
-          <a:prstGeom prst="rect">
-            <a:avLst/>
-          </a:prstGeom>
-          <a:noFill/>
-        </p:spPr>
-        <p:txBody>
-          <a:bodyPr wrap="square" rtlCol="0">
-            <a:spAutoFit/>
-          </a:bodyPr>
-          <a:lstStyle/>
-          <a:p>
-            <a:pPr algn="ctr"/>
-            <a:r>
-              <a:rPr lang="zh-CN" altLang="en-US" sz="2400" b="1" dirty="0">
-                <a:solidFill>
-                  <a:schemeClr val="bg1"/>
-                </a:solidFill>
-                <a:latin typeface="微软雅黑" panose="020B0503020204020204" pitchFamily="34" charset="-122"/>
-                <a:ea typeface="微软雅黑" panose="020B0503020204020204" pitchFamily="34" charset="-122"/>
-              </a:rPr>
-              <a:t>深入实施“人工智能</a:t>
-            </a:r>
-            <a:r>
-              <a:rPr lang="en-US" altLang="zh-CN" sz="2400" b="1" dirty="0">
-                <a:solidFill>
-                  <a:schemeClr val="bg1"/>
-                </a:solidFill>
-                <a:latin typeface="微软雅黑" panose="020B0503020204020204" pitchFamily="34" charset="-122"/>
-                <a:ea typeface="微软雅黑" panose="020B0503020204020204" pitchFamily="34" charset="-122"/>
-              </a:rPr>
-              <a:t>+</a:t>
-            </a:r>
-            <a:r>
-              <a:rPr lang="zh-CN" altLang="en-US" sz="2400" b="1" dirty="0">
-                <a:solidFill>
-                  <a:schemeClr val="bg1"/>
-                </a:solidFill>
-                <a:latin typeface="微软雅黑" panose="020B0503020204020204" pitchFamily="34" charset="-122"/>
-                <a:ea typeface="微软雅黑" panose="020B0503020204020204" pitchFamily="34" charset="-122"/>
-              </a:rPr>
-              <a:t>”行动为高质量发展提供强大动能</a:t>
-            </a:r>
-          </a:p>
-        </p:txBody>
-      </p:sp>
-      <p:sp>
-        <p:nvSpPr>
-          <p:cNvPr id="16" name="文本框 15">
-            <a:extLst>
-              <a:ext uri="{FF2B5EF4-FFF2-40B4-BE49-F238E27FC236}">
-                <a16:creationId xmlns:a16="http://schemas.microsoft.com/office/drawing/2014/main" id="{99E2C556-45A0-D53C-9306-4787E814AAEB}"/>
-              </a:ext>
-            </a:extLst>
-          </p:cNvPr>
-          <p:cNvSpPr txBox="1"/>
-          <p:nvPr/>
-        </p:nvSpPr>
-        <p:spPr>
-          <a:xfrm>
-            <a:off x="738972" y="3510803"/>
-            <a:ext cx="3613429" cy="369332"/>
-          </a:xfrm>
-          <a:prstGeom prst="rect">
-            <a:avLst/>
-          </a:prstGeom>
-          <a:noFill/>
-        </p:spPr>
-        <p:txBody>
-          <a:bodyPr wrap="square" rtlCol="0">
-            <a:spAutoFit/>
-          </a:bodyPr>
-          <a:lstStyle/>
-          <a:p>
-            <a:pPr algn="ctr"/>
-            <a:r>
-              <a:rPr lang="zh-CN" altLang="en-US" b="1" dirty="0">
-                <a:solidFill>
-                  <a:schemeClr val="bg1"/>
-                </a:solidFill>
-                <a:latin typeface="微软雅黑" panose="020B0503020204020204" pitchFamily="34" charset="-122"/>
-                <a:ea typeface="微软雅黑" panose="020B0503020204020204" pitchFamily="34" charset="-122"/>
-              </a:rPr>
-              <a:t>国家发改委</a:t>
-            </a:r>
-          </a:p>
-        </p:txBody>
-      </p:sp>
-      <p:sp>
-        <p:nvSpPr>
-          <p:cNvPr id="20" name="文本框 19">
-            <a:extLst>
-              <a:ext uri="{FF2B5EF4-FFF2-40B4-BE49-F238E27FC236}">
-                <a16:creationId xmlns:a16="http://schemas.microsoft.com/office/drawing/2014/main" id="{AE662023-4AF2-8C33-560C-5885193DB972}"/>
-              </a:ext>
-            </a:extLst>
-          </p:cNvPr>
-          <p:cNvSpPr txBox="1"/>
-          <p:nvPr/>
-        </p:nvSpPr>
-        <p:spPr>
-          <a:xfrm>
-            <a:off x="5059391" y="3490576"/>
-            <a:ext cx="3613429" cy="369332"/>
-          </a:xfrm>
-          <a:prstGeom prst="rect">
-            <a:avLst/>
-          </a:prstGeom>
-          <a:noFill/>
-        </p:spPr>
-        <p:txBody>
-          <a:bodyPr wrap="square" rtlCol="0">
-            <a:spAutoFit/>
-          </a:bodyPr>
-          <a:lstStyle/>
-          <a:p>
-            <a:pPr algn="ctr"/>
-            <a:r>
-              <a:rPr lang="zh-CN" altLang="en-US" b="1" dirty="0">
-                <a:solidFill>
-                  <a:schemeClr val="bg1"/>
-                </a:solidFill>
-                <a:latin typeface="微软雅黑" panose="020B0503020204020204" pitchFamily="34" charset="-122"/>
-                <a:ea typeface="微软雅黑" panose="020B0503020204020204" pitchFamily="34" charset="-122"/>
-              </a:rPr>
-              <a:t>中国政府网</a:t>
-            </a:r>
-          </a:p>
-        </p:txBody>
-      </p:sp>
-      <p:sp>
-        <p:nvSpPr>
-          <p:cNvPr id="14" name="Shape 10">
-            <a:extLst>
-              <a:ext uri="{FF2B5EF4-FFF2-40B4-BE49-F238E27FC236}">
-                <a16:creationId xmlns:a16="http://schemas.microsoft.com/office/drawing/2014/main" id="{49023E99-A05E-2C2D-EA4A-AD50ABF4884A}"/>
-              </a:ext>
-            </a:extLst>
-          </p:cNvPr>
-          <p:cNvSpPr/>
-          <p:nvPr/>
-        </p:nvSpPr>
-        <p:spPr>
-          <a:xfrm>
-            <a:off x="292608" y="2130552"/>
-            <a:ext cx="4160520" cy="1938528"/>
-          </a:xfrm>
-          <a:prstGeom prst="roundRect">
-            <a:avLst>
-              <a:gd name="adj" fmla="val 5660"/>
-            </a:avLst>
-          </a:prstGeom>
-          <a:solidFill>
-            <a:srgbClr val="FFFFFF"/>
-          </a:solidFill>
-          <a:ln w="15240">
-            <a:solidFill>
-              <a:srgbClr val="B7D5F5"/>
-            </a:solidFill>
-            <a:prstDash val="solid"/>
-          </a:ln>
-        </p:spPr>
-      </p:sp>
-      <p:sp>
-        <p:nvSpPr>
-          <p:cNvPr id="17" name="Text 12">
-            <a:extLst>
-              <a:ext uri="{FF2B5EF4-FFF2-40B4-BE49-F238E27FC236}">
-                <a16:creationId xmlns:a16="http://schemas.microsoft.com/office/drawing/2014/main" id="{742CA2AF-9D33-04C5-6CB1-A54E0AA716F4}"/>
-              </a:ext>
-            </a:extLst>
-          </p:cNvPr>
-          <p:cNvSpPr/>
-          <p:nvPr/>
-        </p:nvSpPr>
-        <p:spPr>
-          <a:xfrm>
-            <a:off x="457200" y="2322576"/>
-            <a:ext cx="420624" cy="384048"/>
-          </a:xfrm>
-          <a:prstGeom prst="rect">
-            <a:avLst/>
-          </a:prstGeom>
-          <a:noFill/>
-          <a:ln/>
-        </p:spPr>
-        <p:txBody>
-          <a:bodyPr wrap="square" lIns="254" tIns="254" rIns="254" bIns="254" rtlCol="0" anchor="ctr">
-            <a:normAutofit/>
-          </a:bodyPr>
-          <a:lstStyle/>
-          <a:p>
-            <a:pPr marL="0" indent="0" algn="ctr">
-              <a:buNone/>
-            </a:pPr>
-            <a:r>
-              <a:rPr lang="en-US" sz="1800" b="1" dirty="0">
-                <a:solidFill>
-                  <a:srgbClr val="FFFFFF"/>
-                </a:solidFill>
-                <a:latin typeface="Microsoft YaHei" pitchFamily="34" charset="0"/>
-                <a:ea typeface="Microsoft YaHei" pitchFamily="34" charset="-122"/>
-                <a:cs typeface="Microsoft YaHei" pitchFamily="34" charset="-120"/>
-              </a:rPr>
-              <a:t>01</a:t>
-            </a:r>
-            <a:endParaRPr lang="en-US" sz="1800" dirty="0"/>
-          </a:p>
-        </p:txBody>
-      </p:sp>
-      <p:sp>
-        <p:nvSpPr>
-          <p:cNvPr id="18" name="Text 13">
-            <a:extLst>
-              <a:ext uri="{FF2B5EF4-FFF2-40B4-BE49-F238E27FC236}">
-                <a16:creationId xmlns:a16="http://schemas.microsoft.com/office/drawing/2014/main" id="{F77F226F-57D6-DB91-D7DA-BECCAF77805D}"/>
-              </a:ext>
-            </a:extLst>
-          </p:cNvPr>
-          <p:cNvSpPr/>
-          <p:nvPr/>
-        </p:nvSpPr>
-        <p:spPr>
-          <a:xfrm>
-            <a:off x="877824" y="2355383"/>
-            <a:ext cx="1088136" cy="305109"/>
-          </a:xfrm>
-          <a:prstGeom prst="rect">
-            <a:avLst/>
-          </a:prstGeom>
-          <a:noFill/>
-          <a:ln/>
-        </p:spPr>
-        <p:txBody>
-          <a:bodyPr wrap="square" lIns="254" tIns="254" rIns="254" bIns="254" rtlCol="0" anchor="ctr">
-            <a:normAutofit fontScale="92500" lnSpcReduction="10000"/>
-          </a:bodyPr>
-          <a:lstStyle/>
-          <a:p>
-            <a:pPr marL="0" indent="0" algn="l">
-              <a:buNone/>
-            </a:pPr>
-            <a:r>
-              <a:rPr lang="en-US" sz="2300" b="1" dirty="0">
-                <a:solidFill>
-                  <a:srgbClr val="0A5AA4"/>
-                </a:solidFill>
-                <a:latin typeface="Microsoft YaHei" pitchFamily="34" charset="0"/>
-                <a:ea typeface="Microsoft YaHei" pitchFamily="34" charset="-122"/>
-                <a:cs typeface="Microsoft YaHei" pitchFamily="34" charset="-120"/>
-              </a:rPr>
-              <a:t>模型成果</a:t>
-            </a:r>
-            <a:endParaRPr lang="en-US" sz="2300" dirty="0"/>
-          </a:p>
-        </p:txBody>
-      </p:sp>
-      <p:sp>
-        <p:nvSpPr>
-          <p:cNvPr id="19" name="Shape 14">
-            <a:extLst>
-              <a:ext uri="{FF2B5EF4-FFF2-40B4-BE49-F238E27FC236}">
-                <a16:creationId xmlns:a16="http://schemas.microsoft.com/office/drawing/2014/main" id="{A418F95E-1911-C3ED-5EF9-D2543DF582B3}"/>
-              </a:ext>
-            </a:extLst>
-          </p:cNvPr>
-          <p:cNvSpPr/>
-          <p:nvPr/>
-        </p:nvSpPr>
-        <p:spPr>
-          <a:xfrm>
-            <a:off x="475488" y="2834640"/>
-            <a:ext cx="1737360" cy="0"/>
-          </a:xfrm>
-          <a:prstGeom prst="line">
-            <a:avLst/>
-          </a:prstGeom>
-          <a:noFill/>
-          <a:ln w="11430">
-            <a:solidFill>
-              <a:srgbClr val="B7D5F5"/>
-            </a:solidFill>
-            <a:prstDash val="solid"/>
-          </a:ln>
-        </p:spPr>
-      </p:sp>
-      <p:sp>
-        <p:nvSpPr>
-          <p:cNvPr id="24" name="Text 15">
-            <a:extLst>
-              <a:ext uri="{FF2B5EF4-FFF2-40B4-BE49-F238E27FC236}">
-                <a16:creationId xmlns:a16="http://schemas.microsoft.com/office/drawing/2014/main" id="{1E435EC3-1E2A-B34E-1E70-53583DED1124}"/>
-              </a:ext>
-            </a:extLst>
-          </p:cNvPr>
-          <p:cNvSpPr/>
-          <p:nvPr/>
-        </p:nvSpPr>
-        <p:spPr>
-          <a:xfrm>
-            <a:off x="457200" y="2872019"/>
-            <a:ext cx="3613429" cy="964080"/>
-          </a:xfrm>
-          <a:prstGeom prst="rect">
-            <a:avLst/>
-          </a:prstGeom>
-          <a:noFill/>
-          <a:ln/>
-        </p:spPr>
-        <p:txBody>
-          <a:bodyPr wrap="square" lIns="254" tIns="254" rIns="254" bIns="254" rtlCol="0" anchor="ctr">
-            <a:noAutofit/>
-          </a:bodyPr>
-          <a:lstStyle/>
-          <a:p>
-            <a:pPr marL="0" indent="0" algn="l">
-              <a:lnSpc>
-                <a:spcPct val="200000"/>
-              </a:lnSpc>
-              <a:buNone/>
-            </a:pPr>
-            <a:r>
-              <a:rPr lang="en-US" sz="1600" dirty="0" err="1">
-                <a:solidFill>
-                  <a:srgbClr val="111111"/>
-                </a:solidFill>
-                <a:latin typeface="微软雅黑" panose="020B0503020204020204" pitchFamily="34" charset="-122"/>
-                <a:ea typeface="微软雅黑" panose="020B0503020204020204" pitchFamily="34" charset="-122"/>
-                <a:cs typeface="Microsoft YaHei" pitchFamily="34" charset="-120"/>
-              </a:rPr>
-              <a:t>建立冗余机械臂动力学参数辨识模型</a:t>
-            </a:r>
-            <a:endParaRPr lang="en-US" sz="1600" dirty="0">
-              <a:solidFill>
-                <a:srgbClr val="111111"/>
-              </a:solidFill>
-              <a:latin typeface="微软雅黑" panose="020B0503020204020204" pitchFamily="34" charset="-122"/>
-              <a:ea typeface="微软雅黑" panose="020B0503020204020204" pitchFamily="34" charset="-122"/>
-              <a:cs typeface="Microsoft YaHei" pitchFamily="34" charset="-120"/>
-            </a:endParaRPr>
-          </a:p>
-          <a:p>
-            <a:pPr>
-              <a:lnSpc>
-                <a:spcPct val="200000"/>
-              </a:lnSpc>
-            </a:pPr>
-            <a:r>
-              <a:rPr lang="en-US" altLang="zh-CN" sz="1600" dirty="0" err="1">
-                <a:solidFill>
-                  <a:srgbClr val="111111"/>
-                </a:solidFill>
-                <a:latin typeface="微软雅黑" panose="020B0503020204020204" pitchFamily="34" charset="-122"/>
-                <a:ea typeface="微软雅黑" panose="020B0503020204020204" pitchFamily="34" charset="-122"/>
-                <a:cs typeface="Microsoft YaHei" pitchFamily="34" charset="-120"/>
-              </a:rPr>
-              <a:t>为前馈补偿与外力估计提供基础</a:t>
-            </a:r>
-            <a:endParaRPr lang="en-US" altLang="zh-CN" sz="1600" dirty="0">
-              <a:latin typeface="微软雅黑" panose="020B0503020204020204" pitchFamily="34" charset="-122"/>
-              <a:ea typeface="微软雅黑" panose="020B0503020204020204" pitchFamily="34" charset="-122"/>
-            </a:endParaRPr>
-          </a:p>
-        </p:txBody>
-      </p:sp>
-      <p:sp>
-        <p:nvSpPr>
-          <p:cNvPr id="25" name="Shape 21">
-            <a:extLst>
-              <a:ext uri="{FF2B5EF4-FFF2-40B4-BE49-F238E27FC236}">
-                <a16:creationId xmlns:a16="http://schemas.microsoft.com/office/drawing/2014/main" id="{3B5EBA9D-7117-25AE-E6DE-E53D48EFE4B3}"/>
-              </a:ext>
-            </a:extLst>
-          </p:cNvPr>
-          <p:cNvSpPr/>
-          <p:nvPr/>
-        </p:nvSpPr>
-        <p:spPr>
-          <a:xfrm>
-            <a:off x="4690872" y="2130552"/>
-            <a:ext cx="4160520" cy="1938528"/>
-          </a:xfrm>
-          <a:prstGeom prst="roundRect">
-            <a:avLst>
-              <a:gd name="adj" fmla="val 5660"/>
-            </a:avLst>
-          </a:prstGeom>
-          <a:solidFill>
-            <a:srgbClr val="FFFFFF"/>
-          </a:solidFill>
-          <a:ln w="15240">
-            <a:solidFill>
-              <a:srgbClr val="B7D5F5"/>
-            </a:solidFill>
-            <a:prstDash val="solid"/>
-          </a:ln>
-        </p:spPr>
-      </p:sp>
-      <p:sp>
-        <p:nvSpPr>
-          <p:cNvPr id="26" name="Text 23">
-            <a:extLst>
-              <a:ext uri="{FF2B5EF4-FFF2-40B4-BE49-F238E27FC236}">
-                <a16:creationId xmlns:a16="http://schemas.microsoft.com/office/drawing/2014/main" id="{1F0ED68B-75B7-B5E9-3739-F9EDD1826E66}"/>
-              </a:ext>
-            </a:extLst>
-          </p:cNvPr>
-          <p:cNvSpPr/>
-          <p:nvPr/>
-        </p:nvSpPr>
-        <p:spPr>
-          <a:xfrm>
-            <a:off x="4855464" y="2322576"/>
-            <a:ext cx="420624" cy="384048"/>
-          </a:xfrm>
-          <a:prstGeom prst="rect">
-            <a:avLst/>
-          </a:prstGeom>
-          <a:noFill/>
-          <a:ln/>
-        </p:spPr>
-        <p:txBody>
-          <a:bodyPr wrap="square" lIns="254" tIns="254" rIns="254" bIns="254" rtlCol="0" anchor="ctr">
-            <a:normAutofit/>
-          </a:bodyPr>
-          <a:lstStyle/>
-          <a:p>
-            <a:pPr marL="0" indent="0" algn="ctr">
-              <a:buNone/>
-            </a:pPr>
-            <a:r>
-              <a:rPr lang="en-US" sz="1800" b="1" dirty="0">
-                <a:solidFill>
-                  <a:srgbClr val="FFFFFF"/>
-                </a:solidFill>
-                <a:latin typeface="Microsoft YaHei" pitchFamily="34" charset="0"/>
-                <a:ea typeface="Microsoft YaHei" pitchFamily="34" charset="-122"/>
-                <a:cs typeface="Microsoft YaHei" pitchFamily="34" charset="-120"/>
-              </a:rPr>
-              <a:t>02</a:t>
-            </a:r>
-            <a:endParaRPr lang="en-US" sz="1800" dirty="0"/>
-          </a:p>
-        </p:txBody>
-      </p:sp>
-      <p:sp>
-        <p:nvSpPr>
-          <p:cNvPr id="27" name="Text 24">
-            <a:extLst>
-              <a:ext uri="{FF2B5EF4-FFF2-40B4-BE49-F238E27FC236}">
-                <a16:creationId xmlns:a16="http://schemas.microsoft.com/office/drawing/2014/main" id="{764C4C3B-E9BB-D91A-9A59-B3E79550D76B}"/>
-              </a:ext>
-            </a:extLst>
-          </p:cNvPr>
-          <p:cNvSpPr/>
-          <p:nvPr/>
-        </p:nvSpPr>
-        <p:spPr>
-          <a:xfrm>
-            <a:off x="5234940" y="2364311"/>
-            <a:ext cx="1645920" cy="310896"/>
-          </a:xfrm>
-          <a:prstGeom prst="rect">
-            <a:avLst/>
-          </a:prstGeom>
-          <a:noFill/>
-          <a:ln/>
-        </p:spPr>
-        <p:txBody>
-          <a:bodyPr wrap="square" lIns="254" tIns="254" rIns="254" bIns="254" rtlCol="0" anchor="ctr">
-            <a:normAutofit fontScale="92500" lnSpcReduction="10000"/>
-          </a:bodyPr>
-          <a:lstStyle/>
-          <a:p>
-            <a:pPr marL="0" indent="0" algn="l">
-              <a:buNone/>
-            </a:pPr>
-            <a:r>
-              <a:rPr lang="en-US" sz="2300" b="1" dirty="0">
-                <a:solidFill>
-                  <a:srgbClr val="0A5AA4"/>
-                </a:solidFill>
-                <a:latin typeface="Microsoft YaHei" pitchFamily="34" charset="0"/>
-                <a:ea typeface="Microsoft YaHei" pitchFamily="34" charset="-122"/>
-                <a:cs typeface="Microsoft YaHei" pitchFamily="34" charset="-120"/>
-              </a:rPr>
-              <a:t>控制成果</a:t>
-            </a:r>
-            <a:endParaRPr lang="en-US" sz="2300" dirty="0"/>
-          </a:p>
-        </p:txBody>
-      </p:sp>
-      <p:sp>
-        <p:nvSpPr>
-          <p:cNvPr id="28" name="Shape 25">
-            <a:extLst>
-              <a:ext uri="{FF2B5EF4-FFF2-40B4-BE49-F238E27FC236}">
-                <a16:creationId xmlns:a16="http://schemas.microsoft.com/office/drawing/2014/main" id="{2A381BE0-FEF2-AA9D-A954-DA8DA398BD2A}"/>
-              </a:ext>
-            </a:extLst>
-          </p:cNvPr>
-          <p:cNvSpPr/>
-          <p:nvPr/>
-        </p:nvSpPr>
-        <p:spPr>
-          <a:xfrm>
-            <a:off x="4873752" y="2834640"/>
-            <a:ext cx="1737360" cy="0"/>
-          </a:xfrm>
-          <a:prstGeom prst="line">
-            <a:avLst/>
-          </a:prstGeom>
-          <a:noFill/>
-          <a:ln w="11430">
-            <a:solidFill>
-              <a:srgbClr val="B7D5F5"/>
-            </a:solidFill>
-            <a:prstDash val="solid"/>
-          </a:ln>
-        </p:spPr>
-      </p:sp>
-      <p:sp>
-        <p:nvSpPr>
-          <p:cNvPr id="29" name="Text 26">
-            <a:extLst>
-              <a:ext uri="{FF2B5EF4-FFF2-40B4-BE49-F238E27FC236}">
-                <a16:creationId xmlns:a16="http://schemas.microsoft.com/office/drawing/2014/main" id="{5977D673-3259-0619-66F5-A07E9D230B97}"/>
-              </a:ext>
-            </a:extLst>
-          </p:cNvPr>
-          <p:cNvSpPr/>
-          <p:nvPr/>
-        </p:nvSpPr>
-        <p:spPr>
-          <a:xfrm>
-            <a:off x="4873752" y="2828061"/>
-            <a:ext cx="3799068" cy="1305027"/>
-          </a:xfrm>
-          <a:prstGeom prst="rect">
-            <a:avLst/>
-          </a:prstGeom>
-          <a:noFill/>
-          <a:ln/>
-        </p:spPr>
-        <p:txBody>
-          <a:bodyPr wrap="square" lIns="254" tIns="254" rIns="254" bIns="254" rtlCol="0" anchor="ctr">
-            <a:noAutofit/>
-          </a:bodyPr>
-          <a:lstStyle/>
-          <a:p>
-            <a:pPr marL="0" indent="0" algn="l">
-              <a:lnSpc>
-                <a:spcPct val="150000"/>
-              </a:lnSpc>
-              <a:buNone/>
-            </a:pPr>
-            <a:r>
-              <a:rPr lang="en-US" sz="1600" dirty="0" err="1">
-                <a:solidFill>
-                  <a:srgbClr val="111111"/>
-                </a:solidFill>
-                <a:latin typeface="Microsoft YaHei" pitchFamily="34" charset="0"/>
-                <a:ea typeface="Microsoft YaHei" pitchFamily="34" charset="-122"/>
-                <a:cs typeface="Microsoft YaHei" pitchFamily="34" charset="-120"/>
-              </a:rPr>
-              <a:t>形成任务空间与零空间结合的分层阻抗控制方案</a:t>
-            </a:r>
-            <a:endParaRPr lang="en-US" sz="1600" dirty="0">
-              <a:solidFill>
-                <a:srgbClr val="111111"/>
-              </a:solidFill>
-              <a:latin typeface="Microsoft YaHei" pitchFamily="34" charset="0"/>
-              <a:ea typeface="Microsoft YaHei" pitchFamily="34" charset="-122"/>
-              <a:cs typeface="Microsoft YaHei" pitchFamily="34" charset="-120"/>
-            </a:endParaRPr>
-          </a:p>
-          <a:p>
-            <a:pPr>
-              <a:lnSpc>
-                <a:spcPct val="150000"/>
-              </a:lnSpc>
-            </a:pPr>
-            <a:r>
-              <a:rPr lang="en-US" altLang="zh-CN" sz="1600" dirty="0" err="1">
-                <a:solidFill>
-                  <a:srgbClr val="111111"/>
-                </a:solidFill>
-                <a:latin typeface="Microsoft YaHei" pitchFamily="34" charset="0"/>
-                <a:ea typeface="Microsoft YaHei" pitchFamily="34" charset="-122"/>
-                <a:cs typeface="Microsoft YaHei" pitchFamily="34" charset="-120"/>
-              </a:rPr>
-              <a:t>提升接触作业柔顺性与运动稳定性</a:t>
-            </a:r>
-            <a:endParaRPr lang="en-US" altLang="zh-CN" sz="1600" dirty="0"/>
-          </a:p>
-        </p:txBody>
-      </p:sp>
-      <p:sp>
-        <p:nvSpPr>
-          <p:cNvPr id="30" name="Shape 32">
-            <a:extLst>
-              <a:ext uri="{FF2B5EF4-FFF2-40B4-BE49-F238E27FC236}">
-                <a16:creationId xmlns:a16="http://schemas.microsoft.com/office/drawing/2014/main" id="{AAD82D0C-18ED-5D5E-C3DF-550F61904DA0}"/>
-              </a:ext>
-            </a:extLst>
-          </p:cNvPr>
-          <p:cNvSpPr/>
-          <p:nvPr/>
-        </p:nvSpPr>
-        <p:spPr>
-          <a:xfrm>
-            <a:off x="292608" y="4261104"/>
-            <a:ext cx="4160520" cy="1938528"/>
-          </a:xfrm>
-          <a:prstGeom prst="roundRect">
-            <a:avLst>
-              <a:gd name="adj" fmla="val 5660"/>
-            </a:avLst>
-          </a:prstGeom>
-          <a:solidFill>
-            <a:srgbClr val="FFFFFF"/>
-          </a:solidFill>
-          <a:ln w="15240">
-            <a:solidFill>
-              <a:srgbClr val="B7D5F5"/>
-            </a:solidFill>
-            <a:prstDash val="solid"/>
-          </a:ln>
-        </p:spPr>
-      </p:sp>
-      <p:sp>
-        <p:nvSpPr>
-          <p:cNvPr id="31" name="Text 34">
-            <a:extLst>
-              <a:ext uri="{FF2B5EF4-FFF2-40B4-BE49-F238E27FC236}">
-                <a16:creationId xmlns:a16="http://schemas.microsoft.com/office/drawing/2014/main" id="{798F28DC-C27B-A1F7-374E-EED8366A8CF6}"/>
-              </a:ext>
-            </a:extLst>
-          </p:cNvPr>
-          <p:cNvSpPr/>
-          <p:nvPr/>
-        </p:nvSpPr>
-        <p:spPr>
-          <a:xfrm>
-            <a:off x="457200" y="4453128"/>
-            <a:ext cx="420624" cy="384048"/>
-          </a:xfrm>
-          <a:prstGeom prst="rect">
-            <a:avLst/>
-          </a:prstGeom>
-          <a:noFill/>
-          <a:ln/>
-        </p:spPr>
-        <p:txBody>
-          <a:bodyPr wrap="square" lIns="254" tIns="254" rIns="254" bIns="254" rtlCol="0" anchor="ctr">
-            <a:normAutofit/>
-          </a:bodyPr>
-          <a:lstStyle/>
-          <a:p>
-            <a:pPr marL="0" indent="0" algn="ctr">
-              <a:buNone/>
-            </a:pPr>
-            <a:r>
-              <a:rPr lang="en-US" sz="1800" b="1" dirty="0">
-                <a:solidFill>
-                  <a:srgbClr val="FFFFFF"/>
-                </a:solidFill>
-                <a:latin typeface="Microsoft YaHei" pitchFamily="34" charset="0"/>
-                <a:ea typeface="Microsoft YaHei" pitchFamily="34" charset="-122"/>
-                <a:cs typeface="Microsoft YaHei" pitchFamily="34" charset="-120"/>
-              </a:rPr>
-              <a:t>03</a:t>
-            </a:r>
-            <a:endParaRPr lang="en-US" sz="1800" dirty="0"/>
-          </a:p>
-        </p:txBody>
-      </p:sp>
-      <p:sp>
-        <p:nvSpPr>
-          <p:cNvPr id="32" name="Text 35">
-            <a:extLst>
-              <a:ext uri="{FF2B5EF4-FFF2-40B4-BE49-F238E27FC236}">
-                <a16:creationId xmlns:a16="http://schemas.microsoft.com/office/drawing/2014/main" id="{269EFF4A-618E-B0C8-8EA3-9144DD6C8CCD}"/>
-              </a:ext>
-            </a:extLst>
-          </p:cNvPr>
-          <p:cNvSpPr/>
-          <p:nvPr/>
-        </p:nvSpPr>
-        <p:spPr>
-          <a:xfrm>
-            <a:off x="877824" y="4462272"/>
-            <a:ext cx="1645920" cy="310896"/>
-          </a:xfrm>
-          <a:prstGeom prst="rect">
-            <a:avLst/>
-          </a:prstGeom>
-          <a:noFill/>
-          <a:ln/>
-        </p:spPr>
-        <p:txBody>
-          <a:bodyPr wrap="square" lIns="254" tIns="254" rIns="254" bIns="254" rtlCol="0" anchor="ctr">
-            <a:normAutofit fontScale="92500" lnSpcReduction="10000"/>
-          </a:bodyPr>
-          <a:lstStyle/>
-          <a:p>
-            <a:pPr marL="0" indent="0" algn="l">
-              <a:buNone/>
-            </a:pPr>
-            <a:r>
-              <a:rPr lang="en-US" sz="2300" b="1" dirty="0">
-                <a:solidFill>
-                  <a:srgbClr val="0A5AA4"/>
-                </a:solidFill>
-                <a:latin typeface="Microsoft YaHei" pitchFamily="34" charset="0"/>
-                <a:ea typeface="Microsoft YaHei" pitchFamily="34" charset="-122"/>
-                <a:cs typeface="Microsoft YaHei" pitchFamily="34" charset="-120"/>
-              </a:rPr>
-              <a:t>安全成果</a:t>
-            </a:r>
-            <a:endParaRPr lang="en-US" sz="2300" dirty="0"/>
-          </a:p>
-        </p:txBody>
-      </p:sp>
-      <p:sp>
-        <p:nvSpPr>
-          <p:cNvPr id="33" name="Shape 36">
-            <a:extLst>
-              <a:ext uri="{FF2B5EF4-FFF2-40B4-BE49-F238E27FC236}">
-                <a16:creationId xmlns:a16="http://schemas.microsoft.com/office/drawing/2014/main" id="{2CA2579B-4604-AD5F-2A5C-888FA795C0D7}"/>
-              </a:ext>
-            </a:extLst>
-          </p:cNvPr>
-          <p:cNvSpPr/>
-          <p:nvPr/>
-        </p:nvSpPr>
-        <p:spPr>
-          <a:xfrm>
-            <a:off x="475488" y="4965192"/>
-            <a:ext cx="1737360" cy="0"/>
-          </a:xfrm>
-          <a:prstGeom prst="line">
-            <a:avLst/>
-          </a:prstGeom>
-          <a:noFill/>
-          <a:ln w="11430">
-            <a:solidFill>
-              <a:srgbClr val="B7D5F5"/>
-            </a:solidFill>
-            <a:prstDash val="solid"/>
-          </a:ln>
-        </p:spPr>
-      </p:sp>
-      <p:sp>
-        <p:nvSpPr>
-          <p:cNvPr id="34" name="Text 37">
-            <a:extLst>
-              <a:ext uri="{FF2B5EF4-FFF2-40B4-BE49-F238E27FC236}">
-                <a16:creationId xmlns:a16="http://schemas.microsoft.com/office/drawing/2014/main" id="{2749AAD0-7BD7-C3E5-1A22-2E892C52D40B}"/>
-              </a:ext>
-            </a:extLst>
-          </p:cNvPr>
-          <p:cNvSpPr/>
-          <p:nvPr/>
-        </p:nvSpPr>
-        <p:spPr>
-          <a:xfrm>
-            <a:off x="475487" y="5221223"/>
-            <a:ext cx="3595141" cy="813677"/>
-          </a:xfrm>
-          <a:prstGeom prst="rect">
-            <a:avLst/>
-          </a:prstGeom>
-          <a:noFill/>
-          <a:ln/>
-        </p:spPr>
-        <p:txBody>
-          <a:bodyPr wrap="square" lIns="254" tIns="254" rIns="254" bIns="254" rtlCol="0" anchor="ctr">
-            <a:normAutofit/>
-          </a:bodyPr>
-          <a:lstStyle/>
-          <a:p>
-            <a:pPr marL="0" indent="0" algn="l">
-              <a:buNone/>
-            </a:pPr>
-            <a:r>
-              <a:rPr lang="en-US" sz="1600" dirty="0" err="1">
-                <a:solidFill>
-                  <a:srgbClr val="111111"/>
-                </a:solidFill>
-                <a:latin typeface="微软雅黑" panose="020B0503020204020204" pitchFamily="34" charset="-122"/>
-                <a:ea typeface="微软雅黑" panose="020B0503020204020204" pitchFamily="34" charset="-122"/>
-                <a:cs typeface="Microsoft YaHei" pitchFamily="34" charset="-120"/>
-              </a:rPr>
-              <a:t>构建碰撞检测与误报抑制方法</a:t>
-            </a:r>
-            <a:endParaRPr lang="en-US" sz="1600" dirty="0">
-              <a:solidFill>
-                <a:srgbClr val="111111"/>
-              </a:solidFill>
-              <a:latin typeface="微软雅黑" panose="020B0503020204020204" pitchFamily="34" charset="-122"/>
-              <a:ea typeface="微软雅黑" panose="020B0503020204020204" pitchFamily="34" charset="-122"/>
-              <a:cs typeface="Microsoft YaHei" pitchFamily="34" charset="-120"/>
-            </a:endParaRPr>
-          </a:p>
-          <a:p>
-            <a:pPr>
-              <a:lnSpc>
-                <a:spcPct val="250000"/>
-              </a:lnSpc>
-            </a:pPr>
-            <a:r>
-              <a:rPr lang="en-US" altLang="zh-CN" sz="1600" dirty="0" err="1">
-                <a:solidFill>
-                  <a:srgbClr val="111111"/>
-                </a:solidFill>
-                <a:latin typeface="微软雅黑" panose="020B0503020204020204" pitchFamily="34" charset="-122"/>
-                <a:ea typeface="微软雅黑" panose="020B0503020204020204" pitchFamily="34" charset="-122"/>
-                <a:cs typeface="Microsoft YaHei" pitchFamily="34" charset="-120"/>
-              </a:rPr>
-              <a:t>提高非预期接触识别可靠性</a:t>
-            </a:r>
-            <a:endParaRPr lang="en-US" altLang="zh-CN" sz="1600" dirty="0">
-              <a:latin typeface="微软雅黑" panose="020B0503020204020204" pitchFamily="34" charset="-122"/>
-              <a:ea typeface="微软雅黑" panose="020B0503020204020204" pitchFamily="34" charset="-122"/>
-            </a:endParaRPr>
-          </a:p>
-        </p:txBody>
-      </p:sp>
-      <p:sp>
-        <p:nvSpPr>
-          <p:cNvPr id="35" name="Shape 43">
-            <a:extLst>
-              <a:ext uri="{FF2B5EF4-FFF2-40B4-BE49-F238E27FC236}">
-                <a16:creationId xmlns:a16="http://schemas.microsoft.com/office/drawing/2014/main" id="{1221531C-71F9-691B-813B-8519DB830030}"/>
-              </a:ext>
-            </a:extLst>
-          </p:cNvPr>
-          <p:cNvSpPr/>
-          <p:nvPr/>
-        </p:nvSpPr>
-        <p:spPr>
-          <a:xfrm>
-            <a:off x="4690872" y="4261104"/>
-            <a:ext cx="4160520" cy="1938528"/>
-          </a:xfrm>
-          <a:prstGeom prst="roundRect">
-            <a:avLst>
-              <a:gd name="adj" fmla="val 5660"/>
-            </a:avLst>
-          </a:prstGeom>
-          <a:solidFill>
-            <a:srgbClr val="FFFFFF"/>
-          </a:solidFill>
-          <a:ln w="15240">
-            <a:solidFill>
-              <a:srgbClr val="B7D5F5"/>
-            </a:solidFill>
-            <a:prstDash val="solid"/>
-          </a:ln>
-        </p:spPr>
-        <p:txBody>
-          <a:bodyPr/>
-          <a:lstStyle/>
-          <a:p>
-            <a:endParaRPr lang="zh-CN" altLang="en-US" dirty="0"/>
-          </a:p>
-        </p:txBody>
-      </p:sp>
-      <p:sp>
-        <p:nvSpPr>
-          <p:cNvPr id="36" name="Text 45">
-            <a:extLst>
-              <a:ext uri="{FF2B5EF4-FFF2-40B4-BE49-F238E27FC236}">
-                <a16:creationId xmlns:a16="http://schemas.microsoft.com/office/drawing/2014/main" id="{31C6F0FB-D3CA-A752-EF9A-9F7D46F54397}"/>
-              </a:ext>
-            </a:extLst>
-          </p:cNvPr>
-          <p:cNvSpPr/>
-          <p:nvPr/>
-        </p:nvSpPr>
-        <p:spPr>
-          <a:xfrm>
-            <a:off x="4855464" y="4453128"/>
-            <a:ext cx="420624" cy="384048"/>
-          </a:xfrm>
-          <a:prstGeom prst="rect">
-            <a:avLst/>
-          </a:prstGeom>
-          <a:noFill/>
-          <a:ln/>
-        </p:spPr>
-        <p:txBody>
-          <a:bodyPr wrap="square" lIns="254" tIns="254" rIns="254" bIns="254" rtlCol="0" anchor="ctr">
-            <a:normAutofit/>
-          </a:bodyPr>
-          <a:lstStyle/>
-          <a:p>
-            <a:pPr marL="0" indent="0" algn="ctr">
-              <a:buNone/>
-            </a:pPr>
-            <a:r>
-              <a:rPr lang="en-US" sz="1800" b="1" dirty="0">
-                <a:solidFill>
-                  <a:srgbClr val="FFFFFF"/>
-                </a:solidFill>
-                <a:latin typeface="Microsoft YaHei" pitchFamily="34" charset="0"/>
-                <a:ea typeface="Microsoft YaHei" pitchFamily="34" charset="-122"/>
-                <a:cs typeface="Microsoft YaHei" pitchFamily="34" charset="-120"/>
-              </a:rPr>
-              <a:t>04</a:t>
-            </a:r>
-            <a:endParaRPr lang="en-US" sz="1800" dirty="0"/>
-          </a:p>
-        </p:txBody>
-      </p:sp>
-      <p:sp>
-        <p:nvSpPr>
-          <p:cNvPr id="37" name="Text 46">
-            <a:extLst>
-              <a:ext uri="{FF2B5EF4-FFF2-40B4-BE49-F238E27FC236}">
-                <a16:creationId xmlns:a16="http://schemas.microsoft.com/office/drawing/2014/main" id="{289B0C68-74FC-0A7E-C555-ABF99D9543AB}"/>
-              </a:ext>
-            </a:extLst>
-          </p:cNvPr>
-          <p:cNvSpPr/>
-          <p:nvPr/>
-        </p:nvSpPr>
-        <p:spPr>
-          <a:xfrm>
-            <a:off x="5234940" y="4462272"/>
-            <a:ext cx="1645920" cy="310896"/>
-          </a:xfrm>
-          <a:prstGeom prst="rect">
-            <a:avLst/>
-          </a:prstGeom>
-          <a:noFill/>
-          <a:ln/>
-        </p:spPr>
-        <p:txBody>
-          <a:bodyPr wrap="square" lIns="254" tIns="254" rIns="254" bIns="254" rtlCol="0" anchor="ctr">
-            <a:normAutofit fontScale="92500" lnSpcReduction="10000"/>
-          </a:bodyPr>
-          <a:lstStyle/>
-          <a:p>
-            <a:pPr marL="0" indent="0" algn="l">
-              <a:buNone/>
-            </a:pPr>
-            <a:r>
-              <a:rPr lang="en-US" sz="2300" b="1" dirty="0">
-                <a:solidFill>
-                  <a:srgbClr val="0A5AA4"/>
-                </a:solidFill>
-                <a:latin typeface="Microsoft YaHei" pitchFamily="34" charset="0"/>
-                <a:ea typeface="Microsoft YaHei" pitchFamily="34" charset="-122"/>
-                <a:cs typeface="Microsoft YaHei" pitchFamily="34" charset="-120"/>
-              </a:rPr>
-              <a:t>验证成果</a:t>
-            </a:r>
-            <a:endParaRPr lang="en-US" sz="2300" dirty="0"/>
-          </a:p>
-        </p:txBody>
-      </p:sp>
-      <p:sp>
-        <p:nvSpPr>
-          <p:cNvPr id="38" name="Shape 47">
-            <a:extLst>
-              <a:ext uri="{FF2B5EF4-FFF2-40B4-BE49-F238E27FC236}">
-                <a16:creationId xmlns:a16="http://schemas.microsoft.com/office/drawing/2014/main" id="{D5473505-F890-F401-B3CD-DF3B0ECF012B}"/>
-              </a:ext>
-            </a:extLst>
-          </p:cNvPr>
-          <p:cNvSpPr/>
-          <p:nvPr/>
-        </p:nvSpPr>
-        <p:spPr>
-          <a:xfrm>
-            <a:off x="4873752" y="4965192"/>
-            <a:ext cx="1737360" cy="0"/>
-          </a:xfrm>
-          <a:prstGeom prst="line">
-            <a:avLst/>
-          </a:prstGeom>
-          <a:noFill/>
-          <a:ln w="11430">
-            <a:solidFill>
-              <a:srgbClr val="B7D5F5"/>
-            </a:solidFill>
-            <a:prstDash val="solid"/>
-          </a:ln>
-        </p:spPr>
-      </p:sp>
-      <p:sp>
-        <p:nvSpPr>
-          <p:cNvPr id="39" name="Text 48">
-            <a:extLst>
-              <a:ext uri="{FF2B5EF4-FFF2-40B4-BE49-F238E27FC236}">
-                <a16:creationId xmlns:a16="http://schemas.microsoft.com/office/drawing/2014/main" id="{C74304D5-EBC0-EB57-A337-36678A2B06FD}"/>
-              </a:ext>
-            </a:extLst>
-          </p:cNvPr>
-          <p:cNvSpPr/>
-          <p:nvPr/>
-        </p:nvSpPr>
-        <p:spPr>
-          <a:xfrm>
-            <a:off x="4855464" y="5093209"/>
-            <a:ext cx="3664458" cy="964078"/>
-          </a:xfrm>
-          <a:prstGeom prst="rect">
-            <a:avLst/>
-          </a:prstGeom>
-          <a:noFill/>
-          <a:ln/>
-        </p:spPr>
-        <p:txBody>
-          <a:bodyPr wrap="square" lIns="254" tIns="254" rIns="254" bIns="254" rtlCol="0" anchor="ctr">
-            <a:normAutofit fontScale="92500" lnSpcReduction="10000"/>
-          </a:bodyPr>
-          <a:lstStyle/>
-          <a:p>
-            <a:pPr marL="0" indent="0" algn="l">
-              <a:lnSpc>
-                <a:spcPct val="150000"/>
-              </a:lnSpc>
-              <a:buNone/>
-            </a:pPr>
-            <a:r>
-              <a:rPr lang="en-US" sz="1600" dirty="0" err="1">
-                <a:solidFill>
-                  <a:srgbClr val="111111"/>
-                </a:solidFill>
-                <a:latin typeface="Microsoft YaHei" pitchFamily="34" charset="0"/>
-                <a:ea typeface="Microsoft YaHei" pitchFamily="34" charset="-122"/>
-                <a:cs typeface="Microsoft YaHei" pitchFamily="34" charset="-120"/>
-              </a:rPr>
-              <a:t>完成仿真与实物实验验证</a:t>
-            </a:r>
-            <a:endParaRPr lang="en-US" sz="1600" dirty="0">
-              <a:solidFill>
-                <a:srgbClr val="111111"/>
-              </a:solidFill>
-              <a:latin typeface="Microsoft YaHei" pitchFamily="34" charset="0"/>
-              <a:ea typeface="Microsoft YaHei" pitchFamily="34" charset="-122"/>
-              <a:cs typeface="Microsoft YaHei" pitchFamily="34" charset="-120"/>
-            </a:endParaRPr>
-          </a:p>
-          <a:p>
-            <a:pPr>
-              <a:lnSpc>
-                <a:spcPct val="150000"/>
-              </a:lnSpc>
-            </a:pPr>
-            <a:r>
-              <a:rPr lang="en-US" altLang="zh-CN" sz="1600" dirty="0" err="1">
-                <a:solidFill>
-                  <a:srgbClr val="111111"/>
-                </a:solidFill>
-                <a:latin typeface="Microsoft YaHei" pitchFamily="34" charset="0"/>
-                <a:ea typeface="Microsoft YaHei" pitchFamily="34" charset="-122"/>
-                <a:cs typeface="Microsoft YaHei" pitchFamily="34" charset="-120"/>
-              </a:rPr>
-              <a:t>形成实验数据、对比分析结果和硕士学位论文</a:t>
-            </a:r>
-            <a:endParaRPr lang="en-US" altLang="zh-CN" sz="1600" dirty="0"/>
-          </a:p>
-        </p:txBody>
-      </p:sp>
-      <p:sp>
-        <p:nvSpPr>
-          <p:cNvPr id="40" name="文本框 39">
-            <a:extLst>
-              <a:ext uri="{FF2B5EF4-FFF2-40B4-BE49-F238E27FC236}">
-                <a16:creationId xmlns:a16="http://schemas.microsoft.com/office/drawing/2014/main" id="{0D33505F-02B7-3FEC-24EF-A57C9BF56991}"/>
-              </a:ext>
-            </a:extLst>
-          </p:cNvPr>
-          <p:cNvSpPr txBox="1"/>
-          <p:nvPr/>
-        </p:nvSpPr>
-        <p:spPr>
-          <a:xfrm>
-            <a:off x="187898" y="957930"/>
-            <a:ext cx="8924232" cy="960776"/>
-          </a:xfrm>
-          <a:prstGeom prst="rect">
-            <a:avLst/>
-          </a:prstGeom>
-          <a:noFill/>
-        </p:spPr>
-        <p:txBody>
-          <a:bodyPr wrap="square" rtlCol="0">
-            <a:spAutoFit/>
-          </a:bodyPr>
-          <a:lstStyle/>
-          <a:p>
-            <a:pPr marL="285750" indent="-285750">
-              <a:lnSpc>
-                <a:spcPct val="150000"/>
-              </a:lnSpc>
-              <a:buFont typeface="Wingdings" panose="05000000000000000000" pitchFamily="2" charset="2"/>
-              <a:buChar char="p"/>
-            </a:pPr>
-            <a:r>
-              <a:rPr lang="en-US" altLang="zh-CN" sz="2000" dirty="0" err="1">
-                <a:solidFill>
-                  <a:srgbClr val="111111"/>
-                </a:solidFill>
-                <a:latin typeface="Microsoft YaHei" pitchFamily="34" charset="0"/>
-                <a:ea typeface="Microsoft YaHei" pitchFamily="34" charset="-122"/>
-                <a:cs typeface="Microsoft YaHei" pitchFamily="34" charset="-120"/>
-              </a:rPr>
-              <a:t>围绕动力学参数辨识、分层阻抗控制与碰撞检测误报抑制，形成可验证、可交付的研究成果</a:t>
-            </a:r>
-            <a:r>
-              <a:rPr lang="en-US" altLang="zh-CN" sz="2000" dirty="0">
-                <a:solidFill>
-                  <a:srgbClr val="111111"/>
-                </a:solidFill>
-                <a:latin typeface="Microsoft YaHei" pitchFamily="34" charset="0"/>
-                <a:ea typeface="Microsoft YaHei" pitchFamily="34" charset="-122"/>
-                <a:cs typeface="Microsoft YaHei" pitchFamily="34" charset="-120"/>
-              </a:rPr>
-              <a:t>。</a:t>
-            </a:r>
-            <a:endParaRPr lang="en-US" altLang="zh-CN" sz="2000" dirty="0"/>
-          </a:p>
-        </p:txBody>
-      </p:sp>
-    </p:spTree>
-    <p:extLst>
-      <p:ext uri="{BB962C8B-B14F-4D97-AF65-F5344CB8AC3E}">
-        <p14:creationId xmlns:p14="http://schemas.microsoft.com/office/powerpoint/2010/main" val="1297355807"/>
-      </p:ext>
-    </p:extLst>
-  </p:cSld>
-  <p:clrMapOvr>
-    <a:masterClrMapping/>
-  </p:clrMapOvr>
-</p:sld>
-</file>
-
-<file path=ppt/slides/slide12.xml><?xml version="1.0" encoding="utf-8"?>
 <p:sld xmlns:a="http://schemas.openxmlformats.org/drawingml/2006/main" xmlns:r="http://schemas.openxmlformats.org/officeDocument/2006/relationships" xmlns:p="http://schemas.openxmlformats.org/presentationml/2006/main">
   <p:cSld>
     <p:spTree>
@@ -19156,7 +15378,7 @@
                 <a:latin typeface="Times New Roman" panose="02020603050405020304" pitchFamily="18" charset="0"/>
                 <a:cs typeface="Times New Roman" panose="02020603050405020304" pitchFamily="18" charset="0"/>
               </a:rPr>
-              <a:t>2026/04/27      12/13</a:t>
+              <a:t>2026/04/27      10/11</a:t>
             </a:r>
             <a:endParaRPr lang="zh-CN" altLang="en-US" dirty="0">
               <a:solidFill>
@@ -22298,7 +18520,7 @@
 </p:sld>
 </file>
 
-<file path=ppt/slides/slide13.xml><?xml version="1.0" encoding="utf-8"?>
+<file path=ppt/slides/slide11.xml><?xml version="1.0" encoding="utf-8"?>
 <p:sld xmlns:a="http://schemas.openxmlformats.org/drawingml/2006/main" xmlns:r="http://schemas.openxmlformats.org/officeDocument/2006/relationships" xmlns:p="http://schemas.openxmlformats.org/presentationml/2006/main">
   <p:cSld>
     <p:spTree>
@@ -23028,7 +19250,7 @@
                 <a:latin typeface="Times New Roman" panose="02020603050405020304" pitchFamily="18" charset="0"/>
                 <a:cs typeface="Times New Roman" panose="02020603050405020304" pitchFamily="18" charset="0"/>
               </a:rPr>
-              <a:t>2026/04/27      13/13</a:t>
+              <a:t>2026/04/27      11/11</a:t>
             </a:r>
             <a:endParaRPr lang="zh-CN" altLang="en-US" dirty="0">
               <a:solidFill>
@@ -24073,7 +20295,7 @@
                 <a:latin typeface="Times New Roman" panose="02020603050405020304" pitchFamily="18" charset="0"/>
                 <a:cs typeface="Times New Roman" panose="02020603050405020304" pitchFamily="18" charset="0"/>
               </a:rPr>
-              <a:t>2026/04/27      2/13</a:t>
+              <a:t>2026/04/27      2/11</a:t>
             </a:r>
             <a:endParaRPr lang="zh-CN" altLang="en-US" dirty="0">
               <a:solidFill>
@@ -25249,7 +21471,7 @@
                 <a:latin typeface="Times New Roman" panose="02020603050405020304" pitchFamily="18" charset="0"/>
                 <a:cs typeface="Times New Roman" panose="02020603050405020304" pitchFamily="18" charset="0"/>
               </a:rPr>
-              <a:t>2026/04/27      3/13</a:t>
+              <a:t>2026/04/27      3/11</a:t>
             </a:r>
             <a:endParaRPr lang="zh-CN" altLang="en-US" dirty="0">
               <a:solidFill>
@@ -27067,7 +23289,7 @@
                 <a:latin typeface="Times New Roman" panose="02020603050405020304" pitchFamily="18" charset="0"/>
                 <a:cs typeface="Times New Roman" panose="02020603050405020304" pitchFamily="18" charset="0"/>
               </a:rPr>
-              <a:t>2026/04/27      4/13</a:t>
+              <a:t>2026/04/27      4/11</a:t>
             </a:r>
             <a:endParaRPr lang="zh-CN" altLang="en-US" dirty="0">
               <a:solidFill>
@@ -27767,14 +23989,14 @@
                 <a:latin typeface="微软雅黑" panose="020B0503020204020204" pitchFamily="34" charset="-122"/>
                 <a:ea typeface="微软雅黑" panose="020B0503020204020204" pitchFamily="34" charset="-122"/>
               </a:rPr>
-              <a:t>理论意义：</a:t>
+              <a:t>理论意义</a:t>
             </a:r>
             <a:r>
               <a:rPr lang="zh-CN" altLang="en-US" dirty="0">
                 <a:latin typeface="微软雅黑" panose="020B0503020204020204" pitchFamily="34" charset="-122"/>
                 <a:ea typeface="微软雅黑" panose="020B0503020204020204" pitchFamily="34" charset="-122"/>
               </a:rPr>
-              <a:t>探索冗余机械臂精度、柔顺性与安全性的协同控制机制</a:t>
+              <a:t>：探索冗余机械臂精度、柔顺性与安全性的协同控制机制</a:t>
             </a:r>
             <a:endParaRPr lang="en-US" altLang="zh-CN" b="1" dirty="0">
               <a:solidFill>
@@ -27798,14 +24020,14 @@
                 <a:latin typeface="微软雅黑" panose="020B0503020204020204" pitchFamily="34" charset="-122"/>
                 <a:ea typeface="微软雅黑" panose="020B0503020204020204" pitchFamily="34" charset="-122"/>
               </a:rPr>
-              <a:t>方法意义：</a:t>
+              <a:t>方法意义</a:t>
             </a:r>
             <a:r>
               <a:rPr lang="zh-CN" altLang="en-US" dirty="0">
                 <a:latin typeface="微软雅黑" panose="020B0503020204020204" pitchFamily="34" charset="-122"/>
                 <a:ea typeface="微软雅黑" panose="020B0503020204020204" pitchFamily="34" charset="-122"/>
               </a:rPr>
-              <a:t>形成模型辨识、前馈补偿、分层阻抗与碰撞检测一体化方法</a:t>
+              <a:t>：形成模型辨识、前馈补偿、分层阻抗与碰撞检测一体化方法</a:t>
             </a:r>
             <a:endParaRPr lang="en-US" altLang="zh-CN" dirty="0">
               <a:latin typeface="微软雅黑" panose="020B0503020204020204" pitchFamily="34" charset="-122"/>
@@ -27826,14 +24048,14 @@
                 <a:latin typeface="微软雅黑" panose="020B0503020204020204" pitchFamily="34" charset="-122"/>
                 <a:ea typeface="微软雅黑" panose="020B0503020204020204" pitchFamily="34" charset="-122"/>
               </a:rPr>
-              <a:t>工程意义：</a:t>
+              <a:t>工程意义</a:t>
             </a:r>
             <a:r>
               <a:rPr lang="zh-CN" altLang="en-US" dirty="0">
                 <a:latin typeface="微软雅黑" panose="020B0503020204020204" pitchFamily="34" charset="-122"/>
                 <a:ea typeface="微软雅黑" panose="020B0503020204020204" pitchFamily="34" charset="-122"/>
               </a:rPr>
-              <a:t>提升协作机械臂在接触作业中的稳定性、安全性与环境适应能力</a:t>
+              <a:t>：提升协作机械臂在接触作业中的稳定性、安全性与环境适应能力</a:t>
             </a:r>
           </a:p>
         </p:txBody>
@@ -27970,7 +24192,7 @@
         <p:cNvPr id="1" name="">
           <a:extLst>
             <a:ext uri="{FF2B5EF4-FFF2-40B4-BE49-F238E27FC236}">
-              <a16:creationId xmlns:a16="http://schemas.microsoft.com/office/drawing/2014/main" id="{16619528-AF98-D6EA-8A1F-F0A0E223FC35}"/>
+              <a16:creationId xmlns:a16="http://schemas.microsoft.com/office/drawing/2014/main" id="{EBD3F82F-402C-0FAA-30ED-8DBD8D1CE2A1}"/>
             </a:ext>
           </a:extLst>
         </p:cNvPr>
@@ -27990,7 +24212,7 @@
           <p:cNvPr id="6146" name="Rectangle 8">
             <a:extLst>
               <a:ext uri="{FF2B5EF4-FFF2-40B4-BE49-F238E27FC236}">
-                <a16:creationId xmlns:a16="http://schemas.microsoft.com/office/drawing/2014/main" id="{B7DFD7AE-ABF3-4E86-2B78-FDB0F75EABB3}"/>
+                <a16:creationId xmlns:a16="http://schemas.microsoft.com/office/drawing/2014/main" id="{57801CD9-724A-1F39-CBC7-DFE9049E39E7}"/>
               </a:ext>
             </a:extLst>
           </p:cNvPr>
@@ -28153,285 +24375,10 @@
       </p:sp>
       <p:sp>
         <p:nvSpPr>
-          <p:cNvPr id="6148" name="矩形 5">
+          <p:cNvPr id="3" name="矩形 2">
             <a:extLst>
               <a:ext uri="{FF2B5EF4-FFF2-40B4-BE49-F238E27FC236}">
-                <a16:creationId xmlns:a16="http://schemas.microsoft.com/office/drawing/2014/main" id="{ADCB84E5-53AA-ED1A-0780-BC1564869F9D}"/>
-              </a:ext>
-            </a:extLst>
-          </p:cNvPr>
-          <p:cNvSpPr>
-            <a:spLocks noChangeArrowheads="1"/>
-          </p:cNvSpPr>
-          <p:nvPr/>
-        </p:nvSpPr>
-        <p:spPr bwMode="auto">
-          <a:xfrm>
-            <a:off x="187899" y="3044971"/>
-            <a:ext cx="8776355" cy="584775"/>
-          </a:xfrm>
-          <a:prstGeom prst="rect">
-            <a:avLst/>
-          </a:prstGeom>
-          <a:noFill/>
-          <a:ln>
-            <a:noFill/>
-          </a:ln>
-          <a:extLst>
-            <a:ext uri="{909E8E84-426E-40DD-AFC4-6F175D3DCCD1}">
-              <a14:hiddenFill xmlns:a14="http://schemas.microsoft.com/office/drawing/2010/main">
-                <a:solidFill>
-                  <a:srgbClr val="FFFFFF"/>
-                </a:solidFill>
-              </a14:hiddenFill>
-            </a:ext>
-            <a:ext uri="{91240B29-F687-4F45-9708-019B960494DF}">
-              <a14:hiddenLine xmlns:a14="http://schemas.microsoft.com/office/drawing/2010/main" w="9525">
-                <a:solidFill>
-                  <a:srgbClr val="000000"/>
-                </a:solidFill>
-                <a:miter lim="800000"/>
-                <a:headEnd/>
-                <a:tailEnd/>
-              </a14:hiddenLine>
-            </a:ext>
-          </a:extLst>
-        </p:spPr>
-        <p:txBody>
-          <a:bodyPr wrap="square">
-            <a:spAutoFit/>
-          </a:bodyPr>
-          <a:lstStyle>
-            <a:lvl1pPr>
-              <a:defRPr>
-                <a:solidFill>
-                  <a:schemeClr val="tx1"/>
-                </a:solidFill>
-                <a:latin typeface="Arial" panose="020B0604020202020204" pitchFamily="34" charset="0"/>
-                <a:ea typeface="宋体" panose="02010600030101010101" pitchFamily="2" charset="-122"/>
-              </a:defRPr>
-            </a:lvl1pPr>
-            <a:lvl2pPr marL="742950" indent="-285750">
-              <a:defRPr>
-                <a:solidFill>
-                  <a:schemeClr val="tx1"/>
-                </a:solidFill>
-                <a:latin typeface="Arial" panose="020B0604020202020204" pitchFamily="34" charset="0"/>
-                <a:ea typeface="宋体" panose="02010600030101010101" pitchFamily="2" charset="-122"/>
-              </a:defRPr>
-            </a:lvl2pPr>
-            <a:lvl3pPr marL="1143000" indent="-228600">
-              <a:defRPr>
-                <a:solidFill>
-                  <a:schemeClr val="tx1"/>
-                </a:solidFill>
-                <a:latin typeface="Arial" panose="020B0604020202020204" pitchFamily="34" charset="0"/>
-                <a:ea typeface="宋体" panose="02010600030101010101" pitchFamily="2" charset="-122"/>
-              </a:defRPr>
-            </a:lvl3pPr>
-            <a:lvl4pPr marL="1600200" indent="-228600">
-              <a:defRPr>
-                <a:solidFill>
-                  <a:schemeClr val="tx1"/>
-                </a:solidFill>
-                <a:latin typeface="Arial" panose="020B0604020202020204" pitchFamily="34" charset="0"/>
-                <a:ea typeface="宋体" panose="02010600030101010101" pitchFamily="2" charset="-122"/>
-              </a:defRPr>
-            </a:lvl4pPr>
-            <a:lvl5pPr marL="2057400" indent="-228600">
-              <a:defRPr>
-                <a:solidFill>
-                  <a:schemeClr val="tx1"/>
-                </a:solidFill>
-                <a:latin typeface="Arial" panose="020B0604020202020204" pitchFamily="34" charset="0"/>
-                <a:ea typeface="宋体" panose="02010600030101010101" pitchFamily="2" charset="-122"/>
-              </a:defRPr>
-            </a:lvl5pPr>
-            <a:lvl6pPr marL="2514600" indent="-228600" eaLnBrk="0" fontAlgn="base" hangingPunct="0">
-              <a:spcBef>
-                <a:spcPct val="0"/>
-              </a:spcBef>
-              <a:spcAft>
-                <a:spcPct val="0"/>
-              </a:spcAft>
-              <a:defRPr>
-                <a:solidFill>
-                  <a:schemeClr val="tx1"/>
-                </a:solidFill>
-                <a:latin typeface="Arial" panose="020B0604020202020204" pitchFamily="34" charset="0"/>
-                <a:ea typeface="宋体" panose="02010600030101010101" pitchFamily="2" charset="-122"/>
-              </a:defRPr>
-            </a:lvl6pPr>
-            <a:lvl7pPr marL="2971800" indent="-228600" eaLnBrk="0" fontAlgn="base" hangingPunct="0">
-              <a:spcBef>
-                <a:spcPct val="0"/>
-              </a:spcBef>
-              <a:spcAft>
-                <a:spcPct val="0"/>
-              </a:spcAft>
-              <a:defRPr>
-                <a:solidFill>
-                  <a:schemeClr val="tx1"/>
-                </a:solidFill>
-                <a:latin typeface="Arial" panose="020B0604020202020204" pitchFamily="34" charset="0"/>
-                <a:ea typeface="宋体" panose="02010600030101010101" pitchFamily="2" charset="-122"/>
-              </a:defRPr>
-            </a:lvl7pPr>
-            <a:lvl8pPr marL="3429000" indent="-228600" eaLnBrk="0" fontAlgn="base" hangingPunct="0">
-              <a:spcBef>
-                <a:spcPct val="0"/>
-              </a:spcBef>
-              <a:spcAft>
-                <a:spcPct val="0"/>
-              </a:spcAft>
-              <a:defRPr>
-                <a:solidFill>
-                  <a:schemeClr val="tx1"/>
-                </a:solidFill>
-                <a:latin typeface="Arial" panose="020B0604020202020204" pitchFamily="34" charset="0"/>
-                <a:ea typeface="宋体" panose="02010600030101010101" pitchFamily="2" charset="-122"/>
-              </a:defRPr>
-            </a:lvl8pPr>
-            <a:lvl9pPr marL="3886200" indent="-228600" eaLnBrk="0" fontAlgn="base" hangingPunct="0">
-              <a:spcBef>
-                <a:spcPct val="0"/>
-              </a:spcBef>
-              <a:spcAft>
-                <a:spcPct val="0"/>
-              </a:spcAft>
-              <a:defRPr>
-                <a:solidFill>
-                  <a:schemeClr val="tx1"/>
-                </a:solidFill>
-                <a:latin typeface="Arial" panose="020B0604020202020204" pitchFamily="34" charset="0"/>
-                <a:ea typeface="宋体" panose="02010600030101010101" pitchFamily="2" charset="-122"/>
-              </a:defRPr>
-            </a:lvl9pPr>
-          </a:lstStyle>
-          <a:p>
-            <a:pPr algn="ctr"/>
-            <a:r>
-              <a:rPr lang="zh-CN" altLang="en-US" sz="3200" b="1" dirty="0">
-                <a:solidFill>
-                  <a:schemeClr val="bg1"/>
-                </a:solidFill>
-                <a:latin typeface="微软雅黑" panose="020B0503020204020204" pitchFamily="34" charset="-122"/>
-                <a:ea typeface="微软雅黑" panose="020B0503020204020204" pitchFamily="34" charset="-122"/>
-              </a:rPr>
-              <a:t>第二次组会汇报</a:t>
-            </a:r>
-          </a:p>
-        </p:txBody>
-      </p:sp>
-      <p:sp>
-        <p:nvSpPr>
-          <p:cNvPr id="19" name="文本框 18">
-            <a:extLst>
-              <a:ext uri="{FF2B5EF4-FFF2-40B4-BE49-F238E27FC236}">
-                <a16:creationId xmlns:a16="http://schemas.microsoft.com/office/drawing/2014/main" id="{D1B473A6-2523-8260-24A1-F43C0E965635}"/>
-              </a:ext>
-            </a:extLst>
-          </p:cNvPr>
-          <p:cNvSpPr txBox="1"/>
-          <p:nvPr/>
-        </p:nvSpPr>
-        <p:spPr>
-          <a:xfrm>
-            <a:off x="3803213" y="4059171"/>
-            <a:ext cx="2158761" cy="830997"/>
-          </a:xfrm>
-          <a:prstGeom prst="rect">
-            <a:avLst/>
-          </a:prstGeom>
-          <a:noFill/>
-        </p:spPr>
-        <p:txBody>
-          <a:bodyPr wrap="square" rtlCol="0">
-            <a:spAutoFit/>
-          </a:bodyPr>
-          <a:lstStyle/>
-          <a:p>
-            <a:pPr marR="0" lvl="0" algn="l" defTabSz="914400" rtl="0" eaLnBrk="1" fontAlgn="auto" latinLnBrk="0" hangingPunct="1">
-              <a:lnSpc>
-                <a:spcPct val="100000"/>
-              </a:lnSpc>
-              <a:spcBef>
-                <a:spcPts val="0"/>
-              </a:spcBef>
-              <a:spcAft>
-                <a:spcPts val="0"/>
-              </a:spcAft>
-              <a:buClrTx/>
-              <a:buSzTx/>
-              <a:defRPr/>
-            </a:pPr>
-            <a:r>
-              <a:rPr lang="zh-CN" altLang="en-US" sz="2400" dirty="0">
-                <a:solidFill>
-                  <a:prstClr val="white"/>
-                </a:solidFill>
-                <a:latin typeface="宋体" panose="02010600030101010101" pitchFamily="2" charset="-122"/>
-                <a:ea typeface="宋体" panose="02010600030101010101" pitchFamily="2" charset="-122"/>
-              </a:rPr>
-              <a:t>张世杰</a:t>
-            </a:r>
-            <a:endParaRPr lang="en-US" altLang="zh-CN" sz="2400" dirty="0">
-              <a:solidFill>
-                <a:prstClr val="white"/>
-              </a:solidFill>
-              <a:latin typeface="宋体" panose="02010600030101010101" pitchFamily="2" charset="-122"/>
-              <a:ea typeface="宋体" panose="02010600030101010101" pitchFamily="2" charset="-122"/>
-            </a:endParaRPr>
-          </a:p>
-          <a:p>
-            <a:pPr marR="0" lvl="0" algn="l" defTabSz="914400" rtl="0" eaLnBrk="1" fontAlgn="auto" latinLnBrk="0" hangingPunct="1">
-              <a:lnSpc>
-                <a:spcPct val="100000"/>
-              </a:lnSpc>
-              <a:spcBef>
-                <a:spcPts val="0"/>
-              </a:spcBef>
-              <a:spcAft>
-                <a:spcPts val="0"/>
-              </a:spcAft>
-              <a:buClrTx/>
-              <a:buSzTx/>
-              <a:defRPr/>
-            </a:pPr>
-            <a:r>
-              <a:rPr lang="en-US" altLang="zh-CN" sz="2400" dirty="0">
-                <a:solidFill>
-                  <a:prstClr val="white"/>
-                </a:solidFill>
-                <a:latin typeface="Times New Roman" panose="02020603050405020304" pitchFamily="18" charset="0"/>
-                <a:ea typeface="微软雅黑" panose="020B0503020204020204" pitchFamily="34" charset="-122"/>
-                <a:cs typeface="Times New Roman" panose="02020603050405020304" pitchFamily="18" charset="0"/>
-              </a:rPr>
-              <a:t>2025.04.13</a:t>
-            </a:r>
-            <a:endParaRPr kumimoji="0" lang="zh-CN" altLang="en-US" sz="2400" b="0" i="0" u="none" strike="noStrike" kern="1200" cap="none" spc="0" normalizeH="0" baseline="0" noProof="0" dirty="0">
-              <a:ln>
-                <a:noFill/>
-              </a:ln>
-              <a:solidFill>
-                <a:prstClr val="white"/>
-              </a:solidFill>
-              <a:effectLst/>
-              <a:uLnTx/>
-              <a:uFillTx/>
-              <a:latin typeface="Times New Roman" panose="02020603050405020304" pitchFamily="18" charset="0"/>
-              <a:ea typeface="微软雅黑" panose="020B0503020204020204" pitchFamily="34" charset="-122"/>
-              <a:cs typeface="Times New Roman" panose="02020603050405020304" pitchFamily="18" charset="0"/>
-            </a:endParaRPr>
-          </a:p>
-        </p:txBody>
-      </p:sp>
-      <p:sp>
-        <p:nvSpPr>
-          <p:cNvPr id="3" name="矩形 2">
-            <a:extLst>
-              <a:ext uri="{FF2B5EF4-FFF2-40B4-BE49-F238E27FC236}">
-                <a16:creationId xmlns:a16="http://schemas.microsoft.com/office/drawing/2014/main" id="{157470DC-7949-08EB-3559-70B2E9499E51}"/>
+                <a16:creationId xmlns:a16="http://schemas.microsoft.com/office/drawing/2014/main" id="{D3B74006-B3D3-E3AB-9018-84202E6FC457}"/>
               </a:ext>
             </a:extLst>
           </p:cNvPr>
@@ -28486,7 +24433,7 @@
           <p:cNvPr id="4" name="矩形 3">
             <a:extLst>
               <a:ext uri="{FF2B5EF4-FFF2-40B4-BE49-F238E27FC236}">
-                <a16:creationId xmlns:a16="http://schemas.microsoft.com/office/drawing/2014/main" id="{B09442D2-342E-D389-6B4A-D34AB0BF1442}"/>
+                <a16:creationId xmlns:a16="http://schemas.microsoft.com/office/drawing/2014/main" id="{773B6A00-B742-0B54-252C-4EDFF3E987F9}"/>
               </a:ext>
             </a:extLst>
           </p:cNvPr>
@@ -28549,7 +24496,7 @@
           <p:cNvPr id="6" name="文本框 5">
             <a:extLst>
               <a:ext uri="{FF2B5EF4-FFF2-40B4-BE49-F238E27FC236}">
-                <a16:creationId xmlns:a16="http://schemas.microsoft.com/office/drawing/2014/main" id="{B0DB13DC-DD8D-A005-D5A7-013731608A5C}"/>
+                <a16:creationId xmlns:a16="http://schemas.microsoft.com/office/drawing/2014/main" id="{1E1F8CD6-99C1-6EF9-B069-1908C24FF129}"/>
               </a:ext>
             </a:extLst>
           </p:cNvPr>
@@ -28558,8 +24505,8 @@
         </p:nvSpPr>
         <p:spPr>
           <a:xfrm>
-            <a:off x="187899" y="402345"/>
-            <a:ext cx="2024062" cy="461665"/>
+            <a:off x="187898" y="402345"/>
+            <a:ext cx="6692962" cy="461665"/>
           </a:xfrm>
           <a:prstGeom prst="rect">
             <a:avLst/>
@@ -28572,20 +24519,13 @@
           </a:bodyPr>
           <a:lstStyle/>
           <a:p>
-            <a:pPr marL="0" marR="0" lvl="0" indent="0" defTabSz="457200" rtl="0" eaLnBrk="1" fontAlgn="auto" latinLnBrk="0" hangingPunct="1">
-              <a:lnSpc>
-                <a:spcPct val="100000"/>
-              </a:lnSpc>
+            <a:pPr lvl="0" defTabSz="457200" eaLnBrk="1" fontAlgn="auto" hangingPunct="1">
               <a:spcBef>
                 <a:spcPts val="0"/>
               </a:spcBef>
               <a:spcAft>
                 <a:spcPts val="0"/>
               </a:spcAft>
-              <a:buClrTx/>
-              <a:buSzTx/>
-              <a:buFontTx/>
-              <a:buNone/>
               <a:defRPr/>
             </a:pPr>
             <a:r>
@@ -28596,7 +24536,7 @@
                 <a:latin typeface="微软雅黑" panose="020B0503020204020204" pitchFamily="34" charset="-122"/>
                 <a:ea typeface="微软雅黑" panose="020B0503020204020204" pitchFamily="34" charset="-122"/>
               </a:rPr>
-              <a:t>目录</a:t>
+              <a:t>研究目标与技术思路</a:t>
             </a:r>
           </a:p>
         </p:txBody>
@@ -28606,7 +24546,7 @@
           <p:cNvPr id="11" name="标题 1">
             <a:extLst>
               <a:ext uri="{FF2B5EF4-FFF2-40B4-BE49-F238E27FC236}">
-                <a16:creationId xmlns:a16="http://schemas.microsoft.com/office/drawing/2014/main" id="{AFAB22AF-8A34-D2FA-F676-6E33D27F7822}"/>
+                <a16:creationId xmlns:a16="http://schemas.microsoft.com/office/drawing/2014/main" id="{95BE55F7-F59C-45A4-9069-844808305A49}"/>
               </a:ext>
             </a:extLst>
           </p:cNvPr>
@@ -28682,7 +24622,7 @@
           <p:cNvPr id="21" name="矩形 20">
             <a:extLst>
               <a:ext uri="{FF2B5EF4-FFF2-40B4-BE49-F238E27FC236}">
-                <a16:creationId xmlns:a16="http://schemas.microsoft.com/office/drawing/2014/main" id="{5F7FEC48-1B5B-0763-BD68-A8B091435104}"/>
+                <a16:creationId xmlns:a16="http://schemas.microsoft.com/office/drawing/2014/main" id="{E9741C3B-6D78-B049-C397-0AABA9773DAD}"/>
               </a:ext>
             </a:extLst>
           </p:cNvPr>
@@ -28738,855 +24678,7 @@
                 <a:latin typeface="Times New Roman" panose="02020603050405020304" pitchFamily="18" charset="0"/>
                 <a:cs typeface="Times New Roman" panose="02020603050405020304" pitchFamily="18" charset="0"/>
               </a:rPr>
-              <a:t>2026/04/27      5/13</a:t>
-            </a:r>
-            <a:endParaRPr lang="zh-CN" altLang="en-US" dirty="0">
-              <a:solidFill>
-                <a:srgbClr val="005D98"/>
-              </a:solidFill>
-              <a:latin typeface="Times New Roman" panose="02020603050405020304" pitchFamily="18" charset="0"/>
-              <a:cs typeface="Times New Roman" panose="02020603050405020304" pitchFamily="18" charset="0"/>
-            </a:endParaRPr>
-          </a:p>
-        </p:txBody>
-      </p:sp>
-      <p:sp>
-        <p:nvSpPr>
-          <p:cNvPr id="22" name="矩形 21">
-            <a:extLst>
-              <a:ext uri="{FF2B5EF4-FFF2-40B4-BE49-F238E27FC236}">
-                <a16:creationId xmlns:a16="http://schemas.microsoft.com/office/drawing/2014/main" id="{59A95952-2BBC-49E6-6107-709E33210369}"/>
-              </a:ext>
-            </a:extLst>
-          </p:cNvPr>
-          <p:cNvSpPr/>
-          <p:nvPr/>
-        </p:nvSpPr>
-        <p:spPr>
-          <a:xfrm>
-            <a:off x="0" y="6624637"/>
-            <a:ext cx="2560320" cy="233364"/>
-          </a:xfrm>
-          <a:prstGeom prst="rect">
-            <a:avLst/>
-          </a:prstGeom>
-          <a:solidFill>
-            <a:schemeClr val="accent3">
-              <a:lumMod val="60000"/>
-              <a:lumOff val="40000"/>
-            </a:schemeClr>
-          </a:solidFill>
-          <a:ln>
-            <a:noFill/>
-          </a:ln>
-        </p:spPr>
-        <p:style>
-          <a:lnRef idx="2">
-            <a:schemeClr val="accent1">
-              <a:shade val="50000"/>
-            </a:schemeClr>
-          </a:lnRef>
-          <a:fillRef idx="1">
-            <a:schemeClr val="accent1"/>
-          </a:fillRef>
-          <a:effectRef idx="0">
-            <a:schemeClr val="accent1"/>
-          </a:effectRef>
-          <a:fontRef idx="minor">
-            <a:schemeClr val="lt1"/>
-          </a:fontRef>
-        </p:style>
-        <p:txBody>
-          <a:bodyPr anchor="ctr"/>
-          <a:lstStyle/>
-          <a:p>
-            <a:pPr algn="ctr">
-              <a:defRPr/>
-            </a:pPr>
-            <a:r>
-              <a:rPr lang="zh-CN" altLang="en-US" dirty="0">
-                <a:solidFill>
-                  <a:srgbClr val="005D98"/>
-                </a:solidFill>
-                <a:latin typeface="微软雅黑" panose="020B0503020204020204" pitchFamily="34" charset="-122"/>
-                <a:ea typeface="微软雅黑" panose="020B0503020204020204" pitchFamily="34" charset="-122"/>
-              </a:rPr>
-              <a:t>张世杰</a:t>
-            </a:r>
-          </a:p>
-        </p:txBody>
-      </p:sp>
-      <p:sp>
-        <p:nvSpPr>
-          <p:cNvPr id="23" name="矩形 22">
-            <a:extLst>
-              <a:ext uri="{FF2B5EF4-FFF2-40B4-BE49-F238E27FC236}">
-                <a16:creationId xmlns:a16="http://schemas.microsoft.com/office/drawing/2014/main" id="{0FC75E62-BD3B-5B5A-EFEC-224FAF5DB69D}"/>
-              </a:ext>
-            </a:extLst>
-          </p:cNvPr>
-          <p:cNvSpPr/>
-          <p:nvPr/>
-        </p:nvSpPr>
-        <p:spPr>
-          <a:xfrm>
-            <a:off x="2560320" y="6624637"/>
-            <a:ext cx="4023360" cy="233365"/>
-          </a:xfrm>
-          <a:prstGeom prst="rect">
-            <a:avLst/>
-          </a:prstGeom>
-          <a:solidFill>
-            <a:schemeClr val="accent3">
-              <a:lumMod val="40000"/>
-              <a:lumOff val="60000"/>
-            </a:schemeClr>
-          </a:solidFill>
-          <a:ln>
-            <a:noFill/>
-          </a:ln>
-        </p:spPr>
-        <p:style>
-          <a:lnRef idx="2">
-            <a:schemeClr val="accent1">
-              <a:shade val="50000"/>
-            </a:schemeClr>
-          </a:lnRef>
-          <a:fillRef idx="1">
-            <a:schemeClr val="accent1"/>
-          </a:fillRef>
-          <a:effectRef idx="0">
-            <a:schemeClr val="accent1"/>
-          </a:effectRef>
-          <a:fontRef idx="minor">
-            <a:schemeClr val="lt1"/>
-          </a:fontRef>
-        </p:style>
-        <p:txBody>
-          <a:bodyPr anchor="ctr"/>
-          <a:lstStyle/>
-          <a:p>
-            <a:pPr algn="ctr">
-              <a:defRPr/>
-            </a:pPr>
-            <a:r>
-              <a:rPr lang="zh-CN" altLang="en-US" dirty="0">
-                <a:solidFill>
-                  <a:srgbClr val="005D98"/>
-                </a:solidFill>
-                <a:latin typeface="微软雅黑" panose="020B0503020204020204" pitchFamily="34" charset="-122"/>
-                <a:ea typeface="微软雅黑" panose="020B0503020204020204" pitchFamily="34" charset="-122"/>
-              </a:rPr>
-              <a:t>冗余机械臂柔顺控制与安全交互研究</a:t>
-            </a:r>
-          </a:p>
-        </p:txBody>
-      </p:sp>
-      <p:sp>
-        <p:nvSpPr>
-          <p:cNvPr id="2" name="文本框 1">
-            <a:extLst>
-              <a:ext uri="{FF2B5EF4-FFF2-40B4-BE49-F238E27FC236}">
-                <a16:creationId xmlns:a16="http://schemas.microsoft.com/office/drawing/2014/main" id="{28FD29D8-0AA0-312F-4476-0099AE08E76E}"/>
-              </a:ext>
-            </a:extLst>
-          </p:cNvPr>
-          <p:cNvSpPr txBox="1"/>
-          <p:nvPr/>
-        </p:nvSpPr>
-        <p:spPr>
-          <a:xfrm>
-            <a:off x="728027" y="1123226"/>
-            <a:ext cx="7455945" cy="5013039"/>
-          </a:xfrm>
-          <a:prstGeom prst="rect">
-            <a:avLst/>
-          </a:prstGeom>
-          <a:noFill/>
-        </p:spPr>
-        <p:txBody>
-          <a:bodyPr wrap="square" rtlCol="0">
-            <a:spAutoFit/>
-          </a:bodyPr>
-          <a:lstStyle/>
-          <a:p>
-            <a:pPr marL="342900" indent="-342900">
-              <a:lnSpc>
-                <a:spcPct val="250000"/>
-              </a:lnSpc>
-              <a:buFont typeface="Wingdings" panose="05000000000000000000" pitchFamily="2" charset="2"/>
-              <a:buChar char="n"/>
-            </a:pPr>
-            <a:r>
-              <a:rPr lang="zh-CN" altLang="en-US" sz="2400" b="1" dirty="0">
-                <a:solidFill>
-                  <a:schemeClr val="accent5">
-                    <a:lumMod val="40000"/>
-                    <a:lumOff val="60000"/>
-                  </a:schemeClr>
-                </a:solidFill>
-                <a:latin typeface="微软雅黑" panose="020B0503020204020204" pitchFamily="34" charset="-122"/>
-                <a:ea typeface="微软雅黑" panose="020B0503020204020204" pitchFamily="34" charset="-122"/>
-              </a:rPr>
-              <a:t>研究背景与意义</a:t>
-            </a:r>
-            <a:endParaRPr lang="en-US" altLang="zh-CN" sz="2400" b="1" dirty="0">
-              <a:solidFill>
-                <a:schemeClr val="accent5">
-                  <a:lumMod val="40000"/>
-                  <a:lumOff val="60000"/>
-                </a:schemeClr>
-              </a:solidFill>
-              <a:latin typeface="微软雅黑" panose="020B0503020204020204" pitchFamily="34" charset="-122"/>
-              <a:ea typeface="微软雅黑" panose="020B0503020204020204" pitchFamily="34" charset="-122"/>
-            </a:endParaRPr>
-          </a:p>
-          <a:p>
-            <a:pPr marL="342900" indent="-342900">
-              <a:lnSpc>
-                <a:spcPct val="250000"/>
-              </a:lnSpc>
-              <a:buFont typeface="Wingdings" panose="05000000000000000000" pitchFamily="2" charset="2"/>
-              <a:buChar char="n"/>
-            </a:pPr>
-            <a:r>
-              <a:rPr lang="zh-CN" altLang="en-US" sz="2400" b="1" dirty="0">
-                <a:solidFill>
-                  <a:srgbClr val="002060"/>
-                </a:solidFill>
-                <a:latin typeface="微软雅黑" panose="020B0503020204020204" pitchFamily="34" charset="-122"/>
-                <a:ea typeface="微软雅黑" panose="020B0503020204020204" pitchFamily="34" charset="-122"/>
-              </a:rPr>
-              <a:t>研究目标与内容</a:t>
-            </a:r>
-            <a:endParaRPr lang="en-US" altLang="zh-CN" sz="2400" b="1" dirty="0">
-              <a:solidFill>
-                <a:srgbClr val="002060"/>
-              </a:solidFill>
-              <a:latin typeface="微软雅黑" panose="020B0503020204020204" pitchFamily="34" charset="-122"/>
-              <a:ea typeface="微软雅黑" panose="020B0503020204020204" pitchFamily="34" charset="-122"/>
-            </a:endParaRPr>
-          </a:p>
-          <a:p>
-            <a:pPr marL="800100" lvl="1" indent="-342900">
-              <a:lnSpc>
-                <a:spcPct val="250000"/>
-              </a:lnSpc>
-              <a:buFont typeface="Wingdings" panose="05000000000000000000" pitchFamily="2" charset="2"/>
-              <a:buChar char="n"/>
-            </a:pPr>
-            <a:r>
-              <a:rPr lang="zh-CN" altLang="en-US" sz="2000" b="1" dirty="0">
-                <a:solidFill>
-                  <a:srgbClr val="002060"/>
-                </a:solidFill>
-                <a:latin typeface="微软雅黑" panose="020B0503020204020204" pitchFamily="34" charset="-122"/>
-                <a:ea typeface="微软雅黑" panose="020B0503020204020204" pitchFamily="34" charset="-122"/>
-              </a:rPr>
-              <a:t>物理一致约束下的动力学参数辨识</a:t>
-            </a:r>
-            <a:endParaRPr lang="en-US" altLang="zh-CN" sz="2000" b="1" dirty="0">
-              <a:solidFill>
-                <a:srgbClr val="002060"/>
-              </a:solidFill>
-              <a:latin typeface="微软雅黑" panose="020B0503020204020204" pitchFamily="34" charset="-122"/>
-              <a:ea typeface="微软雅黑" panose="020B0503020204020204" pitchFamily="34" charset="-122"/>
-            </a:endParaRPr>
-          </a:p>
-          <a:p>
-            <a:pPr marL="800100" lvl="1" indent="-342900">
-              <a:lnSpc>
-                <a:spcPct val="250000"/>
-              </a:lnSpc>
-              <a:buFont typeface="Wingdings" panose="05000000000000000000" pitchFamily="2" charset="2"/>
-              <a:buChar char="n"/>
-            </a:pPr>
-            <a:r>
-              <a:rPr lang="zh-CN" altLang="en-US" sz="2000" b="1" dirty="0">
-                <a:solidFill>
-                  <a:srgbClr val="002060"/>
-                </a:solidFill>
-                <a:latin typeface="微软雅黑" panose="020B0503020204020204" pitchFamily="34" charset="-122"/>
-                <a:ea typeface="微软雅黑" panose="020B0503020204020204" pitchFamily="34" charset="-122"/>
-              </a:rPr>
-              <a:t>冗余机械臂分层阻抗控制</a:t>
-            </a:r>
-            <a:endParaRPr lang="en-US" altLang="zh-CN" sz="2000" b="1" dirty="0">
-              <a:solidFill>
-                <a:srgbClr val="002060"/>
-              </a:solidFill>
-              <a:latin typeface="微软雅黑" panose="020B0503020204020204" pitchFamily="34" charset="-122"/>
-              <a:ea typeface="微软雅黑" panose="020B0503020204020204" pitchFamily="34" charset="-122"/>
-            </a:endParaRPr>
-          </a:p>
-          <a:p>
-            <a:pPr marL="800100" lvl="1" indent="-342900">
-              <a:lnSpc>
-                <a:spcPct val="250000"/>
-              </a:lnSpc>
-              <a:buFont typeface="Wingdings" panose="05000000000000000000" pitchFamily="2" charset="2"/>
-              <a:buChar char="n"/>
-            </a:pPr>
-            <a:r>
-              <a:rPr lang="zh-CN" altLang="en-US" sz="2000" b="1" dirty="0">
-                <a:solidFill>
-                  <a:srgbClr val="002060"/>
-                </a:solidFill>
-                <a:latin typeface="微软雅黑" panose="020B0503020204020204" pitchFamily="34" charset="-122"/>
-                <a:ea typeface="微软雅黑" panose="020B0503020204020204" pitchFamily="34" charset="-122"/>
-              </a:rPr>
-              <a:t>碰撞检测与误报抑制</a:t>
-            </a:r>
-            <a:endParaRPr lang="en-US" altLang="zh-CN" sz="2000" b="1" dirty="0">
-              <a:solidFill>
-                <a:srgbClr val="002060"/>
-              </a:solidFill>
-              <a:latin typeface="微软雅黑" panose="020B0503020204020204" pitchFamily="34" charset="-122"/>
-              <a:ea typeface="微软雅黑" panose="020B0503020204020204" pitchFamily="34" charset="-122"/>
-            </a:endParaRPr>
-          </a:p>
-          <a:p>
-            <a:pPr marL="342900" indent="-342900">
-              <a:lnSpc>
-                <a:spcPct val="250000"/>
-              </a:lnSpc>
-              <a:buFont typeface="Wingdings" panose="05000000000000000000" pitchFamily="2" charset="2"/>
-              <a:buChar char="n"/>
-            </a:pPr>
-            <a:r>
-              <a:rPr lang="zh-CN" altLang="en-US" sz="2400" b="1" dirty="0">
-                <a:solidFill>
-                  <a:schemeClr val="accent5">
-                    <a:lumMod val="40000"/>
-                    <a:lumOff val="60000"/>
-                  </a:schemeClr>
-                </a:solidFill>
-                <a:latin typeface="微软雅黑" panose="020B0503020204020204" pitchFamily="34" charset="-122"/>
-                <a:ea typeface="微软雅黑" panose="020B0503020204020204" pitchFamily="34" charset="-122"/>
-              </a:rPr>
-              <a:t>预期成果与进度安排</a:t>
-            </a:r>
-            <a:endParaRPr lang="en-US" altLang="zh-CN" sz="2400" b="1" dirty="0">
-              <a:solidFill>
-                <a:schemeClr val="accent5">
-                  <a:lumMod val="40000"/>
-                  <a:lumOff val="60000"/>
-                </a:schemeClr>
-              </a:solidFill>
-              <a:latin typeface="微软雅黑" panose="020B0503020204020204" pitchFamily="34" charset="-122"/>
-              <a:ea typeface="微软雅黑" panose="020B0503020204020204" pitchFamily="34" charset="-122"/>
-            </a:endParaRPr>
-          </a:p>
-        </p:txBody>
-      </p:sp>
-    </p:spTree>
-    <p:extLst>
-      <p:ext uri="{BB962C8B-B14F-4D97-AF65-F5344CB8AC3E}">
-        <p14:creationId xmlns:p14="http://schemas.microsoft.com/office/powerpoint/2010/main" val="2057073636"/>
-      </p:ext>
-    </p:extLst>
-  </p:cSld>
-  <p:clrMapOvr>
-    <a:masterClrMapping/>
-  </p:clrMapOvr>
-</p:sld>
-</file>
-
-<file path=ppt/slides/slide6.xml><?xml version="1.0" encoding="utf-8"?>
-<p:sld xmlns:a="http://schemas.openxmlformats.org/drawingml/2006/main" xmlns:r="http://schemas.openxmlformats.org/officeDocument/2006/relationships" xmlns:p="http://schemas.openxmlformats.org/presentationml/2006/main">
-  <p:cSld>
-    <p:spTree>
-      <p:nvGrpSpPr>
-        <p:cNvPr id="1" name="">
-          <a:extLst>
-            <a:ext uri="{FF2B5EF4-FFF2-40B4-BE49-F238E27FC236}">
-              <a16:creationId xmlns:a16="http://schemas.microsoft.com/office/drawing/2014/main" id="{EBD3F82F-402C-0FAA-30ED-8DBD8D1CE2A1}"/>
-            </a:ext>
-          </a:extLst>
-        </p:cNvPr>
-        <p:cNvGrpSpPr/>
-        <p:nvPr/>
-      </p:nvGrpSpPr>
-      <p:grpSpPr>
-        <a:xfrm>
-          <a:off x="0" y="0"/>
-          <a:ext cx="0" cy="0"/>
-          <a:chOff x="0" y="0"/>
-          <a:chExt cx="0" cy="0"/>
-        </a:xfrm>
-      </p:grpSpPr>
-      <p:sp>
-        <p:nvSpPr>
-          <p:cNvPr id="6146" name="Rectangle 8">
-            <a:extLst>
-              <a:ext uri="{FF2B5EF4-FFF2-40B4-BE49-F238E27FC236}">
-                <a16:creationId xmlns:a16="http://schemas.microsoft.com/office/drawing/2014/main" id="{57801CD9-724A-1F39-CBC7-DFE9049E39E7}"/>
-              </a:ext>
-            </a:extLst>
-          </p:cNvPr>
-          <p:cNvSpPr>
-            <a:spLocks noChangeArrowheads="1"/>
-          </p:cNvSpPr>
-          <p:nvPr/>
-        </p:nvSpPr>
-        <p:spPr bwMode="auto">
-          <a:xfrm>
-            <a:off x="0" y="0"/>
-            <a:ext cx="9144000" cy="0"/>
-          </a:xfrm>
-          <a:prstGeom prst="rect">
-            <a:avLst/>
-          </a:prstGeom>
-          <a:noFill/>
-          <a:ln>
-            <a:noFill/>
-          </a:ln>
-          <a:extLst>
-            <a:ext uri="{909E8E84-426E-40DD-AFC4-6F175D3DCCD1}">
-              <a14:hiddenFill xmlns:a14="http://schemas.microsoft.com/office/drawing/2010/main">
-                <a:solidFill>
-                  <a:srgbClr val="FFFFFF"/>
-                </a:solidFill>
-              </a14:hiddenFill>
-            </a:ext>
-            <a:ext uri="{91240B29-F687-4F45-9708-019B960494DF}">
-              <a14:hiddenLine xmlns:a14="http://schemas.microsoft.com/office/drawing/2010/main" w="9525">
-                <a:solidFill>
-                  <a:srgbClr val="000000"/>
-                </a:solidFill>
-                <a:miter lim="800000"/>
-                <a:headEnd/>
-                <a:tailEnd/>
-              </a14:hiddenLine>
-            </a:ext>
-          </a:extLst>
-        </p:spPr>
-        <p:txBody>
-          <a:bodyPr wrap="none" anchor="ctr">
-            <a:spAutoFit/>
-          </a:bodyPr>
-          <a:lstStyle>
-            <a:lvl1pPr>
-              <a:defRPr>
-                <a:solidFill>
-                  <a:schemeClr val="tx1"/>
-                </a:solidFill>
-                <a:latin typeface="Arial" panose="020B0604020202020204" pitchFamily="34" charset="0"/>
-                <a:ea typeface="宋体" panose="02010600030101010101" pitchFamily="2" charset="-122"/>
-              </a:defRPr>
-            </a:lvl1pPr>
-            <a:lvl2pPr marL="742950" indent="-285750">
-              <a:defRPr>
-                <a:solidFill>
-                  <a:schemeClr val="tx1"/>
-                </a:solidFill>
-                <a:latin typeface="Arial" panose="020B0604020202020204" pitchFamily="34" charset="0"/>
-                <a:ea typeface="宋体" panose="02010600030101010101" pitchFamily="2" charset="-122"/>
-              </a:defRPr>
-            </a:lvl2pPr>
-            <a:lvl3pPr marL="1143000" indent="-228600">
-              <a:defRPr>
-                <a:solidFill>
-                  <a:schemeClr val="tx1"/>
-                </a:solidFill>
-                <a:latin typeface="Arial" panose="020B0604020202020204" pitchFamily="34" charset="0"/>
-                <a:ea typeface="宋体" panose="02010600030101010101" pitchFamily="2" charset="-122"/>
-              </a:defRPr>
-            </a:lvl3pPr>
-            <a:lvl4pPr marL="1600200" indent="-228600">
-              <a:defRPr>
-                <a:solidFill>
-                  <a:schemeClr val="tx1"/>
-                </a:solidFill>
-                <a:latin typeface="Arial" panose="020B0604020202020204" pitchFamily="34" charset="0"/>
-                <a:ea typeface="宋体" panose="02010600030101010101" pitchFamily="2" charset="-122"/>
-              </a:defRPr>
-            </a:lvl4pPr>
-            <a:lvl5pPr marL="2057400" indent="-228600">
-              <a:defRPr>
-                <a:solidFill>
-                  <a:schemeClr val="tx1"/>
-                </a:solidFill>
-                <a:latin typeface="Arial" panose="020B0604020202020204" pitchFamily="34" charset="0"/>
-                <a:ea typeface="宋体" panose="02010600030101010101" pitchFamily="2" charset="-122"/>
-              </a:defRPr>
-            </a:lvl5pPr>
-            <a:lvl6pPr marL="2514600" indent="-228600" eaLnBrk="0" fontAlgn="base" hangingPunct="0">
-              <a:spcBef>
-                <a:spcPct val="0"/>
-              </a:spcBef>
-              <a:spcAft>
-                <a:spcPct val="0"/>
-              </a:spcAft>
-              <a:defRPr>
-                <a:solidFill>
-                  <a:schemeClr val="tx1"/>
-                </a:solidFill>
-                <a:latin typeface="Arial" panose="020B0604020202020204" pitchFamily="34" charset="0"/>
-                <a:ea typeface="宋体" panose="02010600030101010101" pitchFamily="2" charset="-122"/>
-              </a:defRPr>
-            </a:lvl6pPr>
-            <a:lvl7pPr marL="2971800" indent="-228600" eaLnBrk="0" fontAlgn="base" hangingPunct="0">
-              <a:spcBef>
-                <a:spcPct val="0"/>
-              </a:spcBef>
-              <a:spcAft>
-                <a:spcPct val="0"/>
-              </a:spcAft>
-              <a:defRPr>
-                <a:solidFill>
-                  <a:schemeClr val="tx1"/>
-                </a:solidFill>
-                <a:latin typeface="Arial" panose="020B0604020202020204" pitchFamily="34" charset="0"/>
-                <a:ea typeface="宋体" panose="02010600030101010101" pitchFamily="2" charset="-122"/>
-              </a:defRPr>
-            </a:lvl7pPr>
-            <a:lvl8pPr marL="3429000" indent="-228600" eaLnBrk="0" fontAlgn="base" hangingPunct="0">
-              <a:spcBef>
-                <a:spcPct val="0"/>
-              </a:spcBef>
-              <a:spcAft>
-                <a:spcPct val="0"/>
-              </a:spcAft>
-              <a:defRPr>
-                <a:solidFill>
-                  <a:schemeClr val="tx1"/>
-                </a:solidFill>
-                <a:latin typeface="Arial" panose="020B0604020202020204" pitchFamily="34" charset="0"/>
-                <a:ea typeface="宋体" panose="02010600030101010101" pitchFamily="2" charset="-122"/>
-              </a:defRPr>
-            </a:lvl8pPr>
-            <a:lvl9pPr marL="3886200" indent="-228600" eaLnBrk="0" fontAlgn="base" hangingPunct="0">
-              <a:spcBef>
-                <a:spcPct val="0"/>
-              </a:spcBef>
-              <a:spcAft>
-                <a:spcPct val="0"/>
-              </a:spcAft>
-              <a:defRPr>
-                <a:solidFill>
-                  <a:schemeClr val="tx1"/>
-                </a:solidFill>
-                <a:latin typeface="Arial" panose="020B0604020202020204" pitchFamily="34" charset="0"/>
-                <a:ea typeface="宋体" panose="02010600030101010101" pitchFamily="2" charset="-122"/>
-              </a:defRPr>
-            </a:lvl9pPr>
-          </a:lstStyle>
-          <a:p>
-            <a:pPr eaLnBrk="1" latinLnBrk="1" hangingPunct="1"/>
-            <a:endParaRPr kumimoji="1" lang="zh-CN" altLang="en-US" sz="2400" b="1">
-              <a:latin typeface="Gulim" panose="020B0600000101010101" pitchFamily="34" charset="-127"/>
-              <a:ea typeface="Gulim" panose="020B0600000101010101" pitchFamily="34" charset="-127"/>
-            </a:endParaRPr>
-          </a:p>
-        </p:txBody>
-      </p:sp>
-      <p:sp>
-        <p:nvSpPr>
-          <p:cNvPr id="3" name="矩形 2">
-            <a:extLst>
-              <a:ext uri="{FF2B5EF4-FFF2-40B4-BE49-F238E27FC236}">
-                <a16:creationId xmlns:a16="http://schemas.microsoft.com/office/drawing/2014/main" id="{D3B74006-B3D3-E3AB-9018-84202E6FC457}"/>
-              </a:ext>
-            </a:extLst>
-          </p:cNvPr>
-          <p:cNvSpPr/>
-          <p:nvPr/>
-        </p:nvSpPr>
-        <p:spPr>
-          <a:xfrm>
-            <a:off x="-8157" y="0"/>
-            <a:ext cx="9152157" cy="341616"/>
-          </a:xfrm>
-          <a:prstGeom prst="rect">
-            <a:avLst/>
-          </a:prstGeom>
-          <a:solidFill>
-            <a:schemeClr val="accent1">
-              <a:lumMod val="50000"/>
-            </a:schemeClr>
-          </a:solidFill>
-        </p:spPr>
-        <p:style>
-          <a:lnRef idx="2">
-            <a:schemeClr val="accent1">
-              <a:shade val="50000"/>
-            </a:schemeClr>
-          </a:lnRef>
-          <a:fillRef idx="1">
-            <a:schemeClr val="accent1"/>
-          </a:fillRef>
-          <a:effectRef idx="0">
-            <a:schemeClr val="accent1"/>
-          </a:effectRef>
-          <a:fontRef idx="minor">
-            <a:schemeClr val="lt1"/>
-          </a:fontRef>
-        </p:style>
-        <p:txBody>
-          <a:bodyPr rtlCol="0" anchor="ctr"/>
-          <a:lstStyle/>
-          <a:p>
-            <a:pPr algn="ctr"/>
-            <a:endParaRPr lang="zh-CN" altLang="en-US" dirty="0">
-              <a:solidFill>
-                <a:srgbClr val="002060"/>
-              </a:solidFill>
-            </a:endParaRPr>
-          </a:p>
-        </p:txBody>
-      </p:sp>
-      <p:sp>
-        <p:nvSpPr>
-          <p:cNvPr id="4" name="矩形 3">
-            <a:extLst>
-              <a:ext uri="{FF2B5EF4-FFF2-40B4-BE49-F238E27FC236}">
-                <a16:creationId xmlns:a16="http://schemas.microsoft.com/office/drawing/2014/main" id="{773B6A00-B742-0B54-252C-4EDFF3E987F9}"/>
-              </a:ext>
-            </a:extLst>
-          </p:cNvPr>
-          <p:cNvSpPr/>
-          <p:nvPr/>
-        </p:nvSpPr>
-        <p:spPr>
-          <a:xfrm>
-            <a:off x="-8157" y="340793"/>
-            <a:ext cx="9152156" cy="584770"/>
-          </a:xfrm>
-          <a:prstGeom prst="rect">
-            <a:avLst/>
-          </a:prstGeom>
-          <a:solidFill>
-            <a:schemeClr val="accent3">
-              <a:lumMod val="60000"/>
-              <a:lumOff val="40000"/>
-            </a:schemeClr>
-          </a:solidFill>
-          <a:ln>
-            <a:noFill/>
-          </a:ln>
-        </p:spPr>
-        <p:style>
-          <a:lnRef idx="2">
-            <a:schemeClr val="accent1">
-              <a:shade val="50000"/>
-            </a:schemeClr>
-          </a:lnRef>
-          <a:fillRef idx="1">
-            <a:schemeClr val="accent1"/>
-          </a:fillRef>
-          <a:effectRef idx="0">
-            <a:schemeClr val="accent1"/>
-          </a:effectRef>
-          <a:fontRef idx="minor">
-            <a:schemeClr val="lt1"/>
-          </a:fontRef>
-        </p:style>
-        <p:txBody>
-          <a:bodyPr anchor="ctr"/>
-          <a:lstStyle/>
-          <a:p>
-            <a:pPr algn="ctr">
-              <a:defRPr/>
-            </a:pPr>
-            <a:endParaRPr lang="zh-CN" altLang="en-US" dirty="0">
-              <a:solidFill>
-                <a:srgbClr val="005D98"/>
-              </a:solidFill>
-              <a:latin typeface="微软雅黑" panose="020B0503020204020204" pitchFamily="34" charset="-122"/>
-              <a:ea typeface="微软雅黑" panose="020B0503020204020204" pitchFamily="34" charset="-122"/>
-            </a:endParaRPr>
-          </a:p>
-        </p:txBody>
-      </p:sp>
-      <p:sp>
-        <p:nvSpPr>
-          <p:cNvPr id="6" name="文本框 5">
-            <a:extLst>
-              <a:ext uri="{FF2B5EF4-FFF2-40B4-BE49-F238E27FC236}">
-                <a16:creationId xmlns:a16="http://schemas.microsoft.com/office/drawing/2014/main" id="{1E1F8CD6-99C1-6EF9-B069-1908C24FF129}"/>
-              </a:ext>
-            </a:extLst>
-          </p:cNvPr>
-          <p:cNvSpPr txBox="1"/>
-          <p:nvPr/>
-        </p:nvSpPr>
-        <p:spPr>
-          <a:xfrm>
-            <a:off x="187898" y="402345"/>
-            <a:ext cx="6692962" cy="461665"/>
-          </a:xfrm>
-          <a:prstGeom prst="rect">
-            <a:avLst/>
-          </a:prstGeom>
-          <a:noFill/>
-        </p:spPr>
-        <p:txBody>
-          <a:bodyPr wrap="square">
-            <a:spAutoFit/>
-          </a:bodyPr>
-          <a:lstStyle/>
-          <a:p>
-            <a:pPr lvl="0" defTabSz="457200" eaLnBrk="1" fontAlgn="auto" hangingPunct="1">
-              <a:spcBef>
-                <a:spcPts val="0"/>
-              </a:spcBef>
-              <a:spcAft>
-                <a:spcPts val="0"/>
-              </a:spcAft>
-              <a:defRPr/>
-            </a:pPr>
-            <a:r>
-              <a:rPr lang="zh-CN" altLang="en-US" sz="2400" b="1" dirty="0">
-                <a:solidFill>
-                  <a:srgbClr val="002060"/>
-                </a:solidFill>
-                <a:latin typeface="微软雅黑" panose="020B0503020204020204" pitchFamily="34" charset="-122"/>
-                <a:ea typeface="微软雅黑" panose="020B0503020204020204" pitchFamily="34" charset="-122"/>
-              </a:rPr>
-              <a:t>研究目标与技术思路</a:t>
-            </a:r>
-          </a:p>
-        </p:txBody>
-      </p:sp>
-      <p:sp>
-        <p:nvSpPr>
-          <p:cNvPr id="11" name="标题 1">
-            <a:extLst>
-              <a:ext uri="{FF2B5EF4-FFF2-40B4-BE49-F238E27FC236}">
-                <a16:creationId xmlns:a16="http://schemas.microsoft.com/office/drawing/2014/main" id="{95BE55F7-F59C-45A4-9069-844808305A49}"/>
-              </a:ext>
-            </a:extLst>
-          </p:cNvPr>
-          <p:cNvSpPr txBox="1">
-            <a:spLocks/>
-          </p:cNvSpPr>
-          <p:nvPr/>
-        </p:nvSpPr>
-        <p:spPr>
-          <a:xfrm>
-            <a:off x="2462863" y="2548070"/>
-            <a:ext cx="5721109" cy="584776"/>
-          </a:xfrm>
-          <a:prstGeom prst="rect">
-            <a:avLst/>
-          </a:prstGeom>
-        </p:spPr>
-        <p:txBody>
-          <a:bodyPr vert="horz" lIns="91440" tIns="45720" rIns="91440" bIns="45720" rtlCol="0" anchor="b">
-            <a:noAutofit/>
-          </a:bodyPr>
-          <a:lstStyle>
-            <a:lvl1pPr algn="ctr" defTabSz="914400" rtl="0" eaLnBrk="1" latinLnBrk="0" hangingPunct="1">
-              <a:lnSpc>
-                <a:spcPct val="90000"/>
-              </a:lnSpc>
-              <a:spcBef>
-                <a:spcPct val="0"/>
-              </a:spcBef>
-              <a:buNone/>
-              <a:defRPr sz="3600" b="1" kern="1200">
-                <a:solidFill>
-                  <a:schemeClr val="bg1"/>
-                </a:solidFill>
-                <a:latin typeface="+mn-ea"/>
-                <a:ea typeface="+mn-ea"/>
-                <a:cs typeface="+mj-cs"/>
-              </a:defRPr>
-            </a:lvl1pPr>
-          </a:lstStyle>
-          <a:p>
-            <a:pPr>
-              <a:lnSpc>
-                <a:spcPct val="100000"/>
-              </a:lnSpc>
-            </a:pPr>
-            <a:r>
-              <a:rPr lang="zh-CN" altLang="en-US" sz="4000" dirty="0">
-                <a:latin typeface="微软雅黑" panose="020B0503020204020204" pitchFamily="34" charset="-122"/>
-                <a:ea typeface="微软雅黑" panose="020B0503020204020204" pitchFamily="34" charset="-122"/>
-              </a:rPr>
-              <a:t>具身智能</a:t>
-            </a:r>
-            <a:r>
-              <a:rPr lang="en-US" altLang="zh-CN" sz="4000" dirty="0">
-                <a:latin typeface="微软雅黑" panose="020B0503020204020204" pitchFamily="34" charset="-122"/>
-                <a:ea typeface="微软雅黑" panose="020B0503020204020204" pitchFamily="34" charset="-122"/>
-              </a:rPr>
-              <a:t>-</a:t>
-            </a:r>
-            <a:r>
-              <a:rPr lang="zh-CN" altLang="en-US" sz="4000" dirty="0">
-                <a:latin typeface="微软雅黑" panose="020B0503020204020204" pitchFamily="34" charset="-122"/>
-                <a:ea typeface="微软雅黑" panose="020B0503020204020204" pitchFamily="34" charset="-122"/>
-              </a:rPr>
-              <a:t>运动控制开发</a:t>
-            </a:r>
-          </a:p>
-        </p:txBody>
-      </p:sp>
-      <p:sp>
-        <p:nvSpPr>
-          <p:cNvPr id="21" name="矩形 20">
-            <a:extLst>
-              <a:ext uri="{FF2B5EF4-FFF2-40B4-BE49-F238E27FC236}">
-                <a16:creationId xmlns:a16="http://schemas.microsoft.com/office/drawing/2014/main" id="{E9741C3B-6D78-B049-C397-0AABA9773DAD}"/>
-              </a:ext>
-            </a:extLst>
-          </p:cNvPr>
-          <p:cNvSpPr/>
-          <p:nvPr/>
-        </p:nvSpPr>
-        <p:spPr>
-          <a:xfrm>
-            <a:off x="6583680" y="6624636"/>
-            <a:ext cx="2560320" cy="233364"/>
-          </a:xfrm>
-          <a:prstGeom prst="rect">
-            <a:avLst/>
-          </a:prstGeom>
-          <a:solidFill>
-            <a:schemeClr val="accent3">
-              <a:lumMod val="20000"/>
-              <a:lumOff val="80000"/>
-            </a:schemeClr>
-          </a:solidFill>
-          <a:ln>
-            <a:noFill/>
-          </a:ln>
-        </p:spPr>
-        <p:style>
-          <a:lnRef idx="2">
-            <a:schemeClr val="accent1">
-              <a:shade val="50000"/>
-            </a:schemeClr>
-          </a:lnRef>
-          <a:fillRef idx="1">
-            <a:schemeClr val="accent1"/>
-          </a:fillRef>
-          <a:effectRef idx="0">
-            <a:schemeClr val="accent1"/>
-          </a:effectRef>
-          <a:fontRef idx="minor">
-            <a:schemeClr val="lt1"/>
-          </a:fontRef>
-        </p:style>
-        <p:txBody>
-          <a:bodyPr anchor="ctr"/>
-          <a:lstStyle/>
-          <a:p>
-            <a:pPr algn="ctr">
-              <a:defRPr/>
-            </a:pPr>
-            <a:r>
-              <a:rPr lang="en-US" altLang="zh-CN" dirty="0">
-                <a:solidFill>
-                  <a:srgbClr val="005D98"/>
-                </a:solidFill>
-                <a:latin typeface="Times New Roman" panose="02020603050405020304" pitchFamily="18" charset="0"/>
-                <a:cs typeface="Times New Roman" panose="02020603050405020304" pitchFamily="18" charset="0"/>
-              </a:rPr>
-              <a:t>2026/04/27      6/13</a:t>
+              <a:t>2026/04/27      5/11</a:t>
             </a:r>
             <a:endParaRPr lang="zh-CN" altLang="en-US" dirty="0">
               <a:solidFill>
@@ -30871,11 +25963,11 @@
               <a:t>：</a:t>
             </a:r>
             <a:r>
-              <a:rPr lang="en-US" altLang="zh-CN" dirty="0" err="1">
+              <a:rPr lang="zh-CN" altLang="en-US" dirty="0">
                 <a:latin typeface="微软雅黑" panose="020B0503020204020204" pitchFamily="34" charset="-122"/>
                 <a:ea typeface="微软雅黑" panose="020B0503020204020204" pitchFamily="34" charset="-122"/>
               </a:rPr>
-              <a:t>准确模型是柔顺控制与碰撞残差估计的基础；阻抗控制降低接触冲击；碰撞检测保障交互安全</a:t>
+              <a:t>模型辨识提供控制与检测基础，分层阻抗提升柔顺交互能力，碰撞检测与误报抑制保障安全交互</a:t>
             </a:r>
             <a:endParaRPr lang="en-US" altLang="zh-CN" dirty="0">
               <a:latin typeface="微软雅黑" panose="020B0503020204020204" pitchFamily="34" charset="-122"/>
@@ -30897,7 +25989,7 @@
 </p:sld>
 </file>
 
-<file path=ppt/slides/slide7.xml><?xml version="1.0" encoding="utf-8"?>
+<file path=ppt/slides/slide6.xml><?xml version="1.0" encoding="utf-8"?>
 <p:sld xmlns:a="http://schemas.openxmlformats.org/drawingml/2006/main" xmlns:r="http://schemas.openxmlformats.org/officeDocument/2006/relationships" xmlns:p="http://schemas.openxmlformats.org/presentationml/2006/main">
   <p:cSld>
     <p:spTree>
@@ -31590,7 +26682,7 @@
                 <a:latin typeface="Times New Roman" panose="02020603050405020304" pitchFamily="18" charset="0"/>
                 <a:cs typeface="Times New Roman" panose="02020603050405020304" pitchFamily="18" charset="0"/>
               </a:rPr>
-              <a:t>2026/04/27      7/13</a:t>
+              <a:t>2026/04/27      6/11</a:t>
             </a:r>
             <a:endParaRPr lang="zh-CN" altLang="en-US" dirty="0">
               <a:solidFill>
@@ -33187,7 +28279,7 @@
                 <a:latin typeface="微软雅黑" panose="020B0503020204020204" pitchFamily="34" charset="-122"/>
                 <a:ea typeface="微软雅黑" panose="020B0503020204020204" pitchFamily="34" charset="-122"/>
               </a:rPr>
-              <a:t>求解</a:t>
+              <a:t>辨识</a:t>
             </a:r>
             <a:endParaRPr lang="en-US" sz="1600" b="1" dirty="0">
               <a:solidFill>
@@ -33471,7 +28563,7 @@
 </p:sld>
 </file>
 
-<file path=ppt/slides/slide8.xml><?xml version="1.0" encoding="utf-8"?>
+<file path=ppt/slides/slide7.xml><?xml version="1.0" encoding="utf-8"?>
 <p:sld xmlns:a="http://schemas.openxmlformats.org/drawingml/2006/main" xmlns:r="http://schemas.openxmlformats.org/officeDocument/2006/relationships" xmlns:p="http://schemas.openxmlformats.org/presentationml/2006/main">
   <p:cSld>
     <p:spTree>
@@ -34081,7 +29173,7 @@
                 <a:latin typeface="Times New Roman" panose="02020603050405020304" pitchFamily="18" charset="0"/>
                 <a:cs typeface="Times New Roman" panose="02020603050405020304" pitchFamily="18" charset="0"/>
               </a:rPr>
-              <a:t>2026/04/27      8/13</a:t>
+              <a:t>2026/04/27      7/11</a:t>
             </a:r>
             <a:endParaRPr lang="zh-CN" altLang="en-US" dirty="0">
               <a:solidFill>
@@ -35092,11 +30184,21 @@
               </a:spcAft>
             </a:pPr>
             <a:r>
+              <a:rPr lang="zh-CN" altLang="en-US" sz="1600" b="1" dirty="0">
+                <a:solidFill>
+                  <a:srgbClr val="365AF9"/>
+                </a:solidFill>
+                <a:latin typeface="微软雅黑" panose="020B0503020204020204" pitchFamily="34" charset="-122"/>
+                <a:ea typeface="微软雅黑" panose="020B0503020204020204" pitchFamily="34" charset="-122"/>
+              </a:rPr>
+              <a:t>控制逻辑</a:t>
+            </a:r>
+            <a:r>
               <a:rPr lang="zh-CN" altLang="en-US" sz="1600" dirty="0">
                 <a:latin typeface="微软雅黑" panose="020B0503020204020204" pitchFamily="34" charset="-122"/>
                 <a:ea typeface="微软雅黑" panose="020B0503020204020204" pitchFamily="34" charset="-122"/>
               </a:rPr>
-              <a:t>控制逻辑：主任务保证末端位姿跟踪与接触柔顺，次任务在零空间内实现姿态优化与运动稳定</a:t>
+              <a:t>：主任务保证末端位姿跟踪与接触柔顺，次任务在零空间内实现姿态优化与运动稳定</a:t>
             </a:r>
           </a:p>
         </p:txBody>
@@ -35114,7 +30216,7 @@
 </p:sld>
 </file>
 
-<file path=ppt/slides/slide9.xml><?xml version="1.0" encoding="utf-8"?>
+<file path=ppt/slides/slide8.xml><?xml version="1.0" encoding="utf-8"?>
 <p:sld xmlns:a="http://schemas.openxmlformats.org/drawingml/2006/main" xmlns:r="http://schemas.openxmlformats.org/officeDocument/2006/relationships" xmlns:p="http://schemas.openxmlformats.org/presentationml/2006/main">
   <p:cSld>
     <p:spTree>
@@ -35724,7 +30826,7 @@
                 <a:latin typeface="Times New Roman" panose="02020603050405020304" pitchFamily="18" charset="0"/>
                 <a:cs typeface="Times New Roman" panose="02020603050405020304" pitchFamily="18" charset="0"/>
               </a:rPr>
-              <a:t>2026/04/27      9/13</a:t>
+              <a:t>2026/04/27      8/11</a:t>
             </a:r>
             <a:endParaRPr lang="zh-CN" altLang="en-US" dirty="0">
               <a:solidFill>
@@ -37269,6 +32371,2064 @@
     <p:extLst>
       <p:ext uri="{BB962C8B-B14F-4D97-AF65-F5344CB8AC3E}">
         <p14:creationId xmlns:p14="http://schemas.microsoft.com/office/powerpoint/2010/main" val="3250101214"/>
+      </p:ext>
+    </p:extLst>
+  </p:cSld>
+  <p:clrMapOvr>
+    <a:masterClrMapping/>
+  </p:clrMapOvr>
+</p:sld>
+</file>
+
+<file path=ppt/slides/slide9.xml><?xml version="1.0" encoding="utf-8"?>
+<p:sld xmlns:a="http://schemas.openxmlformats.org/drawingml/2006/main" xmlns:r="http://schemas.openxmlformats.org/officeDocument/2006/relationships" xmlns:p="http://schemas.openxmlformats.org/presentationml/2006/main">
+  <p:cSld>
+    <p:spTree>
+      <p:nvGrpSpPr>
+        <p:cNvPr id="1" name="">
+          <a:extLst>
+            <a:ext uri="{FF2B5EF4-FFF2-40B4-BE49-F238E27FC236}">
+              <a16:creationId xmlns:a16="http://schemas.microsoft.com/office/drawing/2014/main" id="{6BCEB7DA-17B7-7715-DE47-12F6DC804047}"/>
+            </a:ext>
+          </a:extLst>
+        </p:cNvPr>
+        <p:cNvGrpSpPr/>
+        <p:nvPr/>
+      </p:nvGrpSpPr>
+      <p:grpSpPr>
+        <a:xfrm>
+          <a:off x="0" y="0"/>
+          <a:ext cx="0" cy="0"/>
+          <a:chOff x="0" y="0"/>
+          <a:chExt cx="0" cy="0"/>
+        </a:xfrm>
+      </p:grpSpPr>
+      <p:sp>
+        <p:nvSpPr>
+          <p:cNvPr id="6146" name="Rectangle 8">
+            <a:extLst>
+              <a:ext uri="{FF2B5EF4-FFF2-40B4-BE49-F238E27FC236}">
+                <a16:creationId xmlns:a16="http://schemas.microsoft.com/office/drawing/2014/main" id="{4CD542E5-D7AB-D741-FD35-59665782331D}"/>
+              </a:ext>
+            </a:extLst>
+          </p:cNvPr>
+          <p:cNvSpPr>
+            <a:spLocks noChangeArrowheads="1"/>
+          </p:cNvSpPr>
+          <p:nvPr/>
+        </p:nvSpPr>
+        <p:spPr bwMode="auto">
+          <a:xfrm>
+            <a:off x="0" y="0"/>
+            <a:ext cx="9144000" cy="0"/>
+          </a:xfrm>
+          <a:prstGeom prst="rect">
+            <a:avLst/>
+          </a:prstGeom>
+          <a:noFill/>
+          <a:ln>
+            <a:noFill/>
+          </a:ln>
+          <a:extLst>
+            <a:ext uri="{909E8E84-426E-40DD-AFC4-6F175D3DCCD1}">
+              <a14:hiddenFill xmlns:a14="http://schemas.microsoft.com/office/drawing/2010/main">
+                <a:solidFill>
+                  <a:srgbClr val="FFFFFF"/>
+                </a:solidFill>
+              </a14:hiddenFill>
+            </a:ext>
+            <a:ext uri="{91240B29-F687-4F45-9708-019B960494DF}">
+              <a14:hiddenLine xmlns:a14="http://schemas.microsoft.com/office/drawing/2010/main" w="9525">
+                <a:solidFill>
+                  <a:srgbClr val="000000"/>
+                </a:solidFill>
+                <a:miter lim="800000"/>
+                <a:headEnd/>
+                <a:tailEnd/>
+              </a14:hiddenLine>
+            </a:ext>
+          </a:extLst>
+        </p:spPr>
+        <p:txBody>
+          <a:bodyPr wrap="none" anchor="ctr">
+            <a:spAutoFit/>
+          </a:bodyPr>
+          <a:lstStyle>
+            <a:lvl1pPr>
+              <a:defRPr>
+                <a:solidFill>
+                  <a:schemeClr val="tx1"/>
+                </a:solidFill>
+                <a:latin typeface="Arial" panose="020B0604020202020204" pitchFamily="34" charset="0"/>
+                <a:ea typeface="宋体" panose="02010600030101010101" pitchFamily="2" charset="-122"/>
+              </a:defRPr>
+            </a:lvl1pPr>
+            <a:lvl2pPr marL="742950" indent="-285750">
+              <a:defRPr>
+                <a:solidFill>
+                  <a:schemeClr val="tx1"/>
+                </a:solidFill>
+                <a:latin typeface="Arial" panose="020B0604020202020204" pitchFamily="34" charset="0"/>
+                <a:ea typeface="宋体" panose="02010600030101010101" pitchFamily="2" charset="-122"/>
+              </a:defRPr>
+            </a:lvl2pPr>
+            <a:lvl3pPr marL="1143000" indent="-228600">
+              <a:defRPr>
+                <a:solidFill>
+                  <a:schemeClr val="tx1"/>
+                </a:solidFill>
+                <a:latin typeface="Arial" panose="020B0604020202020204" pitchFamily="34" charset="0"/>
+                <a:ea typeface="宋体" panose="02010600030101010101" pitchFamily="2" charset="-122"/>
+              </a:defRPr>
+            </a:lvl3pPr>
+            <a:lvl4pPr marL="1600200" indent="-228600">
+              <a:defRPr>
+                <a:solidFill>
+                  <a:schemeClr val="tx1"/>
+                </a:solidFill>
+                <a:latin typeface="Arial" panose="020B0604020202020204" pitchFamily="34" charset="0"/>
+                <a:ea typeface="宋体" panose="02010600030101010101" pitchFamily="2" charset="-122"/>
+              </a:defRPr>
+            </a:lvl4pPr>
+            <a:lvl5pPr marL="2057400" indent="-228600">
+              <a:defRPr>
+                <a:solidFill>
+                  <a:schemeClr val="tx1"/>
+                </a:solidFill>
+                <a:latin typeface="Arial" panose="020B0604020202020204" pitchFamily="34" charset="0"/>
+                <a:ea typeface="宋体" panose="02010600030101010101" pitchFamily="2" charset="-122"/>
+              </a:defRPr>
+            </a:lvl5pPr>
+            <a:lvl6pPr marL="2514600" indent="-228600" eaLnBrk="0" fontAlgn="base" hangingPunct="0">
+              <a:spcBef>
+                <a:spcPct val="0"/>
+              </a:spcBef>
+              <a:spcAft>
+                <a:spcPct val="0"/>
+              </a:spcAft>
+              <a:defRPr>
+                <a:solidFill>
+                  <a:schemeClr val="tx1"/>
+                </a:solidFill>
+                <a:latin typeface="Arial" panose="020B0604020202020204" pitchFamily="34" charset="0"/>
+                <a:ea typeface="宋体" panose="02010600030101010101" pitchFamily="2" charset="-122"/>
+              </a:defRPr>
+            </a:lvl6pPr>
+            <a:lvl7pPr marL="2971800" indent="-228600" eaLnBrk="0" fontAlgn="base" hangingPunct="0">
+              <a:spcBef>
+                <a:spcPct val="0"/>
+              </a:spcBef>
+              <a:spcAft>
+                <a:spcPct val="0"/>
+              </a:spcAft>
+              <a:defRPr>
+                <a:solidFill>
+                  <a:schemeClr val="tx1"/>
+                </a:solidFill>
+                <a:latin typeface="Arial" panose="020B0604020202020204" pitchFamily="34" charset="0"/>
+                <a:ea typeface="宋体" panose="02010600030101010101" pitchFamily="2" charset="-122"/>
+              </a:defRPr>
+            </a:lvl7pPr>
+            <a:lvl8pPr marL="3429000" indent="-228600" eaLnBrk="0" fontAlgn="base" hangingPunct="0">
+              <a:spcBef>
+                <a:spcPct val="0"/>
+              </a:spcBef>
+              <a:spcAft>
+                <a:spcPct val="0"/>
+              </a:spcAft>
+              <a:defRPr>
+                <a:solidFill>
+                  <a:schemeClr val="tx1"/>
+                </a:solidFill>
+                <a:latin typeface="Arial" panose="020B0604020202020204" pitchFamily="34" charset="0"/>
+                <a:ea typeface="宋体" panose="02010600030101010101" pitchFamily="2" charset="-122"/>
+              </a:defRPr>
+            </a:lvl8pPr>
+            <a:lvl9pPr marL="3886200" indent="-228600" eaLnBrk="0" fontAlgn="base" hangingPunct="0">
+              <a:spcBef>
+                <a:spcPct val="0"/>
+              </a:spcBef>
+              <a:spcAft>
+                <a:spcPct val="0"/>
+              </a:spcAft>
+              <a:defRPr>
+                <a:solidFill>
+                  <a:schemeClr val="tx1"/>
+                </a:solidFill>
+                <a:latin typeface="Arial" panose="020B0604020202020204" pitchFamily="34" charset="0"/>
+                <a:ea typeface="宋体" panose="02010600030101010101" pitchFamily="2" charset="-122"/>
+              </a:defRPr>
+            </a:lvl9pPr>
+          </a:lstStyle>
+          <a:p>
+            <a:pPr eaLnBrk="1" latinLnBrk="1" hangingPunct="1"/>
+            <a:endParaRPr kumimoji="1" lang="zh-CN" altLang="en-US" sz="2400" b="1">
+              <a:latin typeface="Gulim" panose="020B0600000101010101" pitchFamily="34" charset="-127"/>
+              <a:ea typeface="Gulim" panose="020B0600000101010101" pitchFamily="34" charset="-127"/>
+            </a:endParaRPr>
+          </a:p>
+        </p:txBody>
+      </p:sp>
+      <p:sp>
+        <p:nvSpPr>
+          <p:cNvPr id="6148" name="矩形 5">
+            <a:extLst>
+              <a:ext uri="{FF2B5EF4-FFF2-40B4-BE49-F238E27FC236}">
+                <a16:creationId xmlns:a16="http://schemas.microsoft.com/office/drawing/2014/main" id="{13611A5B-22FF-CC7D-DE49-9EC68958AE8E}"/>
+              </a:ext>
+            </a:extLst>
+          </p:cNvPr>
+          <p:cNvSpPr>
+            <a:spLocks noChangeArrowheads="1"/>
+          </p:cNvSpPr>
+          <p:nvPr/>
+        </p:nvSpPr>
+        <p:spPr bwMode="auto">
+          <a:xfrm>
+            <a:off x="278847" y="3044971"/>
+            <a:ext cx="8666527" cy="584775"/>
+          </a:xfrm>
+          <a:prstGeom prst="rect">
+            <a:avLst/>
+          </a:prstGeom>
+          <a:noFill/>
+          <a:ln>
+            <a:noFill/>
+          </a:ln>
+          <a:extLst>
+            <a:ext uri="{909E8E84-426E-40DD-AFC4-6F175D3DCCD1}">
+              <a14:hiddenFill xmlns:a14="http://schemas.microsoft.com/office/drawing/2010/main">
+                <a:solidFill>
+                  <a:srgbClr val="FFFFFF"/>
+                </a:solidFill>
+              </a14:hiddenFill>
+            </a:ext>
+            <a:ext uri="{91240B29-F687-4F45-9708-019B960494DF}">
+              <a14:hiddenLine xmlns:a14="http://schemas.microsoft.com/office/drawing/2010/main" w="9525">
+                <a:solidFill>
+                  <a:srgbClr val="000000"/>
+                </a:solidFill>
+                <a:miter lim="800000"/>
+                <a:headEnd/>
+                <a:tailEnd/>
+              </a14:hiddenLine>
+            </a:ext>
+          </a:extLst>
+        </p:spPr>
+        <p:txBody>
+          <a:bodyPr wrap="square">
+            <a:spAutoFit/>
+          </a:bodyPr>
+          <a:lstStyle>
+            <a:lvl1pPr>
+              <a:defRPr>
+                <a:solidFill>
+                  <a:schemeClr val="tx1"/>
+                </a:solidFill>
+                <a:latin typeface="Arial" panose="020B0604020202020204" pitchFamily="34" charset="0"/>
+                <a:ea typeface="宋体" panose="02010600030101010101" pitchFamily="2" charset="-122"/>
+              </a:defRPr>
+            </a:lvl1pPr>
+            <a:lvl2pPr marL="742950" indent="-285750">
+              <a:defRPr>
+                <a:solidFill>
+                  <a:schemeClr val="tx1"/>
+                </a:solidFill>
+                <a:latin typeface="Arial" panose="020B0604020202020204" pitchFamily="34" charset="0"/>
+                <a:ea typeface="宋体" panose="02010600030101010101" pitchFamily="2" charset="-122"/>
+              </a:defRPr>
+            </a:lvl2pPr>
+            <a:lvl3pPr marL="1143000" indent="-228600">
+              <a:defRPr>
+                <a:solidFill>
+                  <a:schemeClr val="tx1"/>
+                </a:solidFill>
+                <a:latin typeface="Arial" panose="020B0604020202020204" pitchFamily="34" charset="0"/>
+                <a:ea typeface="宋体" panose="02010600030101010101" pitchFamily="2" charset="-122"/>
+              </a:defRPr>
+            </a:lvl3pPr>
+            <a:lvl4pPr marL="1600200" indent="-228600">
+              <a:defRPr>
+                <a:solidFill>
+                  <a:schemeClr val="tx1"/>
+                </a:solidFill>
+                <a:latin typeface="Arial" panose="020B0604020202020204" pitchFamily="34" charset="0"/>
+                <a:ea typeface="宋体" panose="02010600030101010101" pitchFamily="2" charset="-122"/>
+              </a:defRPr>
+            </a:lvl4pPr>
+            <a:lvl5pPr marL="2057400" indent="-228600">
+              <a:defRPr>
+                <a:solidFill>
+                  <a:schemeClr val="tx1"/>
+                </a:solidFill>
+                <a:latin typeface="Arial" panose="020B0604020202020204" pitchFamily="34" charset="0"/>
+                <a:ea typeface="宋体" panose="02010600030101010101" pitchFamily="2" charset="-122"/>
+              </a:defRPr>
+            </a:lvl5pPr>
+            <a:lvl6pPr marL="2514600" indent="-228600" eaLnBrk="0" fontAlgn="base" hangingPunct="0">
+              <a:spcBef>
+                <a:spcPct val="0"/>
+              </a:spcBef>
+              <a:spcAft>
+                <a:spcPct val="0"/>
+              </a:spcAft>
+              <a:defRPr>
+                <a:solidFill>
+                  <a:schemeClr val="tx1"/>
+                </a:solidFill>
+                <a:latin typeface="Arial" panose="020B0604020202020204" pitchFamily="34" charset="0"/>
+                <a:ea typeface="宋体" panose="02010600030101010101" pitchFamily="2" charset="-122"/>
+              </a:defRPr>
+            </a:lvl6pPr>
+            <a:lvl7pPr marL="2971800" indent="-228600" eaLnBrk="0" fontAlgn="base" hangingPunct="0">
+              <a:spcBef>
+                <a:spcPct val="0"/>
+              </a:spcBef>
+              <a:spcAft>
+                <a:spcPct val="0"/>
+              </a:spcAft>
+              <a:defRPr>
+                <a:solidFill>
+                  <a:schemeClr val="tx1"/>
+                </a:solidFill>
+                <a:latin typeface="Arial" panose="020B0604020202020204" pitchFamily="34" charset="0"/>
+                <a:ea typeface="宋体" panose="02010600030101010101" pitchFamily="2" charset="-122"/>
+              </a:defRPr>
+            </a:lvl7pPr>
+            <a:lvl8pPr marL="3429000" indent="-228600" eaLnBrk="0" fontAlgn="base" hangingPunct="0">
+              <a:spcBef>
+                <a:spcPct val="0"/>
+              </a:spcBef>
+              <a:spcAft>
+                <a:spcPct val="0"/>
+              </a:spcAft>
+              <a:defRPr>
+                <a:solidFill>
+                  <a:schemeClr val="tx1"/>
+                </a:solidFill>
+                <a:latin typeface="Arial" panose="020B0604020202020204" pitchFamily="34" charset="0"/>
+                <a:ea typeface="宋体" panose="02010600030101010101" pitchFamily="2" charset="-122"/>
+              </a:defRPr>
+            </a:lvl8pPr>
+            <a:lvl9pPr marL="3886200" indent="-228600" eaLnBrk="0" fontAlgn="base" hangingPunct="0">
+              <a:spcBef>
+                <a:spcPct val="0"/>
+              </a:spcBef>
+              <a:spcAft>
+                <a:spcPct val="0"/>
+              </a:spcAft>
+              <a:defRPr>
+                <a:solidFill>
+                  <a:schemeClr val="tx1"/>
+                </a:solidFill>
+                <a:latin typeface="Arial" panose="020B0604020202020204" pitchFamily="34" charset="0"/>
+                <a:ea typeface="宋体" panose="02010600030101010101" pitchFamily="2" charset="-122"/>
+              </a:defRPr>
+            </a:lvl9pPr>
+          </a:lstStyle>
+          <a:p>
+            <a:pPr algn="ctr"/>
+            <a:r>
+              <a:rPr lang="zh-CN" altLang="en-US" sz="3200" b="1" dirty="0">
+                <a:solidFill>
+                  <a:schemeClr val="bg1"/>
+                </a:solidFill>
+                <a:latin typeface="微软雅黑" panose="020B0503020204020204" pitchFamily="34" charset="-122"/>
+                <a:ea typeface="微软雅黑" panose="020B0503020204020204" pitchFamily="34" charset="-122"/>
+              </a:rPr>
+              <a:t>第二次组会汇报</a:t>
+            </a:r>
+          </a:p>
+        </p:txBody>
+      </p:sp>
+      <p:sp>
+        <p:nvSpPr>
+          <p:cNvPr id="3" name="矩形 2">
+            <a:extLst>
+              <a:ext uri="{FF2B5EF4-FFF2-40B4-BE49-F238E27FC236}">
+                <a16:creationId xmlns:a16="http://schemas.microsoft.com/office/drawing/2014/main" id="{72CC0F58-7133-50C0-FDC1-9F0C7D869BDF}"/>
+              </a:ext>
+            </a:extLst>
+          </p:cNvPr>
+          <p:cNvSpPr/>
+          <p:nvPr/>
+        </p:nvSpPr>
+        <p:spPr>
+          <a:xfrm>
+            <a:off x="-8157" y="0"/>
+            <a:ext cx="9152157" cy="341616"/>
+          </a:xfrm>
+          <a:prstGeom prst="rect">
+            <a:avLst/>
+          </a:prstGeom>
+          <a:solidFill>
+            <a:schemeClr val="accent1">
+              <a:lumMod val="50000"/>
+            </a:schemeClr>
+          </a:solidFill>
+        </p:spPr>
+        <p:style>
+          <a:lnRef idx="2">
+            <a:schemeClr val="accent1">
+              <a:shade val="50000"/>
+            </a:schemeClr>
+          </a:lnRef>
+          <a:fillRef idx="1">
+            <a:schemeClr val="accent1"/>
+          </a:fillRef>
+          <a:effectRef idx="0">
+            <a:schemeClr val="accent1"/>
+          </a:effectRef>
+          <a:fontRef idx="minor">
+            <a:schemeClr val="lt1"/>
+          </a:fontRef>
+        </p:style>
+        <p:txBody>
+          <a:bodyPr rtlCol="0" anchor="ctr"/>
+          <a:lstStyle/>
+          <a:p>
+            <a:pPr algn="ctr"/>
+            <a:endParaRPr lang="zh-CN" altLang="en-US" dirty="0">
+              <a:solidFill>
+                <a:srgbClr val="002060"/>
+              </a:solidFill>
+            </a:endParaRPr>
+          </a:p>
+        </p:txBody>
+      </p:sp>
+      <p:sp>
+        <p:nvSpPr>
+          <p:cNvPr id="4" name="矩形 3">
+            <a:extLst>
+              <a:ext uri="{FF2B5EF4-FFF2-40B4-BE49-F238E27FC236}">
+                <a16:creationId xmlns:a16="http://schemas.microsoft.com/office/drawing/2014/main" id="{74D57E97-958A-0318-97EA-AEA5CA61CB16}"/>
+              </a:ext>
+            </a:extLst>
+          </p:cNvPr>
+          <p:cNvSpPr/>
+          <p:nvPr/>
+        </p:nvSpPr>
+        <p:spPr>
+          <a:xfrm>
+            <a:off x="-8157" y="340793"/>
+            <a:ext cx="9152156" cy="584770"/>
+          </a:xfrm>
+          <a:prstGeom prst="rect">
+            <a:avLst/>
+          </a:prstGeom>
+          <a:solidFill>
+            <a:schemeClr val="accent3">
+              <a:lumMod val="60000"/>
+              <a:lumOff val="40000"/>
+            </a:schemeClr>
+          </a:solidFill>
+          <a:ln>
+            <a:noFill/>
+          </a:ln>
+        </p:spPr>
+        <p:style>
+          <a:lnRef idx="2">
+            <a:schemeClr val="accent1">
+              <a:shade val="50000"/>
+            </a:schemeClr>
+          </a:lnRef>
+          <a:fillRef idx="1">
+            <a:schemeClr val="accent1"/>
+          </a:fillRef>
+          <a:effectRef idx="0">
+            <a:schemeClr val="accent1"/>
+          </a:effectRef>
+          <a:fontRef idx="minor">
+            <a:schemeClr val="lt1"/>
+          </a:fontRef>
+        </p:style>
+        <p:txBody>
+          <a:bodyPr anchor="ctr"/>
+          <a:lstStyle/>
+          <a:p>
+            <a:pPr algn="ctr">
+              <a:defRPr/>
+            </a:pPr>
+            <a:endParaRPr lang="zh-CN" altLang="en-US" dirty="0">
+              <a:solidFill>
+                <a:srgbClr val="005D98"/>
+              </a:solidFill>
+              <a:latin typeface="微软雅黑" panose="020B0503020204020204" pitchFamily="34" charset="-122"/>
+              <a:ea typeface="微软雅黑" panose="020B0503020204020204" pitchFamily="34" charset="-122"/>
+            </a:endParaRPr>
+          </a:p>
+        </p:txBody>
+      </p:sp>
+      <p:sp>
+        <p:nvSpPr>
+          <p:cNvPr id="6" name="文本框 5">
+            <a:extLst>
+              <a:ext uri="{FF2B5EF4-FFF2-40B4-BE49-F238E27FC236}">
+                <a16:creationId xmlns:a16="http://schemas.microsoft.com/office/drawing/2014/main" id="{BAFCB722-C039-3E64-71E5-6A21FA9B2799}"/>
+              </a:ext>
+            </a:extLst>
+          </p:cNvPr>
+          <p:cNvSpPr txBox="1"/>
+          <p:nvPr/>
+        </p:nvSpPr>
+        <p:spPr>
+          <a:xfrm>
+            <a:off x="187898" y="402345"/>
+            <a:ext cx="6692962" cy="461665"/>
+          </a:xfrm>
+          <a:prstGeom prst="rect">
+            <a:avLst/>
+          </a:prstGeom>
+          <a:noFill/>
+        </p:spPr>
+        <p:txBody>
+          <a:bodyPr wrap="square">
+            <a:spAutoFit/>
+          </a:bodyPr>
+          <a:lstStyle/>
+          <a:p>
+            <a:pPr lvl="0" defTabSz="457200" eaLnBrk="1" fontAlgn="auto" hangingPunct="1">
+              <a:spcBef>
+                <a:spcPts val="0"/>
+              </a:spcBef>
+              <a:spcAft>
+                <a:spcPts val="0"/>
+              </a:spcAft>
+              <a:defRPr/>
+            </a:pPr>
+            <a:r>
+              <a:rPr lang="zh-CN" altLang="en-US" sz="2400" b="1" dirty="0">
+                <a:solidFill>
+                  <a:srgbClr val="002060"/>
+                </a:solidFill>
+                <a:latin typeface="微软雅黑" panose="020B0503020204020204" pitchFamily="34" charset="-122"/>
+                <a:ea typeface="微软雅黑" panose="020B0503020204020204" pitchFamily="34" charset="-122"/>
+              </a:rPr>
+              <a:t>预期成果</a:t>
+            </a:r>
+          </a:p>
+        </p:txBody>
+      </p:sp>
+      <p:sp>
+        <p:nvSpPr>
+          <p:cNvPr id="21" name="矩形 20">
+            <a:extLst>
+              <a:ext uri="{FF2B5EF4-FFF2-40B4-BE49-F238E27FC236}">
+                <a16:creationId xmlns:a16="http://schemas.microsoft.com/office/drawing/2014/main" id="{01D01F3A-A45C-9599-1793-8335C2AE9A00}"/>
+              </a:ext>
+            </a:extLst>
+          </p:cNvPr>
+          <p:cNvSpPr/>
+          <p:nvPr/>
+        </p:nvSpPr>
+        <p:spPr>
+          <a:xfrm>
+            <a:off x="6583680" y="6624636"/>
+            <a:ext cx="2560320" cy="233364"/>
+          </a:xfrm>
+          <a:prstGeom prst="rect">
+            <a:avLst/>
+          </a:prstGeom>
+          <a:solidFill>
+            <a:schemeClr val="accent3">
+              <a:lumMod val="20000"/>
+              <a:lumOff val="80000"/>
+            </a:schemeClr>
+          </a:solidFill>
+          <a:ln>
+            <a:noFill/>
+          </a:ln>
+        </p:spPr>
+        <p:style>
+          <a:lnRef idx="2">
+            <a:schemeClr val="accent1">
+              <a:shade val="50000"/>
+            </a:schemeClr>
+          </a:lnRef>
+          <a:fillRef idx="1">
+            <a:schemeClr val="accent1"/>
+          </a:fillRef>
+          <a:effectRef idx="0">
+            <a:schemeClr val="accent1"/>
+          </a:effectRef>
+          <a:fontRef idx="minor">
+            <a:schemeClr val="lt1"/>
+          </a:fontRef>
+        </p:style>
+        <p:txBody>
+          <a:bodyPr anchor="ctr"/>
+          <a:lstStyle/>
+          <a:p>
+            <a:pPr algn="ctr">
+              <a:defRPr/>
+            </a:pPr>
+            <a:r>
+              <a:rPr lang="en-US" altLang="zh-CN" dirty="0">
+                <a:solidFill>
+                  <a:srgbClr val="005D98"/>
+                </a:solidFill>
+                <a:latin typeface="Times New Roman" panose="02020603050405020304" pitchFamily="18" charset="0"/>
+                <a:cs typeface="Times New Roman" panose="02020603050405020304" pitchFamily="18" charset="0"/>
+              </a:rPr>
+              <a:t>2026/04/27      9/11</a:t>
+            </a:r>
+            <a:endParaRPr lang="zh-CN" altLang="en-US" dirty="0">
+              <a:solidFill>
+                <a:srgbClr val="005D98"/>
+              </a:solidFill>
+              <a:latin typeface="Times New Roman" panose="02020603050405020304" pitchFamily="18" charset="0"/>
+              <a:cs typeface="Times New Roman" panose="02020603050405020304" pitchFamily="18" charset="0"/>
+            </a:endParaRPr>
+          </a:p>
+        </p:txBody>
+      </p:sp>
+      <p:sp>
+        <p:nvSpPr>
+          <p:cNvPr id="22" name="矩形 21">
+            <a:extLst>
+              <a:ext uri="{FF2B5EF4-FFF2-40B4-BE49-F238E27FC236}">
+                <a16:creationId xmlns:a16="http://schemas.microsoft.com/office/drawing/2014/main" id="{B9361EE2-29C0-7124-6362-9C7DB442F72F}"/>
+              </a:ext>
+            </a:extLst>
+          </p:cNvPr>
+          <p:cNvSpPr/>
+          <p:nvPr/>
+        </p:nvSpPr>
+        <p:spPr>
+          <a:xfrm>
+            <a:off x="0" y="6624637"/>
+            <a:ext cx="2560320" cy="233364"/>
+          </a:xfrm>
+          <a:prstGeom prst="rect">
+            <a:avLst/>
+          </a:prstGeom>
+          <a:solidFill>
+            <a:schemeClr val="accent3">
+              <a:lumMod val="60000"/>
+              <a:lumOff val="40000"/>
+            </a:schemeClr>
+          </a:solidFill>
+          <a:ln>
+            <a:noFill/>
+          </a:ln>
+        </p:spPr>
+        <p:style>
+          <a:lnRef idx="2">
+            <a:schemeClr val="accent1">
+              <a:shade val="50000"/>
+            </a:schemeClr>
+          </a:lnRef>
+          <a:fillRef idx="1">
+            <a:schemeClr val="accent1"/>
+          </a:fillRef>
+          <a:effectRef idx="0">
+            <a:schemeClr val="accent1"/>
+          </a:effectRef>
+          <a:fontRef idx="minor">
+            <a:schemeClr val="lt1"/>
+          </a:fontRef>
+        </p:style>
+        <p:txBody>
+          <a:bodyPr anchor="ctr"/>
+          <a:lstStyle/>
+          <a:p>
+            <a:pPr algn="ctr">
+              <a:defRPr/>
+            </a:pPr>
+            <a:r>
+              <a:rPr lang="zh-CN" altLang="en-US" dirty="0">
+                <a:solidFill>
+                  <a:srgbClr val="005D98"/>
+                </a:solidFill>
+                <a:latin typeface="微软雅黑" panose="020B0503020204020204" pitchFamily="34" charset="-122"/>
+                <a:ea typeface="微软雅黑" panose="020B0503020204020204" pitchFamily="34" charset="-122"/>
+              </a:rPr>
+              <a:t>张世杰</a:t>
+            </a:r>
+          </a:p>
+        </p:txBody>
+      </p:sp>
+      <p:sp>
+        <p:nvSpPr>
+          <p:cNvPr id="23" name="矩形 22">
+            <a:extLst>
+              <a:ext uri="{FF2B5EF4-FFF2-40B4-BE49-F238E27FC236}">
+                <a16:creationId xmlns:a16="http://schemas.microsoft.com/office/drawing/2014/main" id="{6A5C7C2D-A86C-367F-75C8-68CFB8BB3A21}"/>
+              </a:ext>
+            </a:extLst>
+          </p:cNvPr>
+          <p:cNvSpPr/>
+          <p:nvPr/>
+        </p:nvSpPr>
+        <p:spPr>
+          <a:xfrm>
+            <a:off x="2560320" y="6624637"/>
+            <a:ext cx="4023360" cy="233365"/>
+          </a:xfrm>
+          <a:prstGeom prst="rect">
+            <a:avLst/>
+          </a:prstGeom>
+          <a:solidFill>
+            <a:schemeClr val="accent3">
+              <a:lumMod val="40000"/>
+              <a:lumOff val="60000"/>
+            </a:schemeClr>
+          </a:solidFill>
+          <a:ln>
+            <a:noFill/>
+          </a:ln>
+        </p:spPr>
+        <p:style>
+          <a:lnRef idx="2">
+            <a:schemeClr val="accent1">
+              <a:shade val="50000"/>
+            </a:schemeClr>
+          </a:lnRef>
+          <a:fillRef idx="1">
+            <a:schemeClr val="accent1"/>
+          </a:fillRef>
+          <a:effectRef idx="0">
+            <a:schemeClr val="accent1"/>
+          </a:effectRef>
+          <a:fontRef idx="minor">
+            <a:schemeClr val="lt1"/>
+          </a:fontRef>
+        </p:style>
+        <p:txBody>
+          <a:bodyPr anchor="ctr"/>
+          <a:lstStyle/>
+          <a:p>
+            <a:pPr algn="ctr">
+              <a:defRPr/>
+            </a:pPr>
+            <a:r>
+              <a:rPr lang="zh-CN" altLang="en-US" dirty="0">
+                <a:solidFill>
+                  <a:srgbClr val="005D98"/>
+                </a:solidFill>
+                <a:latin typeface="微软雅黑" panose="020B0503020204020204" pitchFamily="34" charset="-122"/>
+                <a:ea typeface="微软雅黑" panose="020B0503020204020204" pitchFamily="34" charset="-122"/>
+              </a:rPr>
+              <a:t>冗余机械臂柔顺控制与安全交互研究</a:t>
+            </a:r>
+          </a:p>
+        </p:txBody>
+      </p:sp>
+      <p:sp>
+        <p:nvSpPr>
+          <p:cNvPr id="5" name="文本框 4">
+            <a:extLst>
+              <a:ext uri="{FF2B5EF4-FFF2-40B4-BE49-F238E27FC236}">
+                <a16:creationId xmlns:a16="http://schemas.microsoft.com/office/drawing/2014/main" id="{2C6418A9-DED5-4E3B-56EF-5EDE9A1F7908}"/>
+              </a:ext>
+            </a:extLst>
+          </p:cNvPr>
+          <p:cNvSpPr txBox="1"/>
+          <p:nvPr/>
+        </p:nvSpPr>
+        <p:spPr bwMode="auto">
+          <a:xfrm>
+            <a:off x="187899" y="-57186"/>
+            <a:ext cx="1620248" cy="377411"/>
+          </a:xfrm>
+          <a:prstGeom prst="rect">
+            <a:avLst/>
+          </a:prstGeom>
+          <a:noFill/>
+          <a:ln w="9525">
+            <a:noFill/>
+            <a:miter lim="800000"/>
+          </a:ln>
+        </p:spPr>
+        <p:txBody>
+          <a:bodyPr wrap="square" rtlCol="0">
+            <a:spAutoFit/>
+          </a:bodyPr>
+          <a:lstStyle/>
+          <a:p>
+            <a:pPr algn="dist">
+              <a:lnSpc>
+                <a:spcPct val="150000"/>
+              </a:lnSpc>
+              <a:spcAft>
+                <a:spcPts val="0"/>
+              </a:spcAft>
+              <a:buNone/>
+            </a:pPr>
+            <a:r>
+              <a:rPr lang="zh-CN" altLang="en-US" sz="1400" dirty="0">
+                <a:solidFill>
+                  <a:schemeClr val="bg2">
+                    <a:lumMod val="75000"/>
+                  </a:schemeClr>
+                </a:solidFill>
+                <a:latin typeface="微软雅黑" panose="020B0503020204020204" pitchFamily="34" charset="-122"/>
+                <a:ea typeface="微软雅黑" panose="020B0503020204020204" pitchFamily="34" charset="-122"/>
+              </a:rPr>
+              <a:t>研究背景与意义</a:t>
+            </a:r>
+          </a:p>
+        </p:txBody>
+      </p:sp>
+      <p:sp>
+        <p:nvSpPr>
+          <p:cNvPr id="7" name="文本框 6">
+            <a:extLst>
+              <a:ext uri="{FF2B5EF4-FFF2-40B4-BE49-F238E27FC236}">
+                <a16:creationId xmlns:a16="http://schemas.microsoft.com/office/drawing/2014/main" id="{5CC50FFC-1DA4-611B-2AAA-B5106C4F7381}"/>
+              </a:ext>
+            </a:extLst>
+          </p:cNvPr>
+          <p:cNvSpPr txBox="1"/>
+          <p:nvPr/>
+        </p:nvSpPr>
+        <p:spPr bwMode="auto">
+          <a:xfrm>
+            <a:off x="3757797" y="-57187"/>
+            <a:ext cx="1620248" cy="377411"/>
+          </a:xfrm>
+          <a:prstGeom prst="rect">
+            <a:avLst/>
+          </a:prstGeom>
+          <a:noFill/>
+          <a:ln w="9525">
+            <a:noFill/>
+            <a:miter lim="800000"/>
+          </a:ln>
+        </p:spPr>
+        <p:txBody>
+          <a:bodyPr wrap="square" rtlCol="0">
+            <a:spAutoFit/>
+          </a:bodyPr>
+          <a:lstStyle/>
+          <a:p>
+            <a:pPr algn="dist">
+              <a:lnSpc>
+                <a:spcPct val="150000"/>
+              </a:lnSpc>
+              <a:spcAft>
+                <a:spcPts val="0"/>
+              </a:spcAft>
+              <a:buNone/>
+            </a:pPr>
+            <a:r>
+              <a:rPr lang="zh-CN" altLang="en-US" sz="1400" dirty="0">
+                <a:solidFill>
+                  <a:schemeClr val="bg2">
+                    <a:lumMod val="75000"/>
+                  </a:schemeClr>
+                </a:solidFill>
+                <a:latin typeface="微软雅黑" panose="020B0503020204020204" pitchFamily="34" charset="-122"/>
+                <a:ea typeface="微软雅黑" panose="020B0503020204020204" pitchFamily="34" charset="-122"/>
+              </a:rPr>
+              <a:t>研究目标与内容</a:t>
+            </a:r>
+          </a:p>
+        </p:txBody>
+      </p:sp>
+      <p:sp>
+        <p:nvSpPr>
+          <p:cNvPr id="8" name="文本框 7">
+            <a:extLst>
+              <a:ext uri="{FF2B5EF4-FFF2-40B4-BE49-F238E27FC236}">
+                <a16:creationId xmlns:a16="http://schemas.microsoft.com/office/drawing/2014/main" id="{FA64C0B2-BA71-BAF7-8F09-CA9E09EAF106}"/>
+              </a:ext>
+            </a:extLst>
+          </p:cNvPr>
+          <p:cNvSpPr txBox="1"/>
+          <p:nvPr/>
+        </p:nvSpPr>
+        <p:spPr bwMode="auto">
+          <a:xfrm>
+            <a:off x="7076915" y="-54857"/>
+            <a:ext cx="1879186" cy="377411"/>
+          </a:xfrm>
+          <a:prstGeom prst="rect">
+            <a:avLst/>
+          </a:prstGeom>
+          <a:noFill/>
+          <a:ln w="9525">
+            <a:noFill/>
+            <a:miter lim="800000"/>
+          </a:ln>
+        </p:spPr>
+        <p:txBody>
+          <a:bodyPr wrap="square" rtlCol="0">
+            <a:spAutoFit/>
+          </a:bodyPr>
+          <a:lstStyle/>
+          <a:p>
+            <a:pPr algn="dist">
+              <a:lnSpc>
+                <a:spcPct val="150000"/>
+              </a:lnSpc>
+              <a:spcAft>
+                <a:spcPts val="0"/>
+              </a:spcAft>
+              <a:buNone/>
+            </a:pPr>
+            <a:r>
+              <a:rPr lang="zh-CN" altLang="en-US" sz="1400" dirty="0">
+                <a:solidFill>
+                  <a:schemeClr val="bg1"/>
+                </a:solidFill>
+                <a:latin typeface="微软雅黑" panose="020B0503020204020204" pitchFamily="34" charset="-122"/>
+                <a:ea typeface="微软雅黑" panose="020B0503020204020204" pitchFamily="34" charset="-122"/>
+              </a:rPr>
+              <a:t>预期成果与进度安排</a:t>
+            </a:r>
+          </a:p>
+        </p:txBody>
+      </p:sp>
+      <p:sp>
+        <p:nvSpPr>
+          <p:cNvPr id="15" name="文本框 14">
+            <a:extLst>
+              <a:ext uri="{FF2B5EF4-FFF2-40B4-BE49-F238E27FC236}">
+                <a16:creationId xmlns:a16="http://schemas.microsoft.com/office/drawing/2014/main" id="{F463F182-1882-A955-4193-A12A42E53649}"/>
+              </a:ext>
+            </a:extLst>
+          </p:cNvPr>
+          <p:cNvSpPr txBox="1"/>
+          <p:nvPr/>
+        </p:nvSpPr>
+        <p:spPr>
+          <a:xfrm>
+            <a:off x="738972" y="2279016"/>
+            <a:ext cx="3613429" cy="1200329"/>
+          </a:xfrm>
+          <a:prstGeom prst="rect">
+            <a:avLst/>
+          </a:prstGeom>
+          <a:noFill/>
+        </p:spPr>
+        <p:txBody>
+          <a:bodyPr wrap="square" rtlCol="0">
+            <a:spAutoFit/>
+          </a:bodyPr>
+          <a:lstStyle/>
+          <a:p>
+            <a:pPr algn="ctr"/>
+            <a:r>
+              <a:rPr lang="zh-CN" altLang="en-US" sz="2400" b="1" dirty="0">
+                <a:solidFill>
+                  <a:schemeClr val="bg1"/>
+                </a:solidFill>
+                <a:latin typeface="微软雅黑" panose="020B0503020204020204" pitchFamily="34" charset="-122"/>
+                <a:ea typeface="微软雅黑" panose="020B0503020204020204" pitchFamily="34" charset="-122"/>
+              </a:rPr>
+              <a:t>深入实施“人工智能</a:t>
+            </a:r>
+            <a:r>
+              <a:rPr lang="en-US" altLang="zh-CN" sz="2400" b="1" dirty="0">
+                <a:solidFill>
+                  <a:schemeClr val="bg1"/>
+                </a:solidFill>
+                <a:latin typeface="微软雅黑" panose="020B0503020204020204" pitchFamily="34" charset="-122"/>
+                <a:ea typeface="微软雅黑" panose="020B0503020204020204" pitchFamily="34" charset="-122"/>
+              </a:rPr>
+              <a:t>+</a:t>
+            </a:r>
+            <a:r>
+              <a:rPr lang="zh-CN" altLang="en-US" sz="2400" b="1" dirty="0">
+                <a:solidFill>
+                  <a:schemeClr val="bg1"/>
+                </a:solidFill>
+                <a:latin typeface="微软雅黑" panose="020B0503020204020204" pitchFamily="34" charset="-122"/>
+                <a:ea typeface="微软雅黑" panose="020B0503020204020204" pitchFamily="34" charset="-122"/>
+              </a:rPr>
+              <a:t>”行动为高质量发展提供强大动能</a:t>
+            </a:r>
+          </a:p>
+        </p:txBody>
+      </p:sp>
+      <p:sp>
+        <p:nvSpPr>
+          <p:cNvPr id="16" name="文本框 15">
+            <a:extLst>
+              <a:ext uri="{FF2B5EF4-FFF2-40B4-BE49-F238E27FC236}">
+                <a16:creationId xmlns:a16="http://schemas.microsoft.com/office/drawing/2014/main" id="{99E2C556-45A0-D53C-9306-4787E814AAEB}"/>
+              </a:ext>
+            </a:extLst>
+          </p:cNvPr>
+          <p:cNvSpPr txBox="1"/>
+          <p:nvPr/>
+        </p:nvSpPr>
+        <p:spPr>
+          <a:xfrm>
+            <a:off x="738972" y="3510803"/>
+            <a:ext cx="3613429" cy="369332"/>
+          </a:xfrm>
+          <a:prstGeom prst="rect">
+            <a:avLst/>
+          </a:prstGeom>
+          <a:noFill/>
+        </p:spPr>
+        <p:txBody>
+          <a:bodyPr wrap="square" rtlCol="0">
+            <a:spAutoFit/>
+          </a:bodyPr>
+          <a:lstStyle/>
+          <a:p>
+            <a:pPr algn="ctr"/>
+            <a:r>
+              <a:rPr lang="zh-CN" altLang="en-US" b="1" dirty="0">
+                <a:solidFill>
+                  <a:schemeClr val="bg1"/>
+                </a:solidFill>
+                <a:latin typeface="微软雅黑" panose="020B0503020204020204" pitchFamily="34" charset="-122"/>
+                <a:ea typeface="微软雅黑" panose="020B0503020204020204" pitchFamily="34" charset="-122"/>
+              </a:rPr>
+              <a:t>国家发改委</a:t>
+            </a:r>
+          </a:p>
+        </p:txBody>
+      </p:sp>
+      <p:sp>
+        <p:nvSpPr>
+          <p:cNvPr id="20" name="文本框 19">
+            <a:extLst>
+              <a:ext uri="{FF2B5EF4-FFF2-40B4-BE49-F238E27FC236}">
+                <a16:creationId xmlns:a16="http://schemas.microsoft.com/office/drawing/2014/main" id="{AE662023-4AF2-8C33-560C-5885193DB972}"/>
+              </a:ext>
+            </a:extLst>
+          </p:cNvPr>
+          <p:cNvSpPr txBox="1"/>
+          <p:nvPr/>
+        </p:nvSpPr>
+        <p:spPr>
+          <a:xfrm>
+            <a:off x="5059391" y="3490576"/>
+            <a:ext cx="3613429" cy="369332"/>
+          </a:xfrm>
+          <a:prstGeom prst="rect">
+            <a:avLst/>
+          </a:prstGeom>
+          <a:noFill/>
+        </p:spPr>
+        <p:txBody>
+          <a:bodyPr wrap="square" rtlCol="0">
+            <a:spAutoFit/>
+          </a:bodyPr>
+          <a:lstStyle/>
+          <a:p>
+            <a:pPr algn="ctr"/>
+            <a:r>
+              <a:rPr lang="zh-CN" altLang="en-US" b="1" dirty="0">
+                <a:solidFill>
+                  <a:schemeClr val="bg1"/>
+                </a:solidFill>
+                <a:latin typeface="微软雅黑" panose="020B0503020204020204" pitchFamily="34" charset="-122"/>
+                <a:ea typeface="微软雅黑" panose="020B0503020204020204" pitchFamily="34" charset="-122"/>
+              </a:rPr>
+              <a:t>中国政府网</a:t>
+            </a:r>
+          </a:p>
+        </p:txBody>
+      </p:sp>
+      <p:sp>
+        <p:nvSpPr>
+          <p:cNvPr id="14" name="Shape 10">
+            <a:extLst>
+              <a:ext uri="{FF2B5EF4-FFF2-40B4-BE49-F238E27FC236}">
+                <a16:creationId xmlns:a16="http://schemas.microsoft.com/office/drawing/2014/main" id="{49023E99-A05E-2C2D-EA4A-AD50ABF4884A}"/>
+              </a:ext>
+            </a:extLst>
+          </p:cNvPr>
+          <p:cNvSpPr/>
+          <p:nvPr/>
+        </p:nvSpPr>
+        <p:spPr>
+          <a:xfrm>
+            <a:off x="292608" y="2130552"/>
+            <a:ext cx="4160520" cy="1938528"/>
+          </a:xfrm>
+          <a:prstGeom prst="roundRect">
+            <a:avLst>
+              <a:gd name="adj" fmla="val 5660"/>
+            </a:avLst>
+          </a:prstGeom>
+          <a:solidFill>
+            <a:srgbClr val="FFFFFF"/>
+          </a:solidFill>
+          <a:ln w="15240">
+            <a:solidFill>
+              <a:srgbClr val="B7D5F5"/>
+            </a:solidFill>
+            <a:prstDash val="solid"/>
+          </a:ln>
+        </p:spPr>
+      </p:sp>
+      <p:sp>
+        <p:nvSpPr>
+          <p:cNvPr id="17" name="Text 12">
+            <a:extLst>
+              <a:ext uri="{FF2B5EF4-FFF2-40B4-BE49-F238E27FC236}">
+                <a16:creationId xmlns:a16="http://schemas.microsoft.com/office/drawing/2014/main" id="{742CA2AF-9D33-04C5-6CB1-A54E0AA716F4}"/>
+              </a:ext>
+            </a:extLst>
+          </p:cNvPr>
+          <p:cNvSpPr/>
+          <p:nvPr/>
+        </p:nvSpPr>
+        <p:spPr>
+          <a:xfrm>
+            <a:off x="457200" y="2322576"/>
+            <a:ext cx="420624" cy="384048"/>
+          </a:xfrm>
+          <a:prstGeom prst="rect">
+            <a:avLst/>
+          </a:prstGeom>
+          <a:noFill/>
+          <a:ln/>
+        </p:spPr>
+        <p:txBody>
+          <a:bodyPr wrap="square" lIns="254" tIns="254" rIns="254" bIns="254" rtlCol="0" anchor="ctr">
+            <a:normAutofit/>
+          </a:bodyPr>
+          <a:lstStyle/>
+          <a:p>
+            <a:pPr marL="0" indent="0" algn="ctr">
+              <a:buNone/>
+            </a:pPr>
+            <a:r>
+              <a:rPr lang="en-US" sz="1800" b="1" dirty="0">
+                <a:solidFill>
+                  <a:srgbClr val="FFFFFF"/>
+                </a:solidFill>
+                <a:latin typeface="Microsoft YaHei" pitchFamily="34" charset="0"/>
+                <a:ea typeface="Microsoft YaHei" pitchFamily="34" charset="-122"/>
+                <a:cs typeface="Microsoft YaHei" pitchFamily="34" charset="-120"/>
+              </a:rPr>
+              <a:t>01</a:t>
+            </a:r>
+            <a:endParaRPr lang="en-US" sz="1800" dirty="0"/>
+          </a:p>
+        </p:txBody>
+      </p:sp>
+      <p:sp>
+        <p:nvSpPr>
+          <p:cNvPr id="18" name="Text 13">
+            <a:extLst>
+              <a:ext uri="{FF2B5EF4-FFF2-40B4-BE49-F238E27FC236}">
+                <a16:creationId xmlns:a16="http://schemas.microsoft.com/office/drawing/2014/main" id="{F77F226F-57D6-DB91-D7DA-BECCAF77805D}"/>
+              </a:ext>
+            </a:extLst>
+          </p:cNvPr>
+          <p:cNvSpPr/>
+          <p:nvPr/>
+        </p:nvSpPr>
+        <p:spPr>
+          <a:xfrm>
+            <a:off x="877824" y="2355383"/>
+            <a:ext cx="1088136" cy="305109"/>
+          </a:xfrm>
+          <a:prstGeom prst="rect">
+            <a:avLst/>
+          </a:prstGeom>
+          <a:noFill/>
+          <a:ln/>
+        </p:spPr>
+        <p:txBody>
+          <a:bodyPr wrap="square" lIns="254" tIns="254" rIns="254" bIns="254" rtlCol="0" anchor="ctr">
+            <a:normAutofit fontScale="92500" lnSpcReduction="10000"/>
+          </a:bodyPr>
+          <a:lstStyle/>
+          <a:p>
+            <a:pPr marL="0" indent="0" algn="l">
+              <a:buNone/>
+            </a:pPr>
+            <a:r>
+              <a:rPr lang="en-US" sz="2300" b="1" dirty="0">
+                <a:solidFill>
+                  <a:srgbClr val="0A5AA4"/>
+                </a:solidFill>
+                <a:latin typeface="Microsoft YaHei" pitchFamily="34" charset="0"/>
+                <a:ea typeface="Microsoft YaHei" pitchFamily="34" charset="-122"/>
+                <a:cs typeface="Microsoft YaHei" pitchFamily="34" charset="-120"/>
+              </a:rPr>
+              <a:t>模型成果</a:t>
+            </a:r>
+            <a:endParaRPr lang="en-US" sz="2300" dirty="0"/>
+          </a:p>
+        </p:txBody>
+      </p:sp>
+      <p:sp>
+        <p:nvSpPr>
+          <p:cNvPr id="19" name="Shape 14">
+            <a:extLst>
+              <a:ext uri="{FF2B5EF4-FFF2-40B4-BE49-F238E27FC236}">
+                <a16:creationId xmlns:a16="http://schemas.microsoft.com/office/drawing/2014/main" id="{A418F95E-1911-C3ED-5EF9-D2543DF582B3}"/>
+              </a:ext>
+            </a:extLst>
+          </p:cNvPr>
+          <p:cNvSpPr/>
+          <p:nvPr/>
+        </p:nvSpPr>
+        <p:spPr>
+          <a:xfrm>
+            <a:off x="475488" y="2834640"/>
+            <a:ext cx="1737360" cy="0"/>
+          </a:xfrm>
+          <a:prstGeom prst="line">
+            <a:avLst/>
+          </a:prstGeom>
+          <a:noFill/>
+          <a:ln w="11430">
+            <a:solidFill>
+              <a:srgbClr val="B7D5F5"/>
+            </a:solidFill>
+            <a:prstDash val="solid"/>
+          </a:ln>
+        </p:spPr>
+      </p:sp>
+      <p:sp>
+        <p:nvSpPr>
+          <p:cNvPr id="24" name="Text 15">
+            <a:extLst>
+              <a:ext uri="{FF2B5EF4-FFF2-40B4-BE49-F238E27FC236}">
+                <a16:creationId xmlns:a16="http://schemas.microsoft.com/office/drawing/2014/main" id="{1E435EC3-1E2A-B34E-1E70-53583DED1124}"/>
+              </a:ext>
+            </a:extLst>
+          </p:cNvPr>
+          <p:cNvSpPr/>
+          <p:nvPr/>
+        </p:nvSpPr>
+        <p:spPr>
+          <a:xfrm>
+            <a:off x="457200" y="2872019"/>
+            <a:ext cx="3613429" cy="964080"/>
+          </a:xfrm>
+          <a:prstGeom prst="rect">
+            <a:avLst/>
+          </a:prstGeom>
+          <a:noFill/>
+          <a:ln/>
+        </p:spPr>
+        <p:txBody>
+          <a:bodyPr wrap="square" lIns="254" tIns="254" rIns="254" bIns="254" rtlCol="0" anchor="ctr">
+            <a:noAutofit/>
+          </a:bodyPr>
+          <a:lstStyle/>
+          <a:p>
+            <a:pPr marL="0" indent="0" algn="l">
+              <a:lnSpc>
+                <a:spcPct val="200000"/>
+              </a:lnSpc>
+              <a:buNone/>
+            </a:pPr>
+            <a:r>
+              <a:rPr lang="en-US" sz="1600" dirty="0" err="1">
+                <a:solidFill>
+                  <a:srgbClr val="111111"/>
+                </a:solidFill>
+                <a:latin typeface="微软雅黑" panose="020B0503020204020204" pitchFamily="34" charset="-122"/>
+                <a:ea typeface="微软雅黑" panose="020B0503020204020204" pitchFamily="34" charset="-122"/>
+                <a:cs typeface="Microsoft YaHei" pitchFamily="34" charset="-120"/>
+              </a:rPr>
+              <a:t>建立冗余机械臂动力学参数辨识模型</a:t>
+            </a:r>
+            <a:endParaRPr lang="en-US" sz="1600" dirty="0">
+              <a:solidFill>
+                <a:srgbClr val="111111"/>
+              </a:solidFill>
+              <a:latin typeface="微软雅黑" panose="020B0503020204020204" pitchFamily="34" charset="-122"/>
+              <a:ea typeface="微软雅黑" panose="020B0503020204020204" pitchFamily="34" charset="-122"/>
+              <a:cs typeface="Microsoft YaHei" pitchFamily="34" charset="-120"/>
+            </a:endParaRPr>
+          </a:p>
+          <a:p>
+            <a:pPr>
+              <a:lnSpc>
+                <a:spcPct val="200000"/>
+              </a:lnSpc>
+            </a:pPr>
+            <a:r>
+              <a:rPr lang="en-US" altLang="zh-CN" sz="1600" dirty="0" err="1">
+                <a:solidFill>
+                  <a:srgbClr val="111111"/>
+                </a:solidFill>
+                <a:latin typeface="微软雅黑" panose="020B0503020204020204" pitchFamily="34" charset="-122"/>
+                <a:ea typeface="微软雅黑" panose="020B0503020204020204" pitchFamily="34" charset="-122"/>
+                <a:cs typeface="Microsoft YaHei" pitchFamily="34" charset="-120"/>
+              </a:rPr>
+              <a:t>为前馈补偿与外力估计提供基础</a:t>
+            </a:r>
+            <a:endParaRPr lang="en-US" altLang="zh-CN" sz="1600" dirty="0">
+              <a:latin typeface="微软雅黑" panose="020B0503020204020204" pitchFamily="34" charset="-122"/>
+              <a:ea typeface="微软雅黑" panose="020B0503020204020204" pitchFamily="34" charset="-122"/>
+            </a:endParaRPr>
+          </a:p>
+        </p:txBody>
+      </p:sp>
+      <p:sp>
+        <p:nvSpPr>
+          <p:cNvPr id="25" name="Shape 21">
+            <a:extLst>
+              <a:ext uri="{FF2B5EF4-FFF2-40B4-BE49-F238E27FC236}">
+                <a16:creationId xmlns:a16="http://schemas.microsoft.com/office/drawing/2014/main" id="{3B5EBA9D-7117-25AE-E6DE-E53D48EFE4B3}"/>
+              </a:ext>
+            </a:extLst>
+          </p:cNvPr>
+          <p:cNvSpPr/>
+          <p:nvPr/>
+        </p:nvSpPr>
+        <p:spPr>
+          <a:xfrm>
+            <a:off x="4690872" y="2130552"/>
+            <a:ext cx="4160520" cy="1938528"/>
+          </a:xfrm>
+          <a:prstGeom prst="roundRect">
+            <a:avLst>
+              <a:gd name="adj" fmla="val 5660"/>
+            </a:avLst>
+          </a:prstGeom>
+          <a:solidFill>
+            <a:srgbClr val="FFFFFF"/>
+          </a:solidFill>
+          <a:ln w="15240">
+            <a:solidFill>
+              <a:srgbClr val="B7D5F5"/>
+            </a:solidFill>
+            <a:prstDash val="solid"/>
+          </a:ln>
+        </p:spPr>
+      </p:sp>
+      <p:sp>
+        <p:nvSpPr>
+          <p:cNvPr id="26" name="Text 23">
+            <a:extLst>
+              <a:ext uri="{FF2B5EF4-FFF2-40B4-BE49-F238E27FC236}">
+                <a16:creationId xmlns:a16="http://schemas.microsoft.com/office/drawing/2014/main" id="{1F0ED68B-75B7-B5E9-3739-F9EDD1826E66}"/>
+              </a:ext>
+            </a:extLst>
+          </p:cNvPr>
+          <p:cNvSpPr/>
+          <p:nvPr/>
+        </p:nvSpPr>
+        <p:spPr>
+          <a:xfrm>
+            <a:off x="4855464" y="2322576"/>
+            <a:ext cx="420624" cy="384048"/>
+          </a:xfrm>
+          <a:prstGeom prst="rect">
+            <a:avLst/>
+          </a:prstGeom>
+          <a:noFill/>
+          <a:ln/>
+        </p:spPr>
+        <p:txBody>
+          <a:bodyPr wrap="square" lIns="254" tIns="254" rIns="254" bIns="254" rtlCol="0" anchor="ctr">
+            <a:normAutofit/>
+          </a:bodyPr>
+          <a:lstStyle/>
+          <a:p>
+            <a:pPr marL="0" indent="0" algn="ctr">
+              <a:buNone/>
+            </a:pPr>
+            <a:r>
+              <a:rPr lang="en-US" sz="1800" b="1" dirty="0">
+                <a:solidFill>
+                  <a:srgbClr val="FFFFFF"/>
+                </a:solidFill>
+                <a:latin typeface="Microsoft YaHei" pitchFamily="34" charset="0"/>
+                <a:ea typeface="Microsoft YaHei" pitchFamily="34" charset="-122"/>
+                <a:cs typeface="Microsoft YaHei" pitchFamily="34" charset="-120"/>
+              </a:rPr>
+              <a:t>02</a:t>
+            </a:r>
+            <a:endParaRPr lang="en-US" sz="1800" dirty="0"/>
+          </a:p>
+        </p:txBody>
+      </p:sp>
+      <p:sp>
+        <p:nvSpPr>
+          <p:cNvPr id="27" name="Text 24">
+            <a:extLst>
+              <a:ext uri="{FF2B5EF4-FFF2-40B4-BE49-F238E27FC236}">
+                <a16:creationId xmlns:a16="http://schemas.microsoft.com/office/drawing/2014/main" id="{764C4C3B-E9BB-D91A-9A59-B3E79550D76B}"/>
+              </a:ext>
+            </a:extLst>
+          </p:cNvPr>
+          <p:cNvSpPr/>
+          <p:nvPr/>
+        </p:nvSpPr>
+        <p:spPr>
+          <a:xfrm>
+            <a:off x="5234940" y="2364311"/>
+            <a:ext cx="1645920" cy="310896"/>
+          </a:xfrm>
+          <a:prstGeom prst="rect">
+            <a:avLst/>
+          </a:prstGeom>
+          <a:noFill/>
+          <a:ln/>
+        </p:spPr>
+        <p:txBody>
+          <a:bodyPr wrap="square" lIns="254" tIns="254" rIns="254" bIns="254" rtlCol="0" anchor="ctr">
+            <a:normAutofit fontScale="92500" lnSpcReduction="10000"/>
+          </a:bodyPr>
+          <a:lstStyle/>
+          <a:p>
+            <a:pPr marL="0" indent="0" algn="l">
+              <a:buNone/>
+            </a:pPr>
+            <a:r>
+              <a:rPr lang="en-US" sz="2300" b="1" dirty="0">
+                <a:solidFill>
+                  <a:srgbClr val="0A5AA4"/>
+                </a:solidFill>
+                <a:latin typeface="Microsoft YaHei" pitchFamily="34" charset="0"/>
+                <a:ea typeface="Microsoft YaHei" pitchFamily="34" charset="-122"/>
+                <a:cs typeface="Microsoft YaHei" pitchFamily="34" charset="-120"/>
+              </a:rPr>
+              <a:t>控制成果</a:t>
+            </a:r>
+            <a:endParaRPr lang="en-US" sz="2300" dirty="0"/>
+          </a:p>
+        </p:txBody>
+      </p:sp>
+      <p:sp>
+        <p:nvSpPr>
+          <p:cNvPr id="28" name="Shape 25">
+            <a:extLst>
+              <a:ext uri="{FF2B5EF4-FFF2-40B4-BE49-F238E27FC236}">
+                <a16:creationId xmlns:a16="http://schemas.microsoft.com/office/drawing/2014/main" id="{2A381BE0-FEF2-AA9D-A954-DA8DA398BD2A}"/>
+              </a:ext>
+            </a:extLst>
+          </p:cNvPr>
+          <p:cNvSpPr/>
+          <p:nvPr/>
+        </p:nvSpPr>
+        <p:spPr>
+          <a:xfrm>
+            <a:off x="4873752" y="2834640"/>
+            <a:ext cx="1737360" cy="0"/>
+          </a:xfrm>
+          <a:prstGeom prst="line">
+            <a:avLst/>
+          </a:prstGeom>
+          <a:noFill/>
+          <a:ln w="11430">
+            <a:solidFill>
+              <a:srgbClr val="B7D5F5"/>
+            </a:solidFill>
+            <a:prstDash val="solid"/>
+          </a:ln>
+        </p:spPr>
+      </p:sp>
+      <p:sp>
+        <p:nvSpPr>
+          <p:cNvPr id="29" name="Text 26">
+            <a:extLst>
+              <a:ext uri="{FF2B5EF4-FFF2-40B4-BE49-F238E27FC236}">
+                <a16:creationId xmlns:a16="http://schemas.microsoft.com/office/drawing/2014/main" id="{5977D673-3259-0619-66F5-A07E9D230B97}"/>
+              </a:ext>
+            </a:extLst>
+          </p:cNvPr>
+          <p:cNvSpPr/>
+          <p:nvPr/>
+        </p:nvSpPr>
+        <p:spPr>
+          <a:xfrm>
+            <a:off x="4873752" y="2828061"/>
+            <a:ext cx="3799068" cy="1305027"/>
+          </a:xfrm>
+          <a:prstGeom prst="rect">
+            <a:avLst/>
+          </a:prstGeom>
+          <a:noFill/>
+          <a:ln/>
+        </p:spPr>
+        <p:txBody>
+          <a:bodyPr wrap="square" lIns="254" tIns="254" rIns="254" bIns="254" rtlCol="0" anchor="ctr">
+            <a:noAutofit/>
+          </a:bodyPr>
+          <a:lstStyle/>
+          <a:p>
+            <a:pPr marL="0" indent="0" algn="l">
+              <a:lnSpc>
+                <a:spcPct val="150000"/>
+              </a:lnSpc>
+              <a:buNone/>
+            </a:pPr>
+            <a:r>
+              <a:rPr lang="en-US" sz="1600" dirty="0" err="1">
+                <a:solidFill>
+                  <a:srgbClr val="111111"/>
+                </a:solidFill>
+                <a:latin typeface="Microsoft YaHei" pitchFamily="34" charset="0"/>
+                <a:ea typeface="Microsoft YaHei" pitchFamily="34" charset="-122"/>
+                <a:cs typeface="Microsoft YaHei" pitchFamily="34" charset="-120"/>
+              </a:rPr>
+              <a:t>形成任务空间与零空间结合的分层阻抗控制方案</a:t>
+            </a:r>
+            <a:endParaRPr lang="en-US" sz="1600" dirty="0">
+              <a:solidFill>
+                <a:srgbClr val="111111"/>
+              </a:solidFill>
+              <a:latin typeface="Microsoft YaHei" pitchFamily="34" charset="0"/>
+              <a:ea typeface="Microsoft YaHei" pitchFamily="34" charset="-122"/>
+              <a:cs typeface="Microsoft YaHei" pitchFamily="34" charset="-120"/>
+            </a:endParaRPr>
+          </a:p>
+          <a:p>
+            <a:pPr>
+              <a:lnSpc>
+                <a:spcPct val="150000"/>
+              </a:lnSpc>
+            </a:pPr>
+            <a:r>
+              <a:rPr lang="en-US" altLang="zh-CN" sz="1600" dirty="0" err="1">
+                <a:solidFill>
+                  <a:srgbClr val="111111"/>
+                </a:solidFill>
+                <a:latin typeface="Microsoft YaHei" pitchFamily="34" charset="0"/>
+                <a:ea typeface="Microsoft YaHei" pitchFamily="34" charset="-122"/>
+                <a:cs typeface="Microsoft YaHei" pitchFamily="34" charset="-120"/>
+              </a:rPr>
+              <a:t>提升接触作业柔顺性与运动稳定性</a:t>
+            </a:r>
+            <a:endParaRPr lang="en-US" altLang="zh-CN" sz="1600" dirty="0"/>
+          </a:p>
+        </p:txBody>
+      </p:sp>
+      <p:sp>
+        <p:nvSpPr>
+          <p:cNvPr id="30" name="Shape 32">
+            <a:extLst>
+              <a:ext uri="{FF2B5EF4-FFF2-40B4-BE49-F238E27FC236}">
+                <a16:creationId xmlns:a16="http://schemas.microsoft.com/office/drawing/2014/main" id="{AAD82D0C-18ED-5D5E-C3DF-550F61904DA0}"/>
+              </a:ext>
+            </a:extLst>
+          </p:cNvPr>
+          <p:cNvSpPr/>
+          <p:nvPr/>
+        </p:nvSpPr>
+        <p:spPr>
+          <a:xfrm>
+            <a:off x="292608" y="4261104"/>
+            <a:ext cx="4160520" cy="1938528"/>
+          </a:xfrm>
+          <a:prstGeom prst="roundRect">
+            <a:avLst>
+              <a:gd name="adj" fmla="val 5660"/>
+            </a:avLst>
+          </a:prstGeom>
+          <a:solidFill>
+            <a:srgbClr val="FFFFFF"/>
+          </a:solidFill>
+          <a:ln w="15240">
+            <a:solidFill>
+              <a:srgbClr val="B7D5F5"/>
+            </a:solidFill>
+            <a:prstDash val="solid"/>
+          </a:ln>
+        </p:spPr>
+      </p:sp>
+      <p:sp>
+        <p:nvSpPr>
+          <p:cNvPr id="31" name="Text 34">
+            <a:extLst>
+              <a:ext uri="{FF2B5EF4-FFF2-40B4-BE49-F238E27FC236}">
+                <a16:creationId xmlns:a16="http://schemas.microsoft.com/office/drawing/2014/main" id="{798F28DC-C27B-A1F7-374E-EED8366A8CF6}"/>
+              </a:ext>
+            </a:extLst>
+          </p:cNvPr>
+          <p:cNvSpPr/>
+          <p:nvPr/>
+        </p:nvSpPr>
+        <p:spPr>
+          <a:xfrm>
+            <a:off x="457200" y="4453128"/>
+            <a:ext cx="420624" cy="384048"/>
+          </a:xfrm>
+          <a:prstGeom prst="rect">
+            <a:avLst/>
+          </a:prstGeom>
+          <a:noFill/>
+          <a:ln/>
+        </p:spPr>
+        <p:txBody>
+          <a:bodyPr wrap="square" lIns="254" tIns="254" rIns="254" bIns="254" rtlCol="0" anchor="ctr">
+            <a:normAutofit/>
+          </a:bodyPr>
+          <a:lstStyle/>
+          <a:p>
+            <a:pPr marL="0" indent="0" algn="ctr">
+              <a:buNone/>
+            </a:pPr>
+            <a:r>
+              <a:rPr lang="en-US" sz="1800" b="1" dirty="0">
+                <a:solidFill>
+                  <a:srgbClr val="FFFFFF"/>
+                </a:solidFill>
+                <a:latin typeface="Microsoft YaHei" pitchFamily="34" charset="0"/>
+                <a:ea typeface="Microsoft YaHei" pitchFamily="34" charset="-122"/>
+                <a:cs typeface="Microsoft YaHei" pitchFamily="34" charset="-120"/>
+              </a:rPr>
+              <a:t>03</a:t>
+            </a:r>
+            <a:endParaRPr lang="en-US" sz="1800" dirty="0"/>
+          </a:p>
+        </p:txBody>
+      </p:sp>
+      <p:sp>
+        <p:nvSpPr>
+          <p:cNvPr id="32" name="Text 35">
+            <a:extLst>
+              <a:ext uri="{FF2B5EF4-FFF2-40B4-BE49-F238E27FC236}">
+                <a16:creationId xmlns:a16="http://schemas.microsoft.com/office/drawing/2014/main" id="{269EFF4A-618E-B0C8-8EA3-9144DD6C8CCD}"/>
+              </a:ext>
+            </a:extLst>
+          </p:cNvPr>
+          <p:cNvSpPr/>
+          <p:nvPr/>
+        </p:nvSpPr>
+        <p:spPr>
+          <a:xfrm>
+            <a:off x="877824" y="4469130"/>
+            <a:ext cx="1645920" cy="310896"/>
+          </a:xfrm>
+          <a:prstGeom prst="rect">
+            <a:avLst/>
+          </a:prstGeom>
+          <a:noFill/>
+          <a:ln/>
+        </p:spPr>
+        <p:txBody>
+          <a:bodyPr wrap="square" lIns="254" tIns="254" rIns="254" bIns="254" rtlCol="0" anchor="ctr">
+            <a:normAutofit fontScale="92500" lnSpcReduction="10000"/>
+          </a:bodyPr>
+          <a:lstStyle/>
+          <a:p>
+            <a:pPr marL="0" indent="0" algn="l">
+              <a:buNone/>
+            </a:pPr>
+            <a:r>
+              <a:rPr lang="en-US" sz="2300" b="1" dirty="0">
+                <a:solidFill>
+                  <a:srgbClr val="0A5AA4"/>
+                </a:solidFill>
+                <a:latin typeface="Microsoft YaHei" pitchFamily="34" charset="0"/>
+                <a:ea typeface="Microsoft YaHei" pitchFamily="34" charset="-122"/>
+                <a:cs typeface="Microsoft YaHei" pitchFamily="34" charset="-120"/>
+              </a:rPr>
+              <a:t>安全成果</a:t>
+            </a:r>
+            <a:endParaRPr lang="en-US" sz="2300" dirty="0"/>
+          </a:p>
+        </p:txBody>
+      </p:sp>
+      <p:sp>
+        <p:nvSpPr>
+          <p:cNvPr id="33" name="Shape 36">
+            <a:extLst>
+              <a:ext uri="{FF2B5EF4-FFF2-40B4-BE49-F238E27FC236}">
+                <a16:creationId xmlns:a16="http://schemas.microsoft.com/office/drawing/2014/main" id="{2CA2579B-4604-AD5F-2A5C-888FA795C0D7}"/>
+              </a:ext>
+            </a:extLst>
+          </p:cNvPr>
+          <p:cNvSpPr/>
+          <p:nvPr/>
+        </p:nvSpPr>
+        <p:spPr>
+          <a:xfrm>
+            <a:off x="475488" y="4965192"/>
+            <a:ext cx="1737360" cy="0"/>
+          </a:xfrm>
+          <a:prstGeom prst="line">
+            <a:avLst/>
+          </a:prstGeom>
+          <a:noFill/>
+          <a:ln w="11430">
+            <a:solidFill>
+              <a:srgbClr val="B7D5F5"/>
+            </a:solidFill>
+            <a:prstDash val="solid"/>
+          </a:ln>
+        </p:spPr>
+      </p:sp>
+      <p:sp>
+        <p:nvSpPr>
+          <p:cNvPr id="34" name="Text 37">
+            <a:extLst>
+              <a:ext uri="{FF2B5EF4-FFF2-40B4-BE49-F238E27FC236}">
+                <a16:creationId xmlns:a16="http://schemas.microsoft.com/office/drawing/2014/main" id="{2749AAD0-7BD7-C3E5-1A22-2E892C52D40B}"/>
+              </a:ext>
+            </a:extLst>
+          </p:cNvPr>
+          <p:cNvSpPr/>
+          <p:nvPr/>
+        </p:nvSpPr>
+        <p:spPr>
+          <a:xfrm>
+            <a:off x="475487" y="5221223"/>
+            <a:ext cx="3595141" cy="813677"/>
+          </a:xfrm>
+          <a:prstGeom prst="rect">
+            <a:avLst/>
+          </a:prstGeom>
+          <a:noFill/>
+          <a:ln/>
+        </p:spPr>
+        <p:txBody>
+          <a:bodyPr wrap="square" lIns="254" tIns="254" rIns="254" bIns="254" rtlCol="0" anchor="ctr">
+            <a:normAutofit/>
+          </a:bodyPr>
+          <a:lstStyle/>
+          <a:p>
+            <a:pPr marL="0" indent="0" algn="l">
+              <a:buNone/>
+            </a:pPr>
+            <a:r>
+              <a:rPr lang="en-US" sz="1600" dirty="0" err="1">
+                <a:solidFill>
+                  <a:srgbClr val="111111"/>
+                </a:solidFill>
+                <a:latin typeface="微软雅黑" panose="020B0503020204020204" pitchFamily="34" charset="-122"/>
+                <a:ea typeface="微软雅黑" panose="020B0503020204020204" pitchFamily="34" charset="-122"/>
+                <a:cs typeface="Microsoft YaHei" pitchFamily="34" charset="-120"/>
+              </a:rPr>
+              <a:t>构建碰撞检测与误报抑制方法</a:t>
+            </a:r>
+            <a:endParaRPr lang="en-US" sz="1600" dirty="0">
+              <a:solidFill>
+                <a:srgbClr val="111111"/>
+              </a:solidFill>
+              <a:latin typeface="微软雅黑" panose="020B0503020204020204" pitchFamily="34" charset="-122"/>
+              <a:ea typeface="微软雅黑" panose="020B0503020204020204" pitchFamily="34" charset="-122"/>
+              <a:cs typeface="Microsoft YaHei" pitchFamily="34" charset="-120"/>
+            </a:endParaRPr>
+          </a:p>
+          <a:p>
+            <a:pPr>
+              <a:lnSpc>
+                <a:spcPct val="250000"/>
+              </a:lnSpc>
+            </a:pPr>
+            <a:r>
+              <a:rPr lang="en-US" altLang="zh-CN" sz="1600" dirty="0" err="1">
+                <a:solidFill>
+                  <a:srgbClr val="111111"/>
+                </a:solidFill>
+                <a:latin typeface="微软雅黑" panose="020B0503020204020204" pitchFamily="34" charset="-122"/>
+                <a:ea typeface="微软雅黑" panose="020B0503020204020204" pitchFamily="34" charset="-122"/>
+                <a:cs typeface="Microsoft YaHei" pitchFamily="34" charset="-120"/>
+              </a:rPr>
+              <a:t>提高非预期接触识别可靠性</a:t>
+            </a:r>
+            <a:endParaRPr lang="en-US" altLang="zh-CN" sz="1600" dirty="0">
+              <a:latin typeface="微软雅黑" panose="020B0503020204020204" pitchFamily="34" charset="-122"/>
+              <a:ea typeface="微软雅黑" panose="020B0503020204020204" pitchFamily="34" charset="-122"/>
+            </a:endParaRPr>
+          </a:p>
+        </p:txBody>
+      </p:sp>
+      <p:sp>
+        <p:nvSpPr>
+          <p:cNvPr id="35" name="Shape 43">
+            <a:extLst>
+              <a:ext uri="{FF2B5EF4-FFF2-40B4-BE49-F238E27FC236}">
+                <a16:creationId xmlns:a16="http://schemas.microsoft.com/office/drawing/2014/main" id="{1221531C-71F9-691B-813B-8519DB830030}"/>
+              </a:ext>
+            </a:extLst>
+          </p:cNvPr>
+          <p:cNvSpPr/>
+          <p:nvPr/>
+        </p:nvSpPr>
+        <p:spPr>
+          <a:xfrm>
+            <a:off x="4690872" y="4261104"/>
+            <a:ext cx="4160520" cy="1938528"/>
+          </a:xfrm>
+          <a:prstGeom prst="roundRect">
+            <a:avLst>
+              <a:gd name="adj" fmla="val 5660"/>
+            </a:avLst>
+          </a:prstGeom>
+          <a:solidFill>
+            <a:srgbClr val="FFFFFF"/>
+          </a:solidFill>
+          <a:ln w="15240">
+            <a:solidFill>
+              <a:srgbClr val="B7D5F5"/>
+            </a:solidFill>
+            <a:prstDash val="solid"/>
+          </a:ln>
+        </p:spPr>
+        <p:txBody>
+          <a:bodyPr/>
+          <a:lstStyle/>
+          <a:p>
+            <a:endParaRPr lang="zh-CN" altLang="en-US" dirty="0"/>
+          </a:p>
+        </p:txBody>
+      </p:sp>
+      <p:sp>
+        <p:nvSpPr>
+          <p:cNvPr id="36" name="Text 45">
+            <a:extLst>
+              <a:ext uri="{FF2B5EF4-FFF2-40B4-BE49-F238E27FC236}">
+                <a16:creationId xmlns:a16="http://schemas.microsoft.com/office/drawing/2014/main" id="{31C6F0FB-D3CA-A752-EF9A-9F7D46F54397}"/>
+              </a:ext>
+            </a:extLst>
+          </p:cNvPr>
+          <p:cNvSpPr/>
+          <p:nvPr/>
+        </p:nvSpPr>
+        <p:spPr>
+          <a:xfrm>
+            <a:off x="4855464" y="4453128"/>
+            <a:ext cx="420624" cy="384048"/>
+          </a:xfrm>
+          <a:prstGeom prst="rect">
+            <a:avLst/>
+          </a:prstGeom>
+          <a:noFill/>
+          <a:ln/>
+        </p:spPr>
+        <p:txBody>
+          <a:bodyPr wrap="square" lIns="254" tIns="254" rIns="254" bIns="254" rtlCol="0" anchor="ctr">
+            <a:normAutofit/>
+          </a:bodyPr>
+          <a:lstStyle/>
+          <a:p>
+            <a:pPr marL="0" indent="0" algn="ctr">
+              <a:buNone/>
+            </a:pPr>
+            <a:r>
+              <a:rPr lang="en-US" sz="1800" b="1" dirty="0">
+                <a:solidFill>
+                  <a:srgbClr val="FFFFFF"/>
+                </a:solidFill>
+                <a:latin typeface="Microsoft YaHei" pitchFamily="34" charset="0"/>
+                <a:ea typeface="Microsoft YaHei" pitchFamily="34" charset="-122"/>
+                <a:cs typeface="Microsoft YaHei" pitchFamily="34" charset="-120"/>
+              </a:rPr>
+              <a:t>04</a:t>
+            </a:r>
+            <a:endParaRPr lang="en-US" sz="1800" dirty="0"/>
+          </a:p>
+        </p:txBody>
+      </p:sp>
+      <p:sp>
+        <p:nvSpPr>
+          <p:cNvPr id="37" name="Text 46">
+            <a:extLst>
+              <a:ext uri="{FF2B5EF4-FFF2-40B4-BE49-F238E27FC236}">
+                <a16:creationId xmlns:a16="http://schemas.microsoft.com/office/drawing/2014/main" id="{289B0C68-74FC-0A7E-C555-ABF99D9543AB}"/>
+              </a:ext>
+            </a:extLst>
+          </p:cNvPr>
+          <p:cNvSpPr/>
+          <p:nvPr/>
+        </p:nvSpPr>
+        <p:spPr>
+          <a:xfrm>
+            <a:off x="5234940" y="4473981"/>
+            <a:ext cx="1645920" cy="310896"/>
+          </a:xfrm>
+          <a:prstGeom prst="rect">
+            <a:avLst/>
+          </a:prstGeom>
+          <a:noFill/>
+          <a:ln/>
+        </p:spPr>
+        <p:txBody>
+          <a:bodyPr wrap="square" lIns="254" tIns="254" rIns="254" bIns="254" rtlCol="0" anchor="ctr">
+            <a:normAutofit fontScale="92500" lnSpcReduction="10000"/>
+          </a:bodyPr>
+          <a:lstStyle/>
+          <a:p>
+            <a:pPr marL="0" indent="0" algn="l">
+              <a:buNone/>
+            </a:pPr>
+            <a:r>
+              <a:rPr lang="en-US" sz="2300" b="1" dirty="0">
+                <a:solidFill>
+                  <a:srgbClr val="0A5AA4"/>
+                </a:solidFill>
+                <a:latin typeface="Microsoft YaHei" pitchFamily="34" charset="0"/>
+                <a:ea typeface="Microsoft YaHei" pitchFamily="34" charset="-122"/>
+                <a:cs typeface="Microsoft YaHei" pitchFamily="34" charset="-120"/>
+              </a:rPr>
+              <a:t>验证成果</a:t>
+            </a:r>
+            <a:endParaRPr lang="en-US" sz="2300" dirty="0"/>
+          </a:p>
+        </p:txBody>
+      </p:sp>
+      <p:sp>
+        <p:nvSpPr>
+          <p:cNvPr id="38" name="Shape 47">
+            <a:extLst>
+              <a:ext uri="{FF2B5EF4-FFF2-40B4-BE49-F238E27FC236}">
+                <a16:creationId xmlns:a16="http://schemas.microsoft.com/office/drawing/2014/main" id="{D5473505-F890-F401-B3CD-DF3B0ECF012B}"/>
+              </a:ext>
+            </a:extLst>
+          </p:cNvPr>
+          <p:cNvSpPr/>
+          <p:nvPr/>
+        </p:nvSpPr>
+        <p:spPr>
+          <a:xfrm>
+            <a:off x="4873752" y="4965192"/>
+            <a:ext cx="1737360" cy="0"/>
+          </a:xfrm>
+          <a:prstGeom prst="line">
+            <a:avLst/>
+          </a:prstGeom>
+          <a:noFill/>
+          <a:ln w="11430">
+            <a:solidFill>
+              <a:srgbClr val="B7D5F5"/>
+            </a:solidFill>
+            <a:prstDash val="solid"/>
+          </a:ln>
+        </p:spPr>
+      </p:sp>
+      <p:sp>
+        <p:nvSpPr>
+          <p:cNvPr id="39" name="Text 48">
+            <a:extLst>
+              <a:ext uri="{FF2B5EF4-FFF2-40B4-BE49-F238E27FC236}">
+                <a16:creationId xmlns:a16="http://schemas.microsoft.com/office/drawing/2014/main" id="{C74304D5-EBC0-EB57-A337-36678A2B06FD}"/>
+              </a:ext>
+            </a:extLst>
+          </p:cNvPr>
+          <p:cNvSpPr/>
+          <p:nvPr/>
+        </p:nvSpPr>
+        <p:spPr>
+          <a:xfrm>
+            <a:off x="4855464" y="5093209"/>
+            <a:ext cx="3664458" cy="964078"/>
+          </a:xfrm>
+          <a:prstGeom prst="rect">
+            <a:avLst/>
+          </a:prstGeom>
+          <a:noFill/>
+          <a:ln/>
+        </p:spPr>
+        <p:txBody>
+          <a:bodyPr wrap="square" lIns="254" tIns="254" rIns="254" bIns="254" rtlCol="0" anchor="ctr">
+            <a:normAutofit fontScale="92500" lnSpcReduction="10000"/>
+          </a:bodyPr>
+          <a:lstStyle/>
+          <a:p>
+            <a:pPr marL="0" indent="0" algn="l">
+              <a:lnSpc>
+                <a:spcPct val="150000"/>
+              </a:lnSpc>
+              <a:buNone/>
+            </a:pPr>
+            <a:r>
+              <a:rPr lang="en-US" sz="1600" dirty="0" err="1">
+                <a:solidFill>
+                  <a:srgbClr val="111111"/>
+                </a:solidFill>
+                <a:latin typeface="Microsoft YaHei" pitchFamily="34" charset="0"/>
+                <a:ea typeface="Microsoft YaHei" pitchFamily="34" charset="-122"/>
+                <a:cs typeface="Microsoft YaHei" pitchFamily="34" charset="-120"/>
+              </a:rPr>
+              <a:t>完成仿真与实物实验验证</a:t>
+            </a:r>
+            <a:endParaRPr lang="en-US" sz="1600" dirty="0">
+              <a:solidFill>
+                <a:srgbClr val="111111"/>
+              </a:solidFill>
+              <a:latin typeface="Microsoft YaHei" pitchFamily="34" charset="0"/>
+              <a:ea typeface="Microsoft YaHei" pitchFamily="34" charset="-122"/>
+              <a:cs typeface="Microsoft YaHei" pitchFamily="34" charset="-120"/>
+            </a:endParaRPr>
+          </a:p>
+          <a:p>
+            <a:pPr>
+              <a:lnSpc>
+                <a:spcPct val="150000"/>
+              </a:lnSpc>
+            </a:pPr>
+            <a:r>
+              <a:rPr lang="en-US" altLang="zh-CN" sz="1600" dirty="0" err="1">
+                <a:solidFill>
+                  <a:srgbClr val="111111"/>
+                </a:solidFill>
+                <a:latin typeface="Microsoft YaHei" pitchFamily="34" charset="0"/>
+                <a:ea typeface="Microsoft YaHei" pitchFamily="34" charset="-122"/>
+                <a:cs typeface="Microsoft YaHei" pitchFamily="34" charset="-120"/>
+              </a:rPr>
+              <a:t>形成实验数据、对比分析结果和硕士学位论文</a:t>
+            </a:r>
+            <a:endParaRPr lang="en-US" altLang="zh-CN" sz="1600" dirty="0"/>
+          </a:p>
+        </p:txBody>
+      </p:sp>
+      <p:sp>
+        <p:nvSpPr>
+          <p:cNvPr id="40" name="文本框 39">
+            <a:extLst>
+              <a:ext uri="{FF2B5EF4-FFF2-40B4-BE49-F238E27FC236}">
+                <a16:creationId xmlns:a16="http://schemas.microsoft.com/office/drawing/2014/main" id="{0D33505F-02B7-3FEC-24EF-A57C9BF56991}"/>
+              </a:ext>
+            </a:extLst>
+          </p:cNvPr>
+          <p:cNvSpPr txBox="1"/>
+          <p:nvPr/>
+        </p:nvSpPr>
+        <p:spPr>
+          <a:xfrm>
+            <a:off x="187898" y="957930"/>
+            <a:ext cx="8924232" cy="960776"/>
+          </a:xfrm>
+          <a:prstGeom prst="rect">
+            <a:avLst/>
+          </a:prstGeom>
+          <a:noFill/>
+        </p:spPr>
+        <p:txBody>
+          <a:bodyPr wrap="square" rtlCol="0">
+            <a:spAutoFit/>
+          </a:bodyPr>
+          <a:lstStyle/>
+          <a:p>
+            <a:pPr marL="285750" indent="-285750">
+              <a:lnSpc>
+                <a:spcPct val="150000"/>
+              </a:lnSpc>
+              <a:buFont typeface="Wingdings" panose="05000000000000000000" pitchFamily="2" charset="2"/>
+              <a:buChar char="p"/>
+            </a:pPr>
+            <a:r>
+              <a:rPr lang="en-US" altLang="zh-CN" sz="2000" dirty="0" err="1">
+                <a:solidFill>
+                  <a:srgbClr val="111111"/>
+                </a:solidFill>
+                <a:latin typeface="Microsoft YaHei" pitchFamily="34" charset="0"/>
+                <a:ea typeface="Microsoft YaHei" pitchFamily="34" charset="-122"/>
+                <a:cs typeface="Microsoft YaHei" pitchFamily="34" charset="-120"/>
+              </a:rPr>
+              <a:t>围绕动力学参数辨识、分层阻抗控制与碰撞检测误报抑制，形成可验证、可交付的研究成果</a:t>
+            </a:r>
+            <a:r>
+              <a:rPr lang="en-US" altLang="zh-CN" sz="2000" dirty="0">
+                <a:solidFill>
+                  <a:srgbClr val="111111"/>
+                </a:solidFill>
+                <a:latin typeface="Microsoft YaHei" pitchFamily="34" charset="0"/>
+                <a:ea typeface="Microsoft YaHei" pitchFamily="34" charset="-122"/>
+                <a:cs typeface="Microsoft YaHei" pitchFamily="34" charset="-120"/>
+              </a:rPr>
+              <a:t>。</a:t>
+            </a:r>
+            <a:endParaRPr lang="en-US" altLang="zh-CN" sz="2000" dirty="0"/>
+          </a:p>
+        </p:txBody>
+      </p:sp>
+    </p:spTree>
+    <p:extLst>
+      <p:ext uri="{BB962C8B-B14F-4D97-AF65-F5344CB8AC3E}">
+        <p14:creationId xmlns:p14="http://schemas.microsoft.com/office/powerpoint/2010/main" val="1297355807"/>
       </p:ext>
     </p:extLst>
   </p:cSld>
